--- a/docs/slides/grounded-visual-inspector-presentation.pptx
+++ b/docs/slides/grounded-visual-inspector-presentation.pptx
@@ -2,17 +2,17 @@
 <file path=ppt/presentation.xml><?xml version="1.0" encoding="utf-8"?>
 <p:presentation xmlns:p="http://schemas.openxmlformats.org/presentationml/2006/main">
   <p:sldMasterIdLst>
-    <p:sldMasterId xmlns:r="http://schemas.openxmlformats.org/officeDocument/2006/relationships" id="2147483648" r:id="R1676fb8a5e604543"/>
+    <p:sldMasterId xmlns:r="http://schemas.openxmlformats.org/officeDocument/2006/relationships" id="2147483648" r:id="R6ddaa520c8a740c8"/>
   </p:sldMasterIdLst>
   <p:notesMasterIdLst>
-    <p:notesMasterId xmlns:r="http://schemas.openxmlformats.org/officeDocument/2006/relationships" r:id="R7a5e00487b924379"/>
+    <p:notesMasterId xmlns:r="http://schemas.openxmlformats.org/officeDocument/2006/relationships" r:id="R8e5fd501886045a0"/>
   </p:notesMasterIdLst>
   <p:sldIdLst>
-    <p:sldId xmlns:r="http://schemas.openxmlformats.org/officeDocument/2006/relationships" id="256" r:id="Redc9c300b9b34fc5"/>
-    <p:sldId xmlns:r="http://schemas.openxmlformats.org/officeDocument/2006/relationships" id="257" r:id="R709067edaf6c45e6"/>
-    <p:sldId xmlns:r="http://schemas.openxmlformats.org/officeDocument/2006/relationships" id="258" r:id="R033058ae504b4d14"/>
-    <p:sldId xmlns:r="http://schemas.openxmlformats.org/officeDocument/2006/relationships" id="259" r:id="Rff2ae79fe6a2474a"/>
-    <p:sldId xmlns:r="http://schemas.openxmlformats.org/officeDocument/2006/relationships" id="260" r:id="R84da1fc9adfc49c9"/>
+    <p:sldId xmlns:r="http://schemas.openxmlformats.org/officeDocument/2006/relationships" id="256" r:id="Ra4b78b439e8a4f9e"/>
+    <p:sldId xmlns:r="http://schemas.openxmlformats.org/officeDocument/2006/relationships" id="257" r:id="R745de43b690c481d"/>
+    <p:sldId xmlns:r="http://schemas.openxmlformats.org/officeDocument/2006/relationships" id="258" r:id="R237224f5d4424b2c"/>
+    <p:sldId xmlns:r="http://schemas.openxmlformats.org/officeDocument/2006/relationships" id="259" r:id="Rfb6120cc61df4060"/>
+    <p:sldId xmlns:r="http://schemas.openxmlformats.org/officeDocument/2006/relationships" id="260" r:id="R52961937cbba4f69"/>
   </p:sldIdLst>
   <p:sldSz cx="12192000" cy="6858000"/>
   <p:notesSz cx="6858000" cy="9144000"/>
@@ -3149,12 +3149,12 @@
   </p:cSld>
   <p:clrMap bg1="lt1" tx1="dk1" bg2="lt2" tx2="dk2" accent1="accent1" accent2="accent2" accent3="accent3" accent4="accent4" accent5="accent5" accent6="accent6" hlink="hlink" folHlink="folHlink"/>
   <p:sldLayoutIdLst>
-    <p:sldLayoutId xmlns:r="http://schemas.openxmlformats.org/officeDocument/2006/relationships" id="2147483649" r:id="R9621eb19e05b48b8"/>
-    <p:sldLayoutId xmlns:r="http://schemas.openxmlformats.org/officeDocument/2006/relationships" id="2147483650" r:id="Rc9b7970ba8b746c9"/>
-    <p:sldLayoutId xmlns:r="http://schemas.openxmlformats.org/officeDocument/2006/relationships" id="2147483651" r:id="Rffb18b4032df4eb7"/>
-    <p:sldLayoutId xmlns:r="http://schemas.openxmlformats.org/officeDocument/2006/relationships" id="2147483652" r:id="R863f3423cdbd4e89"/>
-    <p:sldLayoutId xmlns:r="http://schemas.openxmlformats.org/officeDocument/2006/relationships" id="2147483653" r:id="R778d870b4b8649c1"/>
-    <p:sldLayoutId xmlns:r="http://schemas.openxmlformats.org/officeDocument/2006/relationships" id="2147483654" r:id="Rca2e9a50f6ac4cf1"/>
+    <p:sldLayoutId xmlns:r="http://schemas.openxmlformats.org/officeDocument/2006/relationships" id="2147483649" r:id="Ree7f18909e834ffd"/>
+    <p:sldLayoutId xmlns:r="http://schemas.openxmlformats.org/officeDocument/2006/relationships" id="2147483650" r:id="R71850e10446040f8"/>
+    <p:sldLayoutId xmlns:r="http://schemas.openxmlformats.org/officeDocument/2006/relationships" id="2147483651" r:id="Rd7b7c9aaa5624dc7"/>
+    <p:sldLayoutId xmlns:r="http://schemas.openxmlformats.org/officeDocument/2006/relationships" id="2147483652" r:id="Rd92dc65f0c2849f6"/>
+    <p:sldLayoutId xmlns:r="http://schemas.openxmlformats.org/officeDocument/2006/relationships" id="2147483653" r:id="Rc1efc599d4274675"/>
+    <p:sldLayoutId xmlns:r="http://schemas.openxmlformats.org/officeDocument/2006/relationships" id="2147483654" r:id="Ra6a2bb6248654d89"/>
   </p:sldLayoutIdLst>
   <p:txStyles>
     <p:titleStyle>
@@ -3700,7 +3700,7 @@
                 <a:ea typeface="Noto Sans CJK KR"/>
                 <a:cs typeface="Noto Sans CJK KR"/>
               </a:rPr>
-              <a:t>전체 시도 정확도</a:t>
+              <a:t>A 전체 에이전트의 52건 처리 결과</a:t>
             </a:r>
           </a:p>
         </c:rich>
@@ -3725,59 +3725,124 @@
     </c:title>
     <c:plotArea>
       <c:barChart>
-        <c:barDir val="col"/>
-        <c:grouping val="clustered"/>
-        <c:varyColors val="1"/>
+        <c:barDir val="bar"/>
+        <c:grouping val="stacked"/>
+        <c:varyColors val="0"/>
         <c:ser>
           <c:idx val="0"/>
           <c:order val="0"/>
           <c:tx>
-            <c:v>Accuracy</c:v>
+            <c:v>정답</c:v>
           </c:tx>
           <c:spPr>
             <a:solidFill xmlns:a="http://schemas.openxmlformats.org/drawingml/2006/main">
-              <a:srgbClr val="9B87F5"/>
+              <a:srgbClr val="43D19E"/>
             </a:solidFill>
           </c:spPr>
           <c:invertIfNegative val="0"/>
           <c:cat>
             <c:strRef>
-              <c:f>'Chart Data'!$A$2:$A$3</c:f>
+              <c:f>'Chart Data'!$A$2:$A$2</c:f>
               <c:strCache>
-                <c:ptCount val="2"/>
+                <c:ptCount val="1"/>
                 <c:pt idx="0">
-                  <c:v>B0  단독 VLM</c:v>
-                </c:pt>
-                <c:pt idx="1">
-                  <c:v>A  전체 에이전트</c:v>
+                  <c:v>전체 에이전트 A</c:v>
                 </c:pt>
               </c:strCache>
             </c:strRef>
           </c:cat>
           <c:val>
             <c:numRef>
-              <c:f>'Chart Data'!$B$2:$B$3</c:f>
+              <c:f>'Chart Data'!$B$2:$B$2</c:f>
               <c:numCache>
-                <c:formatCode>0"%"</c:formatCode>
-                <c:ptCount val="2"/>
+                <c:formatCode>General</c:formatCode>
+                <c:ptCount val="1"/>
                 <c:pt idx="0">
-                  <c:v>28.85</c:v>
+                  <c:v>6</c:v>
                 </c:pt>
-                <c:pt idx="1">
-                  <c:v>11.54</c:v>
+              </c:numCache>
+            </c:numRef>
+          </c:val>
+        </c:ser>
+        <c:ser>
+          <c:idx val="1"/>
+          <c:order val="1"/>
+          <c:tx>
+            <c:v>오답</c:v>
+          </c:tx>
+          <c:spPr>
+            <a:solidFill xmlns:a="http://schemas.openxmlformats.org/drawingml/2006/main">
+              <a:srgbClr val="FF6B6B"/>
+            </a:solidFill>
+          </c:spPr>
+          <c:invertIfNegative val="0"/>
+          <c:cat>
+            <c:strRef>
+              <c:f>'Chart Data'!$C$2:$C$2</c:f>
+              <c:strCache>
+                <c:ptCount val="1"/>
+                <c:pt idx="0">
+                  <c:v>전체 에이전트 A</c:v>
+                </c:pt>
+              </c:strCache>
+            </c:strRef>
+          </c:cat>
+          <c:val>
+            <c:numRef>
+              <c:f>'Chart Data'!$D$2:$D$2</c:f>
+              <c:numCache>
+                <c:formatCode>General</c:formatCode>
+                <c:ptCount val="1"/>
+                <c:pt idx="0">
+                  <c:v>5</c:v>
+                </c:pt>
+              </c:numCache>
+            </c:numRef>
+          </c:val>
+        </c:ser>
+        <c:ser>
+          <c:idx val="2"/>
+          <c:order val="2"/>
+          <c:tx>
+            <c:v>ABSTAIN</c:v>
+          </c:tx>
+          <c:spPr>
+            <a:solidFill xmlns:a="http://schemas.openxmlformats.org/drawingml/2006/main">
+              <a:srgbClr val="F5B84B"/>
+            </a:solidFill>
+          </c:spPr>
+          <c:invertIfNegative val="0"/>
+          <c:cat>
+            <c:strRef>
+              <c:f>'Chart Data'!$E$2:$E$2</c:f>
+              <c:strCache>
+                <c:ptCount val="1"/>
+                <c:pt idx="0">
+                  <c:v>전체 에이전트 A</c:v>
+                </c:pt>
+              </c:strCache>
+            </c:strRef>
+          </c:cat>
+          <c:val>
+            <c:numRef>
+              <c:f>'Chart Data'!$F$2:$F$2</c:f>
+              <c:numCache>
+                <c:formatCode>General</c:formatCode>
+                <c:ptCount val="1"/>
+                <c:pt idx="0">
+                  <c:v>41</c:v>
                 </c:pt>
               </c:numCache>
             </c:numRef>
           </c:val>
         </c:ser>
         <c:dLbls>
-          <c:numFmt formatCode="0.00&quot;%&quot;" sourceLinked="0"/>
           <c:txPr>
             <a:bodyPr xmlns:a="http://schemas.openxmlformats.org/drawingml/2006/main" anchorCtr="1"/>
             <a:lstStyle xmlns:a="http://schemas.openxmlformats.org/drawingml/2006/main"/>
             <a:p xmlns:a="http://schemas.openxmlformats.org/drawingml/2006/main">
               <a:pPr>
-                <a:defRPr sz="1125" b="1">
+                <a:defRPr sz="1200" b="1">
                   <a:solidFill>
                     <a:srgbClr val="F8FAFC"/>
                   </a:solidFill>
@@ -3788,7 +3853,7 @@
               </a:pPr>
             </a:p>
           </c:txPr>
-          <c:dLblPos val="outEnd"/>
+          <c:dLblPos val="ctr"/>
           <c:showLegendKey val="0"/>
           <c:showVal val="1"/>
           <c:showCatName val="0"/>
@@ -3797,12 +3862,59 @@
           <c:showBubbleSize val="0"/>
           <c:showLeaderLines val="0"/>
         </c:dLbls>
-        <c:gapWidth val="90"/>
+        <c:gapWidth val="65"/>
+        <c:overlap val="100"/>
         <c:axId val="48650112"/>
         <c:axId val="48672768"/>
       </c:barChart>
       <c:catAx>
         <c:axId val="48650112"/>
+        <c:scaling>
+          <c:orientation val="minMax"/>
+        </c:scaling>
+        <c:delete val="0"/>
+        <c:axPos val="l"/>
+        <c:majorGridlines>
+          <c:spPr>
+            <a:ln xmlns:a="http://schemas.openxmlformats.org/drawingml/2006/main" w="9525">
+              <a:solidFill>
+                <a:srgbClr val="334155"/>
+              </a:solidFill>
+              <a:prstDash val="solid"/>
+            </a:ln>
+          </c:spPr>
+        </c:majorGridlines>
+        <c:numFmt formatCode="General"/>
+        <c:majorTickMark val="none"/>
+        <c:minorTickMark val="none"/>
+        <c:spPr>
+          <a:ln xmlns:a="http://schemas.openxmlformats.org/drawingml/2006/main" w="9525">
+            <a:solidFill>
+              <a:srgbClr val="334155"/>
+            </a:solidFill>
+            <a:prstDash val="solid"/>
+          </a:ln>
+        </c:spPr>
+        <c:txPr>
+          <a:bodyPr xmlns:a="http://schemas.openxmlformats.org/drawingml/2006/main" anchorCtr="1"/>
+          <a:lstStyle xmlns:a="http://schemas.openxmlformats.org/drawingml/2006/main"/>
+          <a:p xmlns:a="http://schemas.openxmlformats.org/drawingml/2006/main">
+            <a:pPr>
+              <a:defRPr sz="900">
+                <a:solidFill>
+                  <a:srgbClr val="A8B3C7"/>
+                </a:solidFill>
+                <a:latin typeface="Noto Sans CJK KR"/>
+                <a:ea typeface="Noto Sans CJK KR"/>
+                <a:cs typeface="Noto Sans CJK KR"/>
+              </a:defRPr>
+            </a:pPr>
+          </a:p>
+        </c:txPr>
+        <c:crossAx val="48672768"/>
+      </c:catAx>
+      <c:valAx>
+        <c:axId val="48672768"/>
         <c:scaling>
           <c:orientation val="minMax"/>
         </c:scaling>
@@ -3824,55 +3936,7 @@
           <a:lstStyle xmlns:a="http://schemas.openxmlformats.org/drawingml/2006/main"/>
           <a:p xmlns:a="http://schemas.openxmlformats.org/drawingml/2006/main">
             <a:pPr>
-              <a:defRPr sz="900" b="1">
-                <a:solidFill>
-                  <a:srgbClr val="A8B3C7"/>
-                </a:solidFill>
-                <a:latin typeface="Noto Sans CJK KR"/>
-                <a:ea typeface="Noto Sans CJK KR"/>
-                <a:cs typeface="Noto Sans CJK KR"/>
-              </a:defRPr>
-            </a:pPr>
-          </a:p>
-        </c:txPr>
-        <c:crossAx val="48672768"/>
-      </c:catAx>
-      <c:valAx>
-        <c:axId val="48672768"/>
-        <c:scaling>
-          <c:orientation val="minMax"/>
-          <c:max val="40"/>
-          <c:min val="0"/>
-        </c:scaling>
-        <c:delete val="0"/>
-        <c:axPos val="l"/>
-        <c:majorGridlines>
-          <c:spPr>
-            <a:ln xmlns:a="http://schemas.openxmlformats.org/drawingml/2006/main" w="9525">
-              <a:solidFill>
-                <a:srgbClr val="334155"/>
-              </a:solidFill>
-              <a:prstDash val="solid"/>
-            </a:ln>
-          </c:spPr>
-        </c:majorGridlines>
-        <c:numFmt formatCode="0&quot;%&quot;"/>
-        <c:majorTickMark val="none"/>
-        <c:minorTickMark val="none"/>
-        <c:spPr>
-          <a:ln xmlns:a="http://schemas.openxmlformats.org/drawingml/2006/main" w="9525">
-            <a:solidFill>
-              <a:srgbClr val="334155"/>
-            </a:solidFill>
-            <a:prstDash val="solid"/>
-          </a:ln>
-        </c:spPr>
-        <c:txPr>
-          <a:bodyPr xmlns:a="http://schemas.openxmlformats.org/drawingml/2006/main" anchorCtr="1"/>
-          <a:lstStyle xmlns:a="http://schemas.openxmlformats.org/drawingml/2006/main"/>
-          <a:p xmlns:a="http://schemas.openxmlformats.org/drawingml/2006/main">
-            <a:pPr>
-              <a:defRPr sz="900">
+              <a:defRPr sz="975" b="1">
                 <a:solidFill>
                   <a:srgbClr val="A8B3C7"/>
                 </a:solidFill>
@@ -3885,29 +3949,48 @@
         </c:txPr>
         <c:crossAx val="48650112"/>
         <c:crossBetween val="between"/>
-        <c:majorUnit val="10"/>
       </c:valAx>
       <c:spPr>
         <a:solidFill xmlns:a="http://schemas.openxmlformats.org/drawingml/2006/main">
-          <a:srgbClr val="141B2D"/>
+          <a:srgbClr val="0B1020"/>
         </a:solidFill>
         <a:ln xmlns:a="http://schemas.openxmlformats.org/drawingml/2006/main" w="0">
           <a:solidFill>
-            <a:srgbClr val="141B2D"/>
+            <a:srgbClr val="0B1020"/>
           </a:solidFill>
           <a:prstDash val="solid"/>
         </a:ln>
       </c:spPr>
     </c:plotArea>
+    <c:legend>
+      <c:legendPos val="b"/>
+      <c:overlay val="0"/>
+      <c:txPr>
+        <a:bodyPr xmlns:a="http://schemas.openxmlformats.org/drawingml/2006/main" anchorCtr="1"/>
+        <a:lstStyle xmlns:a="http://schemas.openxmlformats.org/drawingml/2006/main"/>
+        <a:p xmlns:a="http://schemas.openxmlformats.org/drawingml/2006/main">
+          <a:pPr>
+            <a:defRPr sz="975">
+              <a:solidFill>
+                <a:srgbClr val="A8B3C7"/>
+              </a:solidFill>
+              <a:latin typeface="Noto Sans CJK KR"/>
+              <a:ea typeface="Noto Sans CJK KR"/>
+              <a:cs typeface="Noto Sans CJK KR"/>
+            </a:defRPr>
+          </a:pPr>
+        </a:p>
+      </c:txPr>
+    </c:legend>
     <c:plotVisOnly val="1"/>
   </c:chart>
   <c:spPr>
     <a:solidFill xmlns:a="http://schemas.openxmlformats.org/drawingml/2006/main">
-      <a:srgbClr val="141B2D"/>
+      <a:srgbClr val="0B1020"/>
     </a:solidFill>
     <a:ln xmlns:a="http://schemas.openxmlformats.org/drawingml/2006/main" w="0">
       <a:solidFill>
-        <a:srgbClr val="141B2D"/>
+        <a:srgbClr val="0B1020"/>
       </a:solidFill>
       <a:prstDash val="solid"/>
     </a:ln>
@@ -4076,6 +4159,7 @@
               </a:defRPr>
             </a:defPPr>
             <a:lvl1pPr>
+              <a:buNone/>
               <a:defRPr sz="1125" b="1">
                 <a:solidFill>
                   <a:srgbClr val="9B87F5"/>
@@ -4086,6 +4170,7 @@
               </a:defRPr>
             </a:lvl1pPr>
             <a:lvl2pPr>
+              <a:buNone/>
               <a:defRPr sz="1125" b="1">
                 <a:solidFill>
                   <a:srgbClr val="9B87F5"/>
@@ -4096,6 +4181,7 @@
               </a:defRPr>
             </a:lvl2pPr>
             <a:lvl3pPr>
+              <a:buNone/>
               <a:defRPr sz="1125" b="1">
                 <a:solidFill>
                   <a:srgbClr val="9B87F5"/>
@@ -4106,6 +4192,7 @@
               </a:defRPr>
             </a:lvl3pPr>
             <a:lvl4pPr>
+              <a:buNone/>
               <a:defRPr sz="1125" b="1">
                 <a:solidFill>
                   <a:srgbClr val="9B87F5"/>
@@ -4116,6 +4203,7 @@
               </a:defRPr>
             </a:lvl4pPr>
             <a:lvl5pPr>
+              <a:buNone/>
               <a:defRPr sz="1125" b="1">
                 <a:solidFill>
                   <a:srgbClr val="9B87F5"/>
@@ -4126,6 +4214,7 @@
               </a:defRPr>
             </a:lvl5pPr>
             <a:lvl6pPr>
+              <a:buNone/>
               <a:defRPr sz="1125" b="1">
                 <a:solidFill>
                   <a:srgbClr val="9B87F5"/>
@@ -4136,6 +4225,7 @@
               </a:defRPr>
             </a:lvl6pPr>
             <a:lvl7pPr>
+              <a:buNone/>
               <a:defRPr sz="1125" b="1">
                 <a:solidFill>
                   <a:srgbClr val="9B87F5"/>
@@ -4146,6 +4236,7 @@
               </a:defRPr>
             </a:lvl7pPr>
             <a:lvl8pPr>
+              <a:buNone/>
               <a:defRPr sz="1125" b="1">
                 <a:solidFill>
                   <a:srgbClr val="9B87F5"/>
@@ -4156,6 +4247,7 @@
               </a:defRPr>
             </a:lvl8pPr>
             <a:lvl9pPr>
+              <a:buNone/>
               <a:defRPr sz="1125" b="1">
                 <a:solidFill>
                   <a:srgbClr val="9B87F5"/>
@@ -4168,6 +4260,7 @@
           </a:lstStyle>
           <a:p xmlns:a="http://schemas.openxmlformats.org/drawingml/2006/main">
             <a:pPr>
+              <a:buNone/>
               <a:defRPr sz="1125" b="1">
                 <a:solidFill>
                   <a:srgbClr val="9B87F5"/>
@@ -4233,6 +4326,7 @@
               </a:defRPr>
             </a:defPPr>
             <a:lvl1pPr>
+              <a:buNone/>
               <a:defRPr sz="3525" b="1">
                 <a:solidFill>
                   <a:srgbClr val="F8FAFC"/>
@@ -4243,6 +4337,7 @@
               </a:defRPr>
             </a:lvl1pPr>
             <a:lvl2pPr>
+              <a:buNone/>
               <a:defRPr sz="3525" b="1">
                 <a:solidFill>
                   <a:srgbClr val="F8FAFC"/>
@@ -4253,6 +4348,7 @@
               </a:defRPr>
             </a:lvl2pPr>
             <a:lvl3pPr>
+              <a:buNone/>
               <a:defRPr sz="3525" b="1">
                 <a:solidFill>
                   <a:srgbClr val="F8FAFC"/>
@@ -4263,6 +4359,7 @@
               </a:defRPr>
             </a:lvl3pPr>
             <a:lvl4pPr>
+              <a:buNone/>
               <a:defRPr sz="3525" b="1">
                 <a:solidFill>
                   <a:srgbClr val="F8FAFC"/>
@@ -4273,6 +4370,7 @@
               </a:defRPr>
             </a:lvl4pPr>
             <a:lvl5pPr>
+              <a:buNone/>
               <a:defRPr sz="3525" b="1">
                 <a:solidFill>
                   <a:srgbClr val="F8FAFC"/>
@@ -4283,6 +4381,7 @@
               </a:defRPr>
             </a:lvl5pPr>
             <a:lvl6pPr>
+              <a:buNone/>
               <a:defRPr sz="3525" b="1">
                 <a:solidFill>
                   <a:srgbClr val="F8FAFC"/>
@@ -4293,6 +4392,7 @@
               </a:defRPr>
             </a:lvl6pPr>
             <a:lvl7pPr>
+              <a:buNone/>
               <a:defRPr sz="3525" b="1">
                 <a:solidFill>
                   <a:srgbClr val="F8FAFC"/>
@@ -4303,6 +4403,7 @@
               </a:defRPr>
             </a:lvl7pPr>
             <a:lvl8pPr>
+              <a:buNone/>
               <a:defRPr sz="3525" b="1">
                 <a:solidFill>
                   <a:srgbClr val="F8FAFC"/>
@@ -4313,6 +4414,7 @@
               </a:defRPr>
             </a:lvl8pPr>
             <a:lvl9pPr>
+              <a:buNone/>
               <a:defRPr sz="3525" b="1">
                 <a:solidFill>
                   <a:srgbClr val="F8FAFC"/>
@@ -4421,6 +4523,7 @@
               </a:defRPr>
             </a:defPPr>
             <a:lvl1pPr>
+              <a:buNone/>
               <a:defRPr sz="1650">
                 <a:solidFill>
                   <a:srgbClr val="A8B3C7"/>
@@ -4431,6 +4534,7 @@
               </a:defRPr>
             </a:lvl1pPr>
             <a:lvl2pPr>
+              <a:buNone/>
               <a:defRPr sz="1650">
                 <a:solidFill>
                   <a:srgbClr val="A8B3C7"/>
@@ -4441,6 +4545,7 @@
               </a:defRPr>
             </a:lvl2pPr>
             <a:lvl3pPr>
+              <a:buNone/>
               <a:defRPr sz="1650">
                 <a:solidFill>
                   <a:srgbClr val="A8B3C7"/>
@@ -4451,6 +4556,7 @@
               </a:defRPr>
             </a:lvl3pPr>
             <a:lvl4pPr>
+              <a:buNone/>
               <a:defRPr sz="1650">
                 <a:solidFill>
                   <a:srgbClr val="A8B3C7"/>
@@ -4461,6 +4567,7 @@
               </a:defRPr>
             </a:lvl4pPr>
             <a:lvl5pPr>
+              <a:buNone/>
               <a:defRPr sz="1650">
                 <a:solidFill>
                   <a:srgbClr val="A8B3C7"/>
@@ -4471,6 +4578,7 @@
               </a:defRPr>
             </a:lvl5pPr>
             <a:lvl6pPr>
+              <a:buNone/>
               <a:defRPr sz="1650">
                 <a:solidFill>
                   <a:srgbClr val="A8B3C7"/>
@@ -4481,6 +4589,7 @@
               </a:defRPr>
             </a:lvl6pPr>
             <a:lvl7pPr>
+              <a:buNone/>
               <a:defRPr sz="1650">
                 <a:solidFill>
                   <a:srgbClr val="A8B3C7"/>
@@ -4491,6 +4600,7 @@
               </a:defRPr>
             </a:lvl7pPr>
             <a:lvl8pPr>
+              <a:buNone/>
               <a:defRPr sz="1650">
                 <a:solidFill>
                   <a:srgbClr val="A8B3C7"/>
@@ -4501,6 +4611,7 @@
               </a:defRPr>
             </a:lvl8pPr>
             <a:lvl9pPr>
+              <a:buNone/>
               <a:defRPr sz="1650">
                 <a:solidFill>
                   <a:srgbClr val="A8B3C7"/>
@@ -4513,6 +4624,7 @@
           </a:lstStyle>
           <a:p xmlns:a="http://schemas.openxmlformats.org/drawingml/2006/main">
             <a:pPr>
+              <a:buNone/>
               <a:defRPr sz="1650">
                 <a:solidFill>
                   <a:srgbClr val="A8B3C7"/>
@@ -4609,6 +4721,7 @@
               </a:defRPr>
             </a:defPPr>
             <a:lvl1pPr>
+              <a:buNone/>
               <a:defRPr sz="1500" b="1">
                 <a:solidFill>
                   <a:srgbClr val="F8FAFC"/>
@@ -4619,6 +4732,7 @@
               </a:defRPr>
             </a:lvl1pPr>
             <a:lvl2pPr>
+              <a:buNone/>
               <a:defRPr sz="1500" b="1">
                 <a:solidFill>
                   <a:srgbClr val="F8FAFC"/>
@@ -4629,6 +4743,7 @@
               </a:defRPr>
             </a:lvl2pPr>
             <a:lvl3pPr>
+              <a:buNone/>
               <a:defRPr sz="1500" b="1">
                 <a:solidFill>
                   <a:srgbClr val="F8FAFC"/>
@@ -4639,6 +4754,7 @@
               </a:defRPr>
             </a:lvl3pPr>
             <a:lvl4pPr>
+              <a:buNone/>
               <a:defRPr sz="1500" b="1">
                 <a:solidFill>
                   <a:srgbClr val="F8FAFC"/>
@@ -4649,6 +4765,7 @@
               </a:defRPr>
             </a:lvl4pPr>
             <a:lvl5pPr>
+              <a:buNone/>
               <a:defRPr sz="1500" b="1">
                 <a:solidFill>
                   <a:srgbClr val="F8FAFC"/>
@@ -4659,6 +4776,7 @@
               </a:defRPr>
             </a:lvl5pPr>
             <a:lvl6pPr>
+              <a:buNone/>
               <a:defRPr sz="1500" b="1">
                 <a:solidFill>
                   <a:srgbClr val="F8FAFC"/>
@@ -4669,6 +4787,7 @@
               </a:defRPr>
             </a:lvl6pPr>
             <a:lvl7pPr>
+              <a:buNone/>
               <a:defRPr sz="1500" b="1">
                 <a:solidFill>
                   <a:srgbClr val="F8FAFC"/>
@@ -4679,6 +4798,7 @@
               </a:defRPr>
             </a:lvl7pPr>
             <a:lvl8pPr>
+              <a:buNone/>
               <a:defRPr sz="1500" b="1">
                 <a:solidFill>
                   <a:srgbClr val="F8FAFC"/>
@@ -4689,6 +4809,7 @@
               </a:defRPr>
             </a:lvl8pPr>
             <a:lvl9pPr>
+              <a:buNone/>
               <a:defRPr sz="1500" b="1">
                 <a:solidFill>
                   <a:srgbClr val="F8FAFC"/>
@@ -4701,6 +4822,7 @@
           </a:lstStyle>
           <a:p xmlns:a="http://schemas.openxmlformats.org/drawingml/2006/main">
             <a:pPr>
+              <a:buNone/>
               <a:defRPr sz="1500" b="1">
                 <a:solidFill>
                   <a:srgbClr val="F8FAFC"/>
@@ -4766,6 +4888,7 @@
               </a:defRPr>
             </a:defPPr>
             <a:lvl1pPr>
+              <a:buNone/>
               <a:defRPr sz="1050">
                 <a:solidFill>
                   <a:srgbClr val="A8B3C7"/>
@@ -4776,6 +4899,7 @@
               </a:defRPr>
             </a:lvl1pPr>
             <a:lvl2pPr>
+              <a:buNone/>
               <a:defRPr sz="1050">
                 <a:solidFill>
                   <a:srgbClr val="A8B3C7"/>
@@ -4786,6 +4910,7 @@
               </a:defRPr>
             </a:lvl2pPr>
             <a:lvl3pPr>
+              <a:buNone/>
               <a:defRPr sz="1050">
                 <a:solidFill>
                   <a:srgbClr val="A8B3C7"/>
@@ -4796,6 +4921,7 @@
               </a:defRPr>
             </a:lvl3pPr>
             <a:lvl4pPr>
+              <a:buNone/>
               <a:defRPr sz="1050">
                 <a:solidFill>
                   <a:srgbClr val="A8B3C7"/>
@@ -4806,6 +4932,7 @@
               </a:defRPr>
             </a:lvl4pPr>
             <a:lvl5pPr>
+              <a:buNone/>
               <a:defRPr sz="1050">
                 <a:solidFill>
                   <a:srgbClr val="A8B3C7"/>
@@ -4816,6 +4943,7 @@
               </a:defRPr>
             </a:lvl5pPr>
             <a:lvl6pPr>
+              <a:buNone/>
               <a:defRPr sz="1050">
                 <a:solidFill>
                   <a:srgbClr val="A8B3C7"/>
@@ -4826,6 +4954,7 @@
               </a:defRPr>
             </a:lvl6pPr>
             <a:lvl7pPr>
+              <a:buNone/>
               <a:defRPr sz="1050">
                 <a:solidFill>
                   <a:srgbClr val="A8B3C7"/>
@@ -4836,6 +4965,7 @@
               </a:defRPr>
             </a:lvl7pPr>
             <a:lvl8pPr>
+              <a:buNone/>
               <a:defRPr sz="1050">
                 <a:solidFill>
                   <a:srgbClr val="A8B3C7"/>
@@ -4846,6 +4976,7 @@
               </a:defRPr>
             </a:lvl8pPr>
             <a:lvl9pPr>
+              <a:buNone/>
               <a:defRPr sz="1050">
                 <a:solidFill>
                   <a:srgbClr val="A8B3C7"/>
@@ -4858,6 +4989,7 @@
           </a:lstStyle>
           <a:p xmlns:a="http://schemas.openxmlformats.org/drawingml/2006/main">
             <a:pPr>
+              <a:buNone/>
               <a:defRPr sz="1050">
                 <a:solidFill>
                   <a:srgbClr val="A8B3C7"/>
@@ -4952,6 +5084,7 @@
               </a:defRPr>
             </a:defPPr>
             <a:lvl1pPr>
+              <a:buNone/>
               <a:defRPr sz="975" b="1">
                 <a:solidFill>
                   <a:srgbClr val="9B87F5"/>
@@ -4962,6 +5095,7 @@
               </a:defRPr>
             </a:lvl1pPr>
             <a:lvl2pPr>
+              <a:buNone/>
               <a:defRPr sz="975" b="1">
                 <a:solidFill>
                   <a:srgbClr val="9B87F5"/>
@@ -4972,6 +5106,7 @@
               </a:defRPr>
             </a:lvl2pPr>
             <a:lvl3pPr>
+              <a:buNone/>
               <a:defRPr sz="975" b="1">
                 <a:solidFill>
                   <a:srgbClr val="9B87F5"/>
@@ -4982,6 +5117,7 @@
               </a:defRPr>
             </a:lvl3pPr>
             <a:lvl4pPr>
+              <a:buNone/>
               <a:defRPr sz="975" b="1">
                 <a:solidFill>
                   <a:srgbClr val="9B87F5"/>
@@ -4992,6 +5128,7 @@
               </a:defRPr>
             </a:lvl4pPr>
             <a:lvl5pPr>
+              <a:buNone/>
               <a:defRPr sz="975" b="1">
                 <a:solidFill>
                   <a:srgbClr val="9B87F5"/>
@@ -5002,6 +5139,7 @@
               </a:defRPr>
             </a:lvl5pPr>
             <a:lvl6pPr>
+              <a:buNone/>
               <a:defRPr sz="975" b="1">
                 <a:solidFill>
                   <a:srgbClr val="9B87F5"/>
@@ -5012,6 +5150,7 @@
               </a:defRPr>
             </a:lvl6pPr>
             <a:lvl7pPr>
+              <a:buNone/>
               <a:defRPr sz="975" b="1">
                 <a:solidFill>
                   <a:srgbClr val="9B87F5"/>
@@ -5022,6 +5161,7 @@
               </a:defRPr>
             </a:lvl7pPr>
             <a:lvl8pPr>
+              <a:buNone/>
               <a:defRPr sz="975" b="1">
                 <a:solidFill>
                   <a:srgbClr val="9B87F5"/>
@@ -5032,6 +5172,7 @@
               </a:defRPr>
             </a:lvl8pPr>
             <a:lvl9pPr>
+              <a:buNone/>
               <a:defRPr sz="975" b="1">
                 <a:solidFill>
                   <a:srgbClr val="9B87F5"/>
@@ -5044,6 +5185,7 @@
           </a:lstStyle>
           <a:p xmlns:a="http://schemas.openxmlformats.org/drawingml/2006/main">
             <a:pPr>
+              <a:buNone/>
               <a:defRPr sz="975" b="1">
                 <a:solidFill>
                   <a:srgbClr val="9B87F5"/>
@@ -5109,6 +5251,7 @@
               </a:defRPr>
             </a:defPPr>
             <a:lvl1pPr>
+              <a:buNone/>
               <a:defRPr sz="2550" b="1">
                 <a:solidFill>
                   <a:srgbClr val="F8FAFC"/>
@@ -5119,6 +5262,7 @@
               </a:defRPr>
             </a:lvl1pPr>
             <a:lvl2pPr>
+              <a:buNone/>
               <a:defRPr sz="2550" b="1">
                 <a:solidFill>
                   <a:srgbClr val="F8FAFC"/>
@@ -5129,6 +5273,7 @@
               </a:defRPr>
             </a:lvl2pPr>
             <a:lvl3pPr>
+              <a:buNone/>
               <a:defRPr sz="2550" b="1">
                 <a:solidFill>
                   <a:srgbClr val="F8FAFC"/>
@@ -5139,6 +5284,7 @@
               </a:defRPr>
             </a:lvl3pPr>
             <a:lvl4pPr>
+              <a:buNone/>
               <a:defRPr sz="2550" b="1">
                 <a:solidFill>
                   <a:srgbClr val="F8FAFC"/>
@@ -5149,6 +5295,7 @@
               </a:defRPr>
             </a:lvl4pPr>
             <a:lvl5pPr>
+              <a:buNone/>
               <a:defRPr sz="2550" b="1">
                 <a:solidFill>
                   <a:srgbClr val="F8FAFC"/>
@@ -5159,6 +5306,7 @@
               </a:defRPr>
             </a:lvl5pPr>
             <a:lvl6pPr>
+              <a:buNone/>
               <a:defRPr sz="2550" b="1">
                 <a:solidFill>
                   <a:srgbClr val="F8FAFC"/>
@@ -5169,6 +5317,7 @@
               </a:defRPr>
             </a:lvl6pPr>
             <a:lvl7pPr>
+              <a:buNone/>
               <a:defRPr sz="2550" b="1">
                 <a:solidFill>
                   <a:srgbClr val="F8FAFC"/>
@@ -5179,6 +5328,7 @@
               </a:defRPr>
             </a:lvl7pPr>
             <a:lvl8pPr>
+              <a:buNone/>
               <a:defRPr sz="2550" b="1">
                 <a:solidFill>
                   <a:srgbClr val="F8FAFC"/>
@@ -5189,6 +5339,7 @@
               </a:defRPr>
             </a:lvl8pPr>
             <a:lvl9pPr>
+              <a:buNone/>
               <a:defRPr sz="2550" b="1">
                 <a:solidFill>
                   <a:srgbClr val="F8FAFC"/>
@@ -5201,6 +5352,7 @@
           </a:lstStyle>
           <a:p xmlns:a="http://schemas.openxmlformats.org/drawingml/2006/main">
             <a:pPr>
+              <a:buNone/>
               <a:defRPr sz="2550" b="1">
                 <a:solidFill>
                   <a:srgbClr val="F8FAFC"/>
@@ -5297,6 +5449,7 @@
               </a:defRPr>
             </a:defPPr>
             <a:lvl1pPr algn="r">
+              <a:buNone/>
               <a:defRPr sz="900" b="1">
                 <a:solidFill>
                   <a:srgbClr val="A8B3C7"/>
@@ -5307,6 +5460,7 @@
               </a:defRPr>
             </a:lvl1pPr>
             <a:lvl2pPr algn="r">
+              <a:buNone/>
               <a:defRPr sz="900" b="1">
                 <a:solidFill>
                   <a:srgbClr val="A8B3C7"/>
@@ -5317,6 +5471,7 @@
               </a:defRPr>
             </a:lvl2pPr>
             <a:lvl3pPr algn="r">
+              <a:buNone/>
               <a:defRPr sz="900" b="1">
                 <a:solidFill>
                   <a:srgbClr val="A8B3C7"/>
@@ -5327,6 +5482,7 @@
               </a:defRPr>
             </a:lvl3pPr>
             <a:lvl4pPr algn="r">
+              <a:buNone/>
               <a:defRPr sz="900" b="1">
                 <a:solidFill>
                   <a:srgbClr val="A8B3C7"/>
@@ -5337,6 +5493,7 @@
               </a:defRPr>
             </a:lvl4pPr>
             <a:lvl5pPr algn="r">
+              <a:buNone/>
               <a:defRPr sz="900" b="1">
                 <a:solidFill>
                   <a:srgbClr val="A8B3C7"/>
@@ -5347,6 +5504,7 @@
               </a:defRPr>
             </a:lvl5pPr>
             <a:lvl6pPr algn="r">
+              <a:buNone/>
               <a:defRPr sz="900" b="1">
                 <a:solidFill>
                   <a:srgbClr val="A8B3C7"/>
@@ -5357,6 +5515,7 @@
               </a:defRPr>
             </a:lvl6pPr>
             <a:lvl7pPr algn="r">
+              <a:buNone/>
               <a:defRPr sz="900" b="1">
                 <a:solidFill>
                   <a:srgbClr val="A8B3C7"/>
@@ -5367,6 +5526,7 @@
               </a:defRPr>
             </a:lvl7pPr>
             <a:lvl8pPr algn="r">
+              <a:buNone/>
               <a:defRPr sz="900" b="1">
                 <a:solidFill>
                   <a:srgbClr val="A8B3C7"/>
@@ -5377,6 +5537,7 @@
               </a:defRPr>
             </a:lvl8pPr>
             <a:lvl9pPr algn="r">
+              <a:buNone/>
               <a:defRPr sz="900" b="1">
                 <a:solidFill>
                   <a:srgbClr val="A8B3C7"/>
@@ -5389,6 +5550,7 @@
           </a:lstStyle>
           <a:p xmlns:a="http://schemas.openxmlformats.org/drawingml/2006/main">
             <a:pPr algn="r">
+              <a:buNone/>
               <a:defRPr sz="900" b="1">
                 <a:solidFill>
                   <a:srgbClr val="A8B3C7"/>
@@ -5454,6 +5616,7 @@
               </a:defRPr>
             </a:defPPr>
             <a:lvl1pPr>
+              <a:buNone/>
               <a:defRPr sz="1125" b="1">
                 <a:solidFill>
                   <a:srgbClr val="9B87F5"/>
@@ -5464,6 +5627,7 @@
               </a:defRPr>
             </a:lvl1pPr>
             <a:lvl2pPr>
+              <a:buNone/>
               <a:defRPr sz="1125" b="1">
                 <a:solidFill>
                   <a:srgbClr val="9B87F5"/>
@@ -5474,6 +5638,7 @@
               </a:defRPr>
             </a:lvl2pPr>
             <a:lvl3pPr>
+              <a:buNone/>
               <a:defRPr sz="1125" b="1">
                 <a:solidFill>
                   <a:srgbClr val="9B87F5"/>
@@ -5484,6 +5649,7 @@
               </a:defRPr>
             </a:lvl3pPr>
             <a:lvl4pPr>
+              <a:buNone/>
               <a:defRPr sz="1125" b="1">
                 <a:solidFill>
                   <a:srgbClr val="9B87F5"/>
@@ -5494,6 +5660,7 @@
               </a:defRPr>
             </a:lvl4pPr>
             <a:lvl5pPr>
+              <a:buNone/>
               <a:defRPr sz="1125" b="1">
                 <a:solidFill>
                   <a:srgbClr val="9B87F5"/>
@@ -5504,6 +5671,7 @@
               </a:defRPr>
             </a:lvl5pPr>
             <a:lvl6pPr>
+              <a:buNone/>
               <a:defRPr sz="1125" b="1">
                 <a:solidFill>
                   <a:srgbClr val="9B87F5"/>
@@ -5514,6 +5682,7 @@
               </a:defRPr>
             </a:lvl6pPr>
             <a:lvl7pPr>
+              <a:buNone/>
               <a:defRPr sz="1125" b="1">
                 <a:solidFill>
                   <a:srgbClr val="9B87F5"/>
@@ -5524,6 +5693,7 @@
               </a:defRPr>
             </a:lvl7pPr>
             <a:lvl8pPr>
+              <a:buNone/>
               <a:defRPr sz="1125" b="1">
                 <a:solidFill>
                   <a:srgbClr val="9B87F5"/>
@@ -5534,6 +5704,7 @@
               </a:defRPr>
             </a:lvl8pPr>
             <a:lvl9pPr>
+              <a:buNone/>
               <a:defRPr sz="1125" b="1">
                 <a:solidFill>
                   <a:srgbClr val="9B87F5"/>
@@ -5546,6 +5717,7 @@
           </a:lstStyle>
           <a:p xmlns:a="http://schemas.openxmlformats.org/drawingml/2006/main">
             <a:pPr>
+              <a:buNone/>
               <a:defRPr sz="1125" b="1">
                 <a:solidFill>
                   <a:srgbClr val="9B87F5"/>
@@ -5611,6 +5783,7 @@
               </a:defRPr>
             </a:defPPr>
             <a:lvl1pPr>
+              <a:buNone/>
               <a:defRPr sz="1425" b="1">
                 <a:solidFill>
                   <a:srgbClr val="F8FAFC"/>
@@ -5621,6 +5794,7 @@
               </a:defRPr>
             </a:lvl1pPr>
             <a:lvl2pPr>
+              <a:buNone/>
               <a:defRPr sz="1425" b="1">
                 <a:solidFill>
                   <a:srgbClr val="F8FAFC"/>
@@ -5631,6 +5805,7 @@
               </a:defRPr>
             </a:lvl2pPr>
             <a:lvl3pPr>
+              <a:buNone/>
               <a:defRPr sz="1425" b="1">
                 <a:solidFill>
                   <a:srgbClr val="F8FAFC"/>
@@ -5641,6 +5816,7 @@
               </a:defRPr>
             </a:lvl3pPr>
             <a:lvl4pPr>
+              <a:buNone/>
               <a:defRPr sz="1425" b="1">
                 <a:solidFill>
                   <a:srgbClr val="F8FAFC"/>
@@ -5651,6 +5827,7 @@
               </a:defRPr>
             </a:lvl4pPr>
             <a:lvl5pPr>
+              <a:buNone/>
               <a:defRPr sz="1425" b="1">
                 <a:solidFill>
                   <a:srgbClr val="F8FAFC"/>
@@ -5661,6 +5838,7 @@
               </a:defRPr>
             </a:lvl5pPr>
             <a:lvl6pPr>
+              <a:buNone/>
               <a:defRPr sz="1425" b="1">
                 <a:solidFill>
                   <a:srgbClr val="F8FAFC"/>
@@ -5671,6 +5849,7 @@
               </a:defRPr>
             </a:lvl6pPr>
             <a:lvl7pPr>
+              <a:buNone/>
               <a:defRPr sz="1425" b="1">
                 <a:solidFill>
                   <a:srgbClr val="F8FAFC"/>
@@ -5681,6 +5860,7 @@
               </a:defRPr>
             </a:lvl7pPr>
             <a:lvl8pPr>
+              <a:buNone/>
               <a:defRPr sz="1425" b="1">
                 <a:solidFill>
                   <a:srgbClr val="F8FAFC"/>
@@ -5691,6 +5871,7 @@
               </a:defRPr>
             </a:lvl8pPr>
             <a:lvl9pPr>
+              <a:buNone/>
               <a:defRPr sz="1425" b="1">
                 <a:solidFill>
                   <a:srgbClr val="F8FAFC"/>
@@ -5703,6 +5884,7 @@
           </a:lstStyle>
           <a:p xmlns:a="http://schemas.openxmlformats.org/drawingml/2006/main">
             <a:pPr>
+              <a:buNone/>
               <a:defRPr sz="1425" b="1">
                 <a:solidFill>
                   <a:srgbClr val="F8FAFC"/>
@@ -5768,6 +5950,7 @@
               </a:defRPr>
             </a:defPPr>
             <a:lvl1pPr>
+              <a:buNone/>
               <a:defRPr sz="1050">
                 <a:solidFill>
                   <a:srgbClr val="A8B3C7"/>
@@ -5778,6 +5961,7 @@
               </a:defRPr>
             </a:lvl1pPr>
             <a:lvl2pPr>
+              <a:buNone/>
               <a:defRPr sz="1050">
                 <a:solidFill>
                   <a:srgbClr val="A8B3C7"/>
@@ -5788,6 +5972,7 @@
               </a:defRPr>
             </a:lvl2pPr>
             <a:lvl3pPr>
+              <a:buNone/>
               <a:defRPr sz="1050">
                 <a:solidFill>
                   <a:srgbClr val="A8B3C7"/>
@@ -5798,6 +5983,7 @@
               </a:defRPr>
             </a:lvl3pPr>
             <a:lvl4pPr>
+              <a:buNone/>
               <a:defRPr sz="1050">
                 <a:solidFill>
                   <a:srgbClr val="A8B3C7"/>
@@ -5808,6 +5994,7 @@
               </a:defRPr>
             </a:lvl4pPr>
             <a:lvl5pPr>
+              <a:buNone/>
               <a:defRPr sz="1050">
                 <a:solidFill>
                   <a:srgbClr val="A8B3C7"/>
@@ -5818,6 +6005,7 @@
               </a:defRPr>
             </a:lvl5pPr>
             <a:lvl6pPr>
+              <a:buNone/>
               <a:defRPr sz="1050">
                 <a:solidFill>
                   <a:srgbClr val="A8B3C7"/>
@@ -5828,6 +6016,7 @@
               </a:defRPr>
             </a:lvl6pPr>
             <a:lvl7pPr>
+              <a:buNone/>
               <a:defRPr sz="1050">
                 <a:solidFill>
                   <a:srgbClr val="A8B3C7"/>
@@ -5838,6 +6027,7 @@
               </a:defRPr>
             </a:lvl7pPr>
             <a:lvl8pPr>
+              <a:buNone/>
               <a:defRPr sz="1050">
                 <a:solidFill>
                   <a:srgbClr val="A8B3C7"/>
@@ -5848,6 +6038,7 @@
               </a:defRPr>
             </a:lvl8pPr>
             <a:lvl9pPr>
+              <a:buNone/>
               <a:defRPr sz="1050">
                 <a:solidFill>
                   <a:srgbClr val="A8B3C7"/>
@@ -5860,6 +6051,7 @@
           </a:lstStyle>
           <a:p xmlns:a="http://schemas.openxmlformats.org/drawingml/2006/main">
             <a:pPr>
+              <a:buNone/>
               <a:defRPr sz="1050">
                 <a:solidFill>
                   <a:srgbClr val="A8B3C7"/>
@@ -5925,6 +6117,7 @@
               </a:defRPr>
             </a:defPPr>
             <a:lvl1pPr>
+              <a:buNone/>
               <a:defRPr sz="1125" b="1">
                 <a:solidFill>
                   <a:srgbClr val="9B87F5"/>
@@ -5935,6 +6128,7 @@
               </a:defRPr>
             </a:lvl1pPr>
             <a:lvl2pPr>
+              <a:buNone/>
               <a:defRPr sz="1125" b="1">
                 <a:solidFill>
                   <a:srgbClr val="9B87F5"/>
@@ -5945,6 +6139,7 @@
               </a:defRPr>
             </a:lvl2pPr>
             <a:lvl3pPr>
+              <a:buNone/>
               <a:defRPr sz="1125" b="1">
                 <a:solidFill>
                   <a:srgbClr val="9B87F5"/>
@@ -5955,6 +6150,7 @@
               </a:defRPr>
             </a:lvl3pPr>
             <a:lvl4pPr>
+              <a:buNone/>
               <a:defRPr sz="1125" b="1">
                 <a:solidFill>
                   <a:srgbClr val="9B87F5"/>
@@ -5965,6 +6161,7 @@
               </a:defRPr>
             </a:lvl4pPr>
             <a:lvl5pPr>
+              <a:buNone/>
               <a:defRPr sz="1125" b="1">
                 <a:solidFill>
                   <a:srgbClr val="9B87F5"/>
@@ -5975,6 +6172,7 @@
               </a:defRPr>
             </a:lvl5pPr>
             <a:lvl6pPr>
+              <a:buNone/>
               <a:defRPr sz="1125" b="1">
                 <a:solidFill>
                   <a:srgbClr val="9B87F5"/>
@@ -5985,6 +6183,7 @@
               </a:defRPr>
             </a:lvl6pPr>
             <a:lvl7pPr>
+              <a:buNone/>
               <a:defRPr sz="1125" b="1">
                 <a:solidFill>
                   <a:srgbClr val="9B87F5"/>
@@ -5995,6 +6194,7 @@
               </a:defRPr>
             </a:lvl7pPr>
             <a:lvl8pPr>
+              <a:buNone/>
               <a:defRPr sz="1125" b="1">
                 <a:solidFill>
                   <a:srgbClr val="9B87F5"/>
@@ -6005,6 +6205,7 @@
               </a:defRPr>
             </a:lvl8pPr>
             <a:lvl9pPr>
+              <a:buNone/>
               <a:defRPr sz="1125" b="1">
                 <a:solidFill>
                   <a:srgbClr val="9B87F5"/>
@@ -6017,6 +6218,7 @@
           </a:lstStyle>
           <a:p xmlns:a="http://schemas.openxmlformats.org/drawingml/2006/main">
             <a:pPr>
+              <a:buNone/>
               <a:defRPr sz="1125" b="1">
                 <a:solidFill>
                   <a:srgbClr val="9B87F5"/>
@@ -6082,6 +6284,7 @@
               </a:defRPr>
             </a:defPPr>
             <a:lvl1pPr>
+              <a:buNone/>
               <a:defRPr sz="1425" b="1">
                 <a:solidFill>
                   <a:srgbClr val="F8FAFC"/>
@@ -6092,6 +6295,7 @@
               </a:defRPr>
             </a:lvl1pPr>
             <a:lvl2pPr>
+              <a:buNone/>
               <a:defRPr sz="1425" b="1">
                 <a:solidFill>
                   <a:srgbClr val="F8FAFC"/>
@@ -6102,6 +6306,7 @@
               </a:defRPr>
             </a:lvl2pPr>
             <a:lvl3pPr>
+              <a:buNone/>
               <a:defRPr sz="1425" b="1">
                 <a:solidFill>
                   <a:srgbClr val="F8FAFC"/>
@@ -6112,6 +6317,7 @@
               </a:defRPr>
             </a:lvl3pPr>
             <a:lvl4pPr>
+              <a:buNone/>
               <a:defRPr sz="1425" b="1">
                 <a:solidFill>
                   <a:srgbClr val="F8FAFC"/>
@@ -6122,6 +6328,7 @@
               </a:defRPr>
             </a:lvl4pPr>
             <a:lvl5pPr>
+              <a:buNone/>
               <a:defRPr sz="1425" b="1">
                 <a:solidFill>
                   <a:srgbClr val="F8FAFC"/>
@@ -6132,6 +6339,7 @@
               </a:defRPr>
             </a:lvl5pPr>
             <a:lvl6pPr>
+              <a:buNone/>
               <a:defRPr sz="1425" b="1">
                 <a:solidFill>
                   <a:srgbClr val="F8FAFC"/>
@@ -6142,6 +6350,7 @@
               </a:defRPr>
             </a:lvl6pPr>
             <a:lvl7pPr>
+              <a:buNone/>
               <a:defRPr sz="1425" b="1">
                 <a:solidFill>
                   <a:srgbClr val="F8FAFC"/>
@@ -6152,6 +6361,7 @@
               </a:defRPr>
             </a:lvl7pPr>
             <a:lvl8pPr>
+              <a:buNone/>
               <a:defRPr sz="1425" b="1">
                 <a:solidFill>
                   <a:srgbClr val="F8FAFC"/>
@@ -6162,6 +6372,7 @@
               </a:defRPr>
             </a:lvl8pPr>
             <a:lvl9pPr>
+              <a:buNone/>
               <a:defRPr sz="1425" b="1">
                 <a:solidFill>
                   <a:srgbClr val="F8FAFC"/>
@@ -6174,6 +6385,7 @@
           </a:lstStyle>
           <a:p xmlns:a="http://schemas.openxmlformats.org/drawingml/2006/main">
             <a:pPr>
+              <a:buNone/>
               <a:defRPr sz="1425" b="1">
                 <a:solidFill>
                   <a:srgbClr val="F8FAFC"/>
@@ -6239,6 +6451,7 @@
               </a:defRPr>
             </a:defPPr>
             <a:lvl1pPr>
+              <a:buNone/>
               <a:defRPr sz="1050">
                 <a:solidFill>
                   <a:srgbClr val="A8B3C7"/>
@@ -6249,6 +6462,7 @@
               </a:defRPr>
             </a:lvl1pPr>
             <a:lvl2pPr>
+              <a:buNone/>
               <a:defRPr sz="1050">
                 <a:solidFill>
                   <a:srgbClr val="A8B3C7"/>
@@ -6259,6 +6473,7 @@
               </a:defRPr>
             </a:lvl2pPr>
             <a:lvl3pPr>
+              <a:buNone/>
               <a:defRPr sz="1050">
                 <a:solidFill>
                   <a:srgbClr val="A8B3C7"/>
@@ -6269,6 +6484,7 @@
               </a:defRPr>
             </a:lvl3pPr>
             <a:lvl4pPr>
+              <a:buNone/>
               <a:defRPr sz="1050">
                 <a:solidFill>
                   <a:srgbClr val="A8B3C7"/>
@@ -6279,6 +6495,7 @@
               </a:defRPr>
             </a:lvl4pPr>
             <a:lvl5pPr>
+              <a:buNone/>
               <a:defRPr sz="1050">
                 <a:solidFill>
                   <a:srgbClr val="A8B3C7"/>
@@ -6289,6 +6506,7 @@
               </a:defRPr>
             </a:lvl5pPr>
             <a:lvl6pPr>
+              <a:buNone/>
               <a:defRPr sz="1050">
                 <a:solidFill>
                   <a:srgbClr val="A8B3C7"/>
@@ -6299,6 +6517,7 @@
               </a:defRPr>
             </a:lvl6pPr>
             <a:lvl7pPr>
+              <a:buNone/>
               <a:defRPr sz="1050">
                 <a:solidFill>
                   <a:srgbClr val="A8B3C7"/>
@@ -6309,6 +6528,7 @@
               </a:defRPr>
             </a:lvl7pPr>
             <a:lvl8pPr>
+              <a:buNone/>
               <a:defRPr sz="1050">
                 <a:solidFill>
                   <a:srgbClr val="A8B3C7"/>
@@ -6319,6 +6539,7 @@
               </a:defRPr>
             </a:lvl8pPr>
             <a:lvl9pPr>
+              <a:buNone/>
               <a:defRPr sz="1050">
                 <a:solidFill>
                   <a:srgbClr val="A8B3C7"/>
@@ -6331,6 +6552,7 @@
           </a:lstStyle>
           <a:p xmlns:a="http://schemas.openxmlformats.org/drawingml/2006/main">
             <a:pPr>
+              <a:buNone/>
               <a:defRPr sz="1050">
                 <a:solidFill>
                   <a:srgbClr val="A8B3C7"/>
@@ -6396,6 +6618,7 @@
               </a:defRPr>
             </a:defPPr>
             <a:lvl1pPr>
+              <a:buNone/>
               <a:defRPr sz="1125" b="1">
                 <a:solidFill>
                   <a:srgbClr val="9B87F5"/>
@@ -6406,6 +6629,7 @@
               </a:defRPr>
             </a:lvl1pPr>
             <a:lvl2pPr>
+              <a:buNone/>
               <a:defRPr sz="1125" b="1">
                 <a:solidFill>
                   <a:srgbClr val="9B87F5"/>
@@ -6416,6 +6640,7 @@
               </a:defRPr>
             </a:lvl2pPr>
             <a:lvl3pPr>
+              <a:buNone/>
               <a:defRPr sz="1125" b="1">
                 <a:solidFill>
                   <a:srgbClr val="9B87F5"/>
@@ -6426,6 +6651,7 @@
               </a:defRPr>
             </a:lvl3pPr>
             <a:lvl4pPr>
+              <a:buNone/>
               <a:defRPr sz="1125" b="1">
                 <a:solidFill>
                   <a:srgbClr val="9B87F5"/>
@@ -6436,6 +6662,7 @@
               </a:defRPr>
             </a:lvl4pPr>
             <a:lvl5pPr>
+              <a:buNone/>
               <a:defRPr sz="1125" b="1">
                 <a:solidFill>
                   <a:srgbClr val="9B87F5"/>
@@ -6446,6 +6673,7 @@
               </a:defRPr>
             </a:lvl5pPr>
             <a:lvl6pPr>
+              <a:buNone/>
               <a:defRPr sz="1125" b="1">
                 <a:solidFill>
                   <a:srgbClr val="9B87F5"/>
@@ -6456,6 +6684,7 @@
               </a:defRPr>
             </a:lvl6pPr>
             <a:lvl7pPr>
+              <a:buNone/>
               <a:defRPr sz="1125" b="1">
                 <a:solidFill>
                   <a:srgbClr val="9B87F5"/>
@@ -6466,6 +6695,7 @@
               </a:defRPr>
             </a:lvl7pPr>
             <a:lvl8pPr>
+              <a:buNone/>
               <a:defRPr sz="1125" b="1">
                 <a:solidFill>
                   <a:srgbClr val="9B87F5"/>
@@ -6476,6 +6706,7 @@
               </a:defRPr>
             </a:lvl8pPr>
             <a:lvl9pPr>
+              <a:buNone/>
               <a:defRPr sz="1125" b="1">
                 <a:solidFill>
                   <a:srgbClr val="9B87F5"/>
@@ -6488,6 +6719,7 @@
           </a:lstStyle>
           <a:p xmlns:a="http://schemas.openxmlformats.org/drawingml/2006/main">
             <a:pPr>
+              <a:buNone/>
               <a:defRPr sz="1125" b="1">
                 <a:solidFill>
                   <a:srgbClr val="9B87F5"/>
@@ -6553,6 +6785,7 @@
               </a:defRPr>
             </a:defPPr>
             <a:lvl1pPr>
+              <a:buNone/>
               <a:defRPr sz="1425" b="1">
                 <a:solidFill>
                   <a:srgbClr val="F8FAFC"/>
@@ -6563,6 +6796,7 @@
               </a:defRPr>
             </a:lvl1pPr>
             <a:lvl2pPr>
+              <a:buNone/>
               <a:defRPr sz="1425" b="1">
                 <a:solidFill>
                   <a:srgbClr val="F8FAFC"/>
@@ -6573,6 +6807,7 @@
               </a:defRPr>
             </a:lvl2pPr>
             <a:lvl3pPr>
+              <a:buNone/>
               <a:defRPr sz="1425" b="1">
                 <a:solidFill>
                   <a:srgbClr val="F8FAFC"/>
@@ -6583,6 +6818,7 @@
               </a:defRPr>
             </a:lvl3pPr>
             <a:lvl4pPr>
+              <a:buNone/>
               <a:defRPr sz="1425" b="1">
                 <a:solidFill>
                   <a:srgbClr val="F8FAFC"/>
@@ -6593,6 +6829,7 @@
               </a:defRPr>
             </a:lvl4pPr>
             <a:lvl5pPr>
+              <a:buNone/>
               <a:defRPr sz="1425" b="1">
                 <a:solidFill>
                   <a:srgbClr val="F8FAFC"/>
@@ -6603,6 +6840,7 @@
               </a:defRPr>
             </a:lvl5pPr>
             <a:lvl6pPr>
+              <a:buNone/>
               <a:defRPr sz="1425" b="1">
                 <a:solidFill>
                   <a:srgbClr val="F8FAFC"/>
@@ -6613,6 +6851,7 @@
               </a:defRPr>
             </a:lvl6pPr>
             <a:lvl7pPr>
+              <a:buNone/>
               <a:defRPr sz="1425" b="1">
                 <a:solidFill>
                   <a:srgbClr val="F8FAFC"/>
@@ -6623,6 +6862,7 @@
               </a:defRPr>
             </a:lvl7pPr>
             <a:lvl8pPr>
+              <a:buNone/>
               <a:defRPr sz="1425" b="1">
                 <a:solidFill>
                   <a:srgbClr val="F8FAFC"/>
@@ -6633,6 +6873,7 @@
               </a:defRPr>
             </a:lvl8pPr>
             <a:lvl9pPr>
+              <a:buNone/>
               <a:defRPr sz="1425" b="1">
                 <a:solidFill>
                   <a:srgbClr val="F8FAFC"/>
@@ -6645,6 +6886,7 @@
           </a:lstStyle>
           <a:p xmlns:a="http://schemas.openxmlformats.org/drawingml/2006/main">
             <a:pPr>
+              <a:buNone/>
               <a:defRPr sz="1425" b="1">
                 <a:solidFill>
                   <a:srgbClr val="F8FAFC"/>
@@ -6710,6 +6952,7 @@
               </a:defRPr>
             </a:defPPr>
             <a:lvl1pPr>
+              <a:buNone/>
               <a:defRPr sz="1050">
                 <a:solidFill>
                   <a:srgbClr val="A8B3C7"/>
@@ -6720,6 +6963,7 @@
               </a:defRPr>
             </a:lvl1pPr>
             <a:lvl2pPr>
+              <a:buNone/>
               <a:defRPr sz="1050">
                 <a:solidFill>
                   <a:srgbClr val="A8B3C7"/>
@@ -6730,6 +6974,7 @@
               </a:defRPr>
             </a:lvl2pPr>
             <a:lvl3pPr>
+              <a:buNone/>
               <a:defRPr sz="1050">
                 <a:solidFill>
                   <a:srgbClr val="A8B3C7"/>
@@ -6740,6 +6985,7 @@
               </a:defRPr>
             </a:lvl3pPr>
             <a:lvl4pPr>
+              <a:buNone/>
               <a:defRPr sz="1050">
                 <a:solidFill>
                   <a:srgbClr val="A8B3C7"/>
@@ -6750,6 +6996,7 @@
               </a:defRPr>
             </a:lvl4pPr>
             <a:lvl5pPr>
+              <a:buNone/>
               <a:defRPr sz="1050">
                 <a:solidFill>
                   <a:srgbClr val="A8B3C7"/>
@@ -6760,6 +7007,7 @@
               </a:defRPr>
             </a:lvl5pPr>
             <a:lvl6pPr>
+              <a:buNone/>
               <a:defRPr sz="1050">
                 <a:solidFill>
                   <a:srgbClr val="A8B3C7"/>
@@ -6770,6 +7018,7 @@
               </a:defRPr>
             </a:lvl6pPr>
             <a:lvl7pPr>
+              <a:buNone/>
               <a:defRPr sz="1050">
                 <a:solidFill>
                   <a:srgbClr val="A8B3C7"/>
@@ -6780,6 +7029,7 @@
               </a:defRPr>
             </a:lvl7pPr>
             <a:lvl8pPr>
+              <a:buNone/>
               <a:defRPr sz="1050">
                 <a:solidFill>
                   <a:srgbClr val="A8B3C7"/>
@@ -6790,6 +7040,7 @@
               </a:defRPr>
             </a:lvl8pPr>
             <a:lvl9pPr>
+              <a:buNone/>
               <a:defRPr sz="1050">
                 <a:solidFill>
                   <a:srgbClr val="A8B3C7"/>
@@ -6802,6 +7053,7 @@
           </a:lstStyle>
           <a:p xmlns:a="http://schemas.openxmlformats.org/drawingml/2006/main">
             <a:pPr>
+              <a:buNone/>
               <a:defRPr sz="1050">
                 <a:solidFill>
                   <a:srgbClr val="A8B3C7"/>
@@ -6867,6 +7119,7 @@
               </a:defRPr>
             </a:defPPr>
             <a:lvl1pPr>
+              <a:buNone/>
               <a:defRPr sz="1125" b="1">
                 <a:solidFill>
                   <a:srgbClr val="9B87F5"/>
@@ -6877,6 +7130,7 @@
               </a:defRPr>
             </a:lvl1pPr>
             <a:lvl2pPr>
+              <a:buNone/>
               <a:defRPr sz="1125" b="1">
                 <a:solidFill>
                   <a:srgbClr val="9B87F5"/>
@@ -6887,6 +7141,7 @@
               </a:defRPr>
             </a:lvl2pPr>
             <a:lvl3pPr>
+              <a:buNone/>
               <a:defRPr sz="1125" b="1">
                 <a:solidFill>
                   <a:srgbClr val="9B87F5"/>
@@ -6897,6 +7152,7 @@
               </a:defRPr>
             </a:lvl3pPr>
             <a:lvl4pPr>
+              <a:buNone/>
               <a:defRPr sz="1125" b="1">
                 <a:solidFill>
                   <a:srgbClr val="9B87F5"/>
@@ -6907,6 +7163,7 @@
               </a:defRPr>
             </a:lvl4pPr>
             <a:lvl5pPr>
+              <a:buNone/>
               <a:defRPr sz="1125" b="1">
                 <a:solidFill>
                   <a:srgbClr val="9B87F5"/>
@@ -6917,6 +7174,7 @@
               </a:defRPr>
             </a:lvl5pPr>
             <a:lvl6pPr>
+              <a:buNone/>
               <a:defRPr sz="1125" b="1">
                 <a:solidFill>
                   <a:srgbClr val="9B87F5"/>
@@ -6927,6 +7185,7 @@
               </a:defRPr>
             </a:lvl6pPr>
             <a:lvl7pPr>
+              <a:buNone/>
               <a:defRPr sz="1125" b="1">
                 <a:solidFill>
                   <a:srgbClr val="9B87F5"/>
@@ -6937,6 +7196,7 @@
               </a:defRPr>
             </a:lvl7pPr>
             <a:lvl8pPr>
+              <a:buNone/>
               <a:defRPr sz="1125" b="1">
                 <a:solidFill>
                   <a:srgbClr val="9B87F5"/>
@@ -6947,6 +7207,7 @@
               </a:defRPr>
             </a:lvl8pPr>
             <a:lvl9pPr>
+              <a:buNone/>
               <a:defRPr sz="1125" b="1">
                 <a:solidFill>
                   <a:srgbClr val="9B87F5"/>
@@ -6959,6 +7220,7 @@
           </a:lstStyle>
           <a:p xmlns:a="http://schemas.openxmlformats.org/drawingml/2006/main">
             <a:pPr>
+              <a:buNone/>
               <a:defRPr sz="1125" b="1">
                 <a:solidFill>
                   <a:srgbClr val="9B87F5"/>
@@ -7024,6 +7286,7 @@
               </a:defRPr>
             </a:defPPr>
             <a:lvl1pPr>
+              <a:buNone/>
               <a:defRPr sz="1425" b="1">
                 <a:solidFill>
                   <a:srgbClr val="F8FAFC"/>
@@ -7034,6 +7297,7 @@
               </a:defRPr>
             </a:lvl1pPr>
             <a:lvl2pPr>
+              <a:buNone/>
               <a:defRPr sz="1425" b="1">
                 <a:solidFill>
                   <a:srgbClr val="F8FAFC"/>
@@ -7044,6 +7308,7 @@
               </a:defRPr>
             </a:lvl2pPr>
             <a:lvl3pPr>
+              <a:buNone/>
               <a:defRPr sz="1425" b="1">
                 <a:solidFill>
                   <a:srgbClr val="F8FAFC"/>
@@ -7054,6 +7319,7 @@
               </a:defRPr>
             </a:lvl3pPr>
             <a:lvl4pPr>
+              <a:buNone/>
               <a:defRPr sz="1425" b="1">
                 <a:solidFill>
                   <a:srgbClr val="F8FAFC"/>
@@ -7064,6 +7330,7 @@
               </a:defRPr>
             </a:lvl4pPr>
             <a:lvl5pPr>
+              <a:buNone/>
               <a:defRPr sz="1425" b="1">
                 <a:solidFill>
                   <a:srgbClr val="F8FAFC"/>
@@ -7074,6 +7341,7 @@
               </a:defRPr>
             </a:lvl5pPr>
             <a:lvl6pPr>
+              <a:buNone/>
               <a:defRPr sz="1425" b="1">
                 <a:solidFill>
                   <a:srgbClr val="F8FAFC"/>
@@ -7084,6 +7352,7 @@
               </a:defRPr>
             </a:lvl6pPr>
             <a:lvl7pPr>
+              <a:buNone/>
               <a:defRPr sz="1425" b="1">
                 <a:solidFill>
                   <a:srgbClr val="F8FAFC"/>
@@ -7094,6 +7363,7 @@
               </a:defRPr>
             </a:lvl7pPr>
             <a:lvl8pPr>
+              <a:buNone/>
               <a:defRPr sz="1425" b="1">
                 <a:solidFill>
                   <a:srgbClr val="F8FAFC"/>
@@ -7104,6 +7374,7 @@
               </a:defRPr>
             </a:lvl8pPr>
             <a:lvl9pPr>
+              <a:buNone/>
               <a:defRPr sz="1425" b="1">
                 <a:solidFill>
                   <a:srgbClr val="F8FAFC"/>
@@ -7116,6 +7387,7 @@
           </a:lstStyle>
           <a:p xmlns:a="http://schemas.openxmlformats.org/drawingml/2006/main">
             <a:pPr>
+              <a:buNone/>
               <a:defRPr sz="1425" b="1">
                 <a:solidFill>
                   <a:srgbClr val="F8FAFC"/>
@@ -7181,6 +7453,7 @@
               </a:defRPr>
             </a:defPPr>
             <a:lvl1pPr>
+              <a:buNone/>
               <a:defRPr sz="1050">
                 <a:solidFill>
                   <a:srgbClr val="A8B3C7"/>
@@ -7191,6 +7464,7 @@
               </a:defRPr>
             </a:lvl1pPr>
             <a:lvl2pPr>
+              <a:buNone/>
               <a:defRPr sz="1050">
                 <a:solidFill>
                   <a:srgbClr val="A8B3C7"/>
@@ -7201,6 +7475,7 @@
               </a:defRPr>
             </a:lvl2pPr>
             <a:lvl3pPr>
+              <a:buNone/>
               <a:defRPr sz="1050">
                 <a:solidFill>
                   <a:srgbClr val="A8B3C7"/>
@@ -7211,6 +7486,7 @@
               </a:defRPr>
             </a:lvl3pPr>
             <a:lvl4pPr>
+              <a:buNone/>
               <a:defRPr sz="1050">
                 <a:solidFill>
                   <a:srgbClr val="A8B3C7"/>
@@ -7221,6 +7497,7 @@
               </a:defRPr>
             </a:lvl4pPr>
             <a:lvl5pPr>
+              <a:buNone/>
               <a:defRPr sz="1050">
                 <a:solidFill>
                   <a:srgbClr val="A8B3C7"/>
@@ -7231,6 +7508,7 @@
               </a:defRPr>
             </a:lvl5pPr>
             <a:lvl6pPr>
+              <a:buNone/>
               <a:defRPr sz="1050">
                 <a:solidFill>
                   <a:srgbClr val="A8B3C7"/>
@@ -7241,6 +7519,7 @@
               </a:defRPr>
             </a:lvl6pPr>
             <a:lvl7pPr>
+              <a:buNone/>
               <a:defRPr sz="1050">
                 <a:solidFill>
                   <a:srgbClr val="A8B3C7"/>
@@ -7251,6 +7530,7 @@
               </a:defRPr>
             </a:lvl7pPr>
             <a:lvl8pPr>
+              <a:buNone/>
               <a:defRPr sz="1050">
                 <a:solidFill>
                   <a:srgbClr val="A8B3C7"/>
@@ -7261,6 +7541,7 @@
               </a:defRPr>
             </a:lvl8pPr>
             <a:lvl9pPr>
+              <a:buNone/>
               <a:defRPr sz="1050">
                 <a:solidFill>
                   <a:srgbClr val="A8B3C7"/>
@@ -7273,6 +7554,7 @@
           </a:lstStyle>
           <a:p xmlns:a="http://schemas.openxmlformats.org/drawingml/2006/main">
             <a:pPr>
+              <a:buNone/>
               <a:defRPr sz="1050">
                 <a:solidFill>
                   <a:srgbClr val="A8B3C7"/>
@@ -7338,6 +7620,7 @@
               </a:defRPr>
             </a:defPPr>
             <a:lvl1pPr>
+              <a:buNone/>
               <a:defRPr sz="1125" b="1">
                 <a:solidFill>
                   <a:srgbClr val="9B87F5"/>
@@ -7348,6 +7631,7 @@
               </a:defRPr>
             </a:lvl1pPr>
             <a:lvl2pPr>
+              <a:buNone/>
               <a:defRPr sz="1125" b="1">
                 <a:solidFill>
                   <a:srgbClr val="9B87F5"/>
@@ -7358,6 +7642,7 @@
               </a:defRPr>
             </a:lvl2pPr>
             <a:lvl3pPr>
+              <a:buNone/>
               <a:defRPr sz="1125" b="1">
                 <a:solidFill>
                   <a:srgbClr val="9B87F5"/>
@@ -7368,6 +7653,7 @@
               </a:defRPr>
             </a:lvl3pPr>
             <a:lvl4pPr>
+              <a:buNone/>
               <a:defRPr sz="1125" b="1">
                 <a:solidFill>
                   <a:srgbClr val="9B87F5"/>
@@ -7378,6 +7664,7 @@
               </a:defRPr>
             </a:lvl4pPr>
             <a:lvl5pPr>
+              <a:buNone/>
               <a:defRPr sz="1125" b="1">
                 <a:solidFill>
                   <a:srgbClr val="9B87F5"/>
@@ -7388,6 +7675,7 @@
               </a:defRPr>
             </a:lvl5pPr>
             <a:lvl6pPr>
+              <a:buNone/>
               <a:defRPr sz="1125" b="1">
                 <a:solidFill>
                   <a:srgbClr val="9B87F5"/>
@@ -7398,6 +7686,7 @@
               </a:defRPr>
             </a:lvl6pPr>
             <a:lvl7pPr>
+              <a:buNone/>
               <a:defRPr sz="1125" b="1">
                 <a:solidFill>
                   <a:srgbClr val="9B87F5"/>
@@ -7408,6 +7697,7 @@
               </a:defRPr>
             </a:lvl7pPr>
             <a:lvl8pPr>
+              <a:buNone/>
               <a:defRPr sz="1125" b="1">
                 <a:solidFill>
                   <a:srgbClr val="9B87F5"/>
@@ -7418,6 +7708,7 @@
               </a:defRPr>
             </a:lvl8pPr>
             <a:lvl9pPr>
+              <a:buNone/>
               <a:defRPr sz="1125" b="1">
                 <a:solidFill>
                   <a:srgbClr val="9B87F5"/>
@@ -7430,6 +7721,7 @@
           </a:lstStyle>
           <a:p xmlns:a="http://schemas.openxmlformats.org/drawingml/2006/main">
             <a:pPr>
+              <a:buNone/>
               <a:defRPr sz="1125" b="1">
                 <a:solidFill>
                   <a:srgbClr val="9B87F5"/>
@@ -7495,6 +7787,7 @@
               </a:defRPr>
             </a:defPPr>
             <a:lvl1pPr>
+              <a:buNone/>
               <a:defRPr sz="1425" b="1">
                 <a:solidFill>
                   <a:srgbClr val="F8FAFC"/>
@@ -7505,6 +7798,7 @@
               </a:defRPr>
             </a:lvl1pPr>
             <a:lvl2pPr>
+              <a:buNone/>
               <a:defRPr sz="1425" b="1">
                 <a:solidFill>
                   <a:srgbClr val="F8FAFC"/>
@@ -7515,6 +7809,7 @@
               </a:defRPr>
             </a:lvl2pPr>
             <a:lvl3pPr>
+              <a:buNone/>
               <a:defRPr sz="1425" b="1">
                 <a:solidFill>
                   <a:srgbClr val="F8FAFC"/>
@@ -7525,6 +7820,7 @@
               </a:defRPr>
             </a:lvl3pPr>
             <a:lvl4pPr>
+              <a:buNone/>
               <a:defRPr sz="1425" b="1">
                 <a:solidFill>
                   <a:srgbClr val="F8FAFC"/>
@@ -7535,6 +7831,7 @@
               </a:defRPr>
             </a:lvl4pPr>
             <a:lvl5pPr>
+              <a:buNone/>
               <a:defRPr sz="1425" b="1">
                 <a:solidFill>
                   <a:srgbClr val="F8FAFC"/>
@@ -7545,6 +7842,7 @@
               </a:defRPr>
             </a:lvl5pPr>
             <a:lvl6pPr>
+              <a:buNone/>
               <a:defRPr sz="1425" b="1">
                 <a:solidFill>
                   <a:srgbClr val="F8FAFC"/>
@@ -7555,6 +7853,7 @@
               </a:defRPr>
             </a:lvl6pPr>
             <a:lvl7pPr>
+              <a:buNone/>
               <a:defRPr sz="1425" b="1">
                 <a:solidFill>
                   <a:srgbClr val="F8FAFC"/>
@@ -7565,6 +7864,7 @@
               </a:defRPr>
             </a:lvl7pPr>
             <a:lvl8pPr>
+              <a:buNone/>
               <a:defRPr sz="1425" b="1">
                 <a:solidFill>
                   <a:srgbClr val="F8FAFC"/>
@@ -7575,6 +7875,7 @@
               </a:defRPr>
             </a:lvl8pPr>
             <a:lvl9pPr>
+              <a:buNone/>
               <a:defRPr sz="1425" b="1">
                 <a:solidFill>
                   <a:srgbClr val="F8FAFC"/>
@@ -7587,6 +7888,7 @@
           </a:lstStyle>
           <a:p xmlns:a="http://schemas.openxmlformats.org/drawingml/2006/main">
             <a:pPr>
+              <a:buNone/>
               <a:defRPr sz="1425" b="1">
                 <a:solidFill>
                   <a:srgbClr val="F8FAFC"/>
@@ -7652,6 +7954,7 @@
               </a:defRPr>
             </a:defPPr>
             <a:lvl1pPr>
+              <a:buNone/>
               <a:defRPr sz="1050">
                 <a:solidFill>
                   <a:srgbClr val="A8B3C7"/>
@@ -7662,6 +7965,7 @@
               </a:defRPr>
             </a:lvl1pPr>
             <a:lvl2pPr>
+              <a:buNone/>
               <a:defRPr sz="1050">
                 <a:solidFill>
                   <a:srgbClr val="A8B3C7"/>
@@ -7672,6 +7976,7 @@
               </a:defRPr>
             </a:lvl2pPr>
             <a:lvl3pPr>
+              <a:buNone/>
               <a:defRPr sz="1050">
                 <a:solidFill>
                   <a:srgbClr val="A8B3C7"/>
@@ -7682,6 +7987,7 @@
               </a:defRPr>
             </a:lvl3pPr>
             <a:lvl4pPr>
+              <a:buNone/>
               <a:defRPr sz="1050">
                 <a:solidFill>
                   <a:srgbClr val="A8B3C7"/>
@@ -7692,6 +7998,7 @@
               </a:defRPr>
             </a:lvl4pPr>
             <a:lvl5pPr>
+              <a:buNone/>
               <a:defRPr sz="1050">
                 <a:solidFill>
                   <a:srgbClr val="A8B3C7"/>
@@ -7702,6 +8009,7 @@
               </a:defRPr>
             </a:lvl5pPr>
             <a:lvl6pPr>
+              <a:buNone/>
               <a:defRPr sz="1050">
                 <a:solidFill>
                   <a:srgbClr val="A8B3C7"/>
@@ -7712,6 +8020,7 @@
               </a:defRPr>
             </a:lvl6pPr>
             <a:lvl7pPr>
+              <a:buNone/>
               <a:defRPr sz="1050">
                 <a:solidFill>
                   <a:srgbClr val="A8B3C7"/>
@@ -7722,6 +8031,7 @@
               </a:defRPr>
             </a:lvl7pPr>
             <a:lvl8pPr>
+              <a:buNone/>
               <a:defRPr sz="1050">
                 <a:solidFill>
                   <a:srgbClr val="A8B3C7"/>
@@ -7732,6 +8042,7 @@
               </a:defRPr>
             </a:lvl8pPr>
             <a:lvl9pPr>
+              <a:buNone/>
               <a:defRPr sz="1050">
                 <a:solidFill>
                   <a:srgbClr val="A8B3C7"/>
@@ -7744,6 +8055,7 @@
           </a:lstStyle>
           <a:p xmlns:a="http://schemas.openxmlformats.org/drawingml/2006/main">
             <a:pPr>
+              <a:buNone/>
               <a:defRPr sz="1050">
                 <a:solidFill>
                   <a:srgbClr val="A8B3C7"/>
@@ -7807,7 +8119,7 @@
           <p:cNvPr id="21" name="">
             <a:extLst xmlns:a="http://schemas.openxmlformats.org/drawingml/2006/main">
               <a:ext uri="{FF2B5EF4-FFF2-40B4-BE49-F238E27FC236}">
-                <a16:creationId xmlns:a16="http://schemas.microsoft.com/office/drawing/2014/main" id="{5CDAAC89-2539-486E-865E-9DA4F0C8875D}"/>
+                <a16:creationId xmlns:a16="http://schemas.microsoft.com/office/drawing/2014/main" id="{906ECFFC-DA56-4AF7-9FB2-A29742E23A53}"/>
               </a:ext>
             </a:extLst>
           </p:cNvPr>
@@ -7817,7 +8129,7 @@
           <p:nvPr/>
         </p:nvPicPr>
         <p:blipFill>
-          <a:blip xmlns:r="http://schemas.openxmlformats.org/officeDocument/2006/relationships" xmlns:a="http://schemas.openxmlformats.org/drawingml/2006/main" r:embed="R97e13e1fc8034a5f"/>
+          <a:blip xmlns:r="http://schemas.openxmlformats.org/officeDocument/2006/relationships" xmlns:a="http://schemas.openxmlformats.org/drawingml/2006/main" r:embed="R177fcfef2a6c4d41"/>
           <a:stretch xmlns:a="http://schemas.openxmlformats.org/drawingml/2006/main"/>
         </p:blipFill>
         <p:spPr>
@@ -7874,6 +8186,7 @@
               </a:defRPr>
             </a:defPPr>
             <a:lvl1pPr>
+              <a:buNone/>
               <a:defRPr sz="1050" b="1">
                 <a:solidFill>
                   <a:srgbClr val="43D19E"/>
@@ -7884,6 +8197,7 @@
               </a:defRPr>
             </a:lvl1pPr>
             <a:lvl2pPr>
+              <a:buNone/>
               <a:defRPr sz="1050" b="1">
                 <a:solidFill>
                   <a:srgbClr val="43D19E"/>
@@ -7894,6 +8208,7 @@
               </a:defRPr>
             </a:lvl2pPr>
             <a:lvl3pPr>
+              <a:buNone/>
               <a:defRPr sz="1050" b="1">
                 <a:solidFill>
                   <a:srgbClr val="43D19E"/>
@@ -7904,6 +8219,7 @@
               </a:defRPr>
             </a:lvl3pPr>
             <a:lvl4pPr>
+              <a:buNone/>
               <a:defRPr sz="1050" b="1">
                 <a:solidFill>
                   <a:srgbClr val="43D19E"/>
@@ -7914,6 +8230,7 @@
               </a:defRPr>
             </a:lvl4pPr>
             <a:lvl5pPr>
+              <a:buNone/>
               <a:defRPr sz="1050" b="1">
                 <a:solidFill>
                   <a:srgbClr val="43D19E"/>
@@ -7924,6 +8241,7 @@
               </a:defRPr>
             </a:lvl5pPr>
             <a:lvl6pPr>
+              <a:buNone/>
               <a:defRPr sz="1050" b="1">
                 <a:solidFill>
                   <a:srgbClr val="43D19E"/>
@@ -7934,6 +8252,7 @@
               </a:defRPr>
             </a:lvl6pPr>
             <a:lvl7pPr>
+              <a:buNone/>
               <a:defRPr sz="1050" b="1">
                 <a:solidFill>
                   <a:srgbClr val="43D19E"/>
@@ -7944,6 +8263,7 @@
               </a:defRPr>
             </a:lvl7pPr>
             <a:lvl8pPr>
+              <a:buNone/>
               <a:defRPr sz="1050" b="1">
                 <a:solidFill>
                   <a:srgbClr val="43D19E"/>
@@ -7954,6 +8274,7 @@
               </a:defRPr>
             </a:lvl8pPr>
             <a:lvl9pPr>
+              <a:buNone/>
               <a:defRPr sz="1050" b="1">
                 <a:solidFill>
                   <a:srgbClr val="43D19E"/>
@@ -7966,6 +8287,7 @@
           </a:lstStyle>
           <a:p xmlns:a="http://schemas.openxmlformats.org/drawingml/2006/main">
             <a:pPr>
+              <a:buNone/>
               <a:defRPr sz="1050" b="1">
                 <a:solidFill>
                   <a:srgbClr val="43D19E"/>
@@ -8060,6 +8382,7 @@
               </a:defRPr>
             </a:defPPr>
             <a:lvl1pPr>
+              <a:buNone/>
               <a:defRPr sz="975" b="1">
                 <a:solidFill>
                   <a:srgbClr val="9B87F5"/>
@@ -8070,6 +8393,7 @@
               </a:defRPr>
             </a:lvl1pPr>
             <a:lvl2pPr>
+              <a:buNone/>
               <a:defRPr sz="975" b="1">
                 <a:solidFill>
                   <a:srgbClr val="9B87F5"/>
@@ -8080,6 +8404,7 @@
               </a:defRPr>
             </a:lvl2pPr>
             <a:lvl3pPr>
+              <a:buNone/>
               <a:defRPr sz="975" b="1">
                 <a:solidFill>
                   <a:srgbClr val="9B87F5"/>
@@ -8090,6 +8415,7 @@
               </a:defRPr>
             </a:lvl3pPr>
             <a:lvl4pPr>
+              <a:buNone/>
               <a:defRPr sz="975" b="1">
                 <a:solidFill>
                   <a:srgbClr val="9B87F5"/>
@@ -8100,6 +8426,7 @@
               </a:defRPr>
             </a:lvl4pPr>
             <a:lvl5pPr>
+              <a:buNone/>
               <a:defRPr sz="975" b="1">
                 <a:solidFill>
                   <a:srgbClr val="9B87F5"/>
@@ -8110,6 +8437,7 @@
               </a:defRPr>
             </a:lvl5pPr>
             <a:lvl6pPr>
+              <a:buNone/>
               <a:defRPr sz="975" b="1">
                 <a:solidFill>
                   <a:srgbClr val="9B87F5"/>
@@ -8120,6 +8448,7 @@
               </a:defRPr>
             </a:lvl6pPr>
             <a:lvl7pPr>
+              <a:buNone/>
               <a:defRPr sz="975" b="1">
                 <a:solidFill>
                   <a:srgbClr val="9B87F5"/>
@@ -8130,6 +8459,7 @@
               </a:defRPr>
             </a:lvl7pPr>
             <a:lvl8pPr>
+              <a:buNone/>
               <a:defRPr sz="975" b="1">
                 <a:solidFill>
                   <a:srgbClr val="9B87F5"/>
@@ -8140,6 +8470,7 @@
               </a:defRPr>
             </a:lvl8pPr>
             <a:lvl9pPr>
+              <a:buNone/>
               <a:defRPr sz="975" b="1">
                 <a:solidFill>
                   <a:srgbClr val="9B87F5"/>
@@ -8152,6 +8483,7 @@
           </a:lstStyle>
           <a:p xmlns:a="http://schemas.openxmlformats.org/drawingml/2006/main">
             <a:pPr>
+              <a:buNone/>
               <a:defRPr sz="975" b="1">
                 <a:solidFill>
                   <a:srgbClr val="9B87F5"/>
@@ -8217,6 +8549,7 @@
               </a:defRPr>
             </a:defPPr>
             <a:lvl1pPr>
+              <a:buNone/>
               <a:defRPr sz="2550" b="1">
                 <a:solidFill>
                   <a:srgbClr val="F8FAFC"/>
@@ -8227,6 +8560,7 @@
               </a:defRPr>
             </a:lvl1pPr>
             <a:lvl2pPr>
+              <a:buNone/>
               <a:defRPr sz="2550" b="1">
                 <a:solidFill>
                   <a:srgbClr val="F8FAFC"/>
@@ -8237,6 +8571,7 @@
               </a:defRPr>
             </a:lvl2pPr>
             <a:lvl3pPr>
+              <a:buNone/>
               <a:defRPr sz="2550" b="1">
                 <a:solidFill>
                   <a:srgbClr val="F8FAFC"/>
@@ -8247,6 +8582,7 @@
               </a:defRPr>
             </a:lvl3pPr>
             <a:lvl4pPr>
+              <a:buNone/>
               <a:defRPr sz="2550" b="1">
                 <a:solidFill>
                   <a:srgbClr val="F8FAFC"/>
@@ -8257,6 +8593,7 @@
               </a:defRPr>
             </a:lvl4pPr>
             <a:lvl5pPr>
+              <a:buNone/>
               <a:defRPr sz="2550" b="1">
                 <a:solidFill>
                   <a:srgbClr val="F8FAFC"/>
@@ -8267,6 +8604,7 @@
               </a:defRPr>
             </a:lvl5pPr>
             <a:lvl6pPr>
+              <a:buNone/>
               <a:defRPr sz="2550" b="1">
                 <a:solidFill>
                   <a:srgbClr val="F8FAFC"/>
@@ -8277,6 +8615,7 @@
               </a:defRPr>
             </a:lvl6pPr>
             <a:lvl7pPr>
+              <a:buNone/>
               <a:defRPr sz="2550" b="1">
                 <a:solidFill>
                   <a:srgbClr val="F8FAFC"/>
@@ -8287,6 +8626,7 @@
               </a:defRPr>
             </a:lvl7pPr>
             <a:lvl8pPr>
+              <a:buNone/>
               <a:defRPr sz="2550" b="1">
                 <a:solidFill>
                   <a:srgbClr val="F8FAFC"/>
@@ -8297,6 +8637,7 @@
               </a:defRPr>
             </a:lvl8pPr>
             <a:lvl9pPr>
+              <a:buNone/>
               <a:defRPr sz="2550" b="1">
                 <a:solidFill>
                   <a:srgbClr val="F8FAFC"/>
@@ -8309,6 +8650,7 @@
           </a:lstStyle>
           <a:p xmlns:a="http://schemas.openxmlformats.org/drawingml/2006/main">
             <a:pPr>
+              <a:buNone/>
               <a:defRPr sz="2550" b="1">
                 <a:solidFill>
                   <a:srgbClr val="F8FAFC"/>
@@ -8405,6 +8747,7 @@
               </a:defRPr>
             </a:defPPr>
             <a:lvl1pPr algn="r">
+              <a:buNone/>
               <a:defRPr sz="900" b="1">
                 <a:solidFill>
                   <a:srgbClr val="A8B3C7"/>
@@ -8415,6 +8758,7 @@
               </a:defRPr>
             </a:lvl1pPr>
             <a:lvl2pPr algn="r">
+              <a:buNone/>
               <a:defRPr sz="900" b="1">
                 <a:solidFill>
                   <a:srgbClr val="A8B3C7"/>
@@ -8425,6 +8769,7 @@
               </a:defRPr>
             </a:lvl2pPr>
             <a:lvl3pPr algn="r">
+              <a:buNone/>
               <a:defRPr sz="900" b="1">
                 <a:solidFill>
                   <a:srgbClr val="A8B3C7"/>
@@ -8435,6 +8780,7 @@
               </a:defRPr>
             </a:lvl3pPr>
             <a:lvl4pPr algn="r">
+              <a:buNone/>
               <a:defRPr sz="900" b="1">
                 <a:solidFill>
                   <a:srgbClr val="A8B3C7"/>
@@ -8445,6 +8791,7 @@
               </a:defRPr>
             </a:lvl4pPr>
             <a:lvl5pPr algn="r">
+              <a:buNone/>
               <a:defRPr sz="900" b="1">
                 <a:solidFill>
                   <a:srgbClr val="A8B3C7"/>
@@ -8455,6 +8802,7 @@
               </a:defRPr>
             </a:lvl5pPr>
             <a:lvl6pPr algn="r">
+              <a:buNone/>
               <a:defRPr sz="900" b="1">
                 <a:solidFill>
                   <a:srgbClr val="A8B3C7"/>
@@ -8465,6 +8813,7 @@
               </a:defRPr>
             </a:lvl6pPr>
             <a:lvl7pPr algn="r">
+              <a:buNone/>
               <a:defRPr sz="900" b="1">
                 <a:solidFill>
                   <a:srgbClr val="A8B3C7"/>
@@ -8475,6 +8824,7 @@
               </a:defRPr>
             </a:lvl7pPr>
             <a:lvl8pPr algn="r">
+              <a:buNone/>
               <a:defRPr sz="900" b="1">
                 <a:solidFill>
                   <a:srgbClr val="A8B3C7"/>
@@ -8485,6 +8835,7 @@
               </a:defRPr>
             </a:lvl8pPr>
             <a:lvl9pPr algn="r">
+              <a:buNone/>
               <a:defRPr sz="900" b="1">
                 <a:solidFill>
                   <a:srgbClr val="A8B3C7"/>
@@ -8497,6 +8848,7 @@
           </a:lstStyle>
           <a:p xmlns:a="http://schemas.openxmlformats.org/drawingml/2006/main">
             <a:pPr algn="r">
+              <a:buNone/>
               <a:defRPr sz="900" b="1">
                 <a:solidFill>
                   <a:srgbClr val="A8B3C7"/>
@@ -8562,6 +8914,7 @@
               </a:defRPr>
             </a:defPPr>
             <a:lvl1pPr algn="ctr">
+              <a:buNone/>
               <a:defRPr sz="1425" b="1">
                 <a:solidFill>
                   <a:srgbClr val="F8FAFC"/>
@@ -8572,6 +8925,7 @@
               </a:defRPr>
             </a:lvl1pPr>
             <a:lvl2pPr algn="ctr">
+              <a:buNone/>
               <a:defRPr sz="1425" b="1">
                 <a:solidFill>
                   <a:srgbClr val="F8FAFC"/>
@@ -8582,6 +8936,7 @@
               </a:defRPr>
             </a:lvl2pPr>
             <a:lvl3pPr algn="ctr">
+              <a:buNone/>
               <a:defRPr sz="1425" b="1">
                 <a:solidFill>
                   <a:srgbClr val="F8FAFC"/>
@@ -8592,6 +8947,7 @@
               </a:defRPr>
             </a:lvl3pPr>
             <a:lvl4pPr algn="ctr">
+              <a:buNone/>
               <a:defRPr sz="1425" b="1">
                 <a:solidFill>
                   <a:srgbClr val="F8FAFC"/>
@@ -8602,6 +8958,7 @@
               </a:defRPr>
             </a:lvl4pPr>
             <a:lvl5pPr algn="ctr">
+              <a:buNone/>
               <a:defRPr sz="1425" b="1">
                 <a:solidFill>
                   <a:srgbClr val="F8FAFC"/>
@@ -8612,6 +8969,7 @@
               </a:defRPr>
             </a:lvl5pPr>
             <a:lvl6pPr algn="ctr">
+              <a:buNone/>
               <a:defRPr sz="1425" b="1">
                 <a:solidFill>
                   <a:srgbClr val="F8FAFC"/>
@@ -8622,6 +8980,7 @@
               </a:defRPr>
             </a:lvl6pPr>
             <a:lvl7pPr algn="ctr">
+              <a:buNone/>
               <a:defRPr sz="1425" b="1">
                 <a:solidFill>
                   <a:srgbClr val="F8FAFC"/>
@@ -8632,6 +8991,7 @@
               </a:defRPr>
             </a:lvl7pPr>
             <a:lvl8pPr algn="ctr">
+              <a:buNone/>
               <a:defRPr sz="1425" b="1">
                 <a:solidFill>
                   <a:srgbClr val="F8FAFC"/>
@@ -8642,6 +9002,7 @@
               </a:defRPr>
             </a:lvl8pPr>
             <a:lvl9pPr algn="ctr">
+              <a:buNone/>
               <a:defRPr sz="1425" b="1">
                 <a:solidFill>
                   <a:srgbClr val="F8FAFC"/>
@@ -8654,6 +9015,7 @@
           </a:lstStyle>
           <a:p xmlns:a="http://schemas.openxmlformats.org/drawingml/2006/main">
             <a:pPr algn="ctr">
+              <a:buNone/>
               <a:defRPr sz="1425" b="1">
                 <a:solidFill>
                   <a:srgbClr val="F8FAFC"/>
@@ -8717,7 +9079,7 @@
           <p:cNvPr id="7" name="">
             <a:extLst xmlns:a="http://schemas.openxmlformats.org/drawingml/2006/main">
               <a:ext uri="{FF2B5EF4-FFF2-40B4-BE49-F238E27FC236}">
-                <a16:creationId xmlns:a16="http://schemas.microsoft.com/office/drawing/2014/main" id="{911AB4A9-72B0-46B7-824C-3C15D1F8A414}"/>
+                <a16:creationId xmlns:a16="http://schemas.microsoft.com/office/drawing/2014/main" id="{4DD26EB6-4F86-4776-A529-FE881D366658}"/>
               </a:ext>
             </a:extLst>
           </p:cNvPr>
@@ -8727,7 +9089,7 @@
           <p:nvPr/>
         </p:nvPicPr>
         <p:blipFill>
-          <a:blip xmlns:r="http://schemas.openxmlformats.org/officeDocument/2006/relationships" xmlns:a="http://schemas.openxmlformats.org/drawingml/2006/main" r:embed="Ra7c582c0d92b4bbe"/>
+          <a:blip xmlns:r="http://schemas.openxmlformats.org/officeDocument/2006/relationships" xmlns:a="http://schemas.openxmlformats.org/drawingml/2006/main" r:embed="R9720ac89c1204601"/>
           <a:stretch xmlns:a="http://schemas.openxmlformats.org/drawingml/2006/main"/>
         </p:blipFill>
         <p:spPr>
@@ -8784,6 +9146,7 @@
               </a:defRPr>
             </a:defPPr>
             <a:lvl1pPr algn="ctr">
+              <a:buNone/>
               <a:defRPr sz="1425" b="1">
                 <a:solidFill>
                   <a:srgbClr val="F8FAFC"/>
@@ -8794,6 +9157,7 @@
               </a:defRPr>
             </a:lvl1pPr>
             <a:lvl2pPr algn="ctr">
+              <a:buNone/>
               <a:defRPr sz="1425" b="1">
                 <a:solidFill>
                   <a:srgbClr val="F8FAFC"/>
@@ -8804,6 +9168,7 @@
               </a:defRPr>
             </a:lvl2pPr>
             <a:lvl3pPr algn="ctr">
+              <a:buNone/>
               <a:defRPr sz="1425" b="1">
                 <a:solidFill>
                   <a:srgbClr val="F8FAFC"/>
@@ -8814,6 +9179,7 @@
               </a:defRPr>
             </a:lvl3pPr>
             <a:lvl4pPr algn="ctr">
+              <a:buNone/>
               <a:defRPr sz="1425" b="1">
                 <a:solidFill>
                   <a:srgbClr val="F8FAFC"/>
@@ -8824,6 +9190,7 @@
               </a:defRPr>
             </a:lvl4pPr>
             <a:lvl5pPr algn="ctr">
+              <a:buNone/>
               <a:defRPr sz="1425" b="1">
                 <a:solidFill>
                   <a:srgbClr val="F8FAFC"/>
@@ -8834,6 +9201,7 @@
               </a:defRPr>
             </a:lvl5pPr>
             <a:lvl6pPr algn="ctr">
+              <a:buNone/>
               <a:defRPr sz="1425" b="1">
                 <a:solidFill>
                   <a:srgbClr val="F8FAFC"/>
@@ -8844,6 +9212,7 @@
               </a:defRPr>
             </a:lvl6pPr>
             <a:lvl7pPr algn="ctr">
+              <a:buNone/>
               <a:defRPr sz="1425" b="1">
                 <a:solidFill>
                   <a:srgbClr val="F8FAFC"/>
@@ -8854,6 +9223,7 @@
               </a:defRPr>
             </a:lvl7pPr>
             <a:lvl8pPr algn="ctr">
+              <a:buNone/>
               <a:defRPr sz="1425" b="1">
                 <a:solidFill>
                   <a:srgbClr val="F8FAFC"/>
@@ -8864,6 +9234,7 @@
               </a:defRPr>
             </a:lvl8pPr>
             <a:lvl9pPr algn="ctr">
+              <a:buNone/>
               <a:defRPr sz="1425" b="1">
                 <a:solidFill>
                   <a:srgbClr val="F8FAFC"/>
@@ -8876,6 +9247,7 @@
           </a:lstStyle>
           <a:p xmlns:a="http://schemas.openxmlformats.org/drawingml/2006/main">
             <a:pPr algn="ctr">
+              <a:buNone/>
               <a:defRPr sz="1425" b="1">
                 <a:solidFill>
                   <a:srgbClr val="F8FAFC"/>
@@ -8939,7 +9311,7 @@
           <p:cNvPr id="10" name="">
             <a:extLst xmlns:a="http://schemas.openxmlformats.org/drawingml/2006/main">
               <a:ext uri="{FF2B5EF4-FFF2-40B4-BE49-F238E27FC236}">
-                <a16:creationId xmlns:a16="http://schemas.microsoft.com/office/drawing/2014/main" id="{F957CE54-6740-4149-AF0B-8C76BD77398A}"/>
+                <a16:creationId xmlns:a16="http://schemas.microsoft.com/office/drawing/2014/main" id="{9A01D7C6-7513-4AD5-B38C-071AF20A84E6}"/>
               </a:ext>
             </a:extLst>
           </p:cNvPr>
@@ -8949,7 +9321,7 @@
           <p:nvPr/>
         </p:nvPicPr>
         <p:blipFill>
-          <a:blip xmlns:r="http://schemas.openxmlformats.org/officeDocument/2006/relationships" xmlns:a="http://schemas.openxmlformats.org/drawingml/2006/main" r:embed="R2e06f8c5ffb04657"/>
+          <a:blip xmlns:r="http://schemas.openxmlformats.org/officeDocument/2006/relationships" xmlns:a="http://schemas.openxmlformats.org/drawingml/2006/main" r:embed="R0fcdb265fb584423"/>
           <a:stretch xmlns:a="http://schemas.openxmlformats.org/drawingml/2006/main"/>
         </p:blipFill>
         <p:spPr>
@@ -9006,6 +9378,7 @@
               </a:defRPr>
             </a:defPPr>
             <a:lvl1pPr algn="ctr">
+              <a:buNone/>
               <a:defRPr sz="1425" b="1">
                 <a:solidFill>
                   <a:srgbClr val="F8FAFC"/>
@@ -9016,6 +9389,7 @@
               </a:defRPr>
             </a:lvl1pPr>
             <a:lvl2pPr algn="ctr">
+              <a:buNone/>
               <a:defRPr sz="1425" b="1">
                 <a:solidFill>
                   <a:srgbClr val="F8FAFC"/>
@@ -9026,6 +9400,7 @@
               </a:defRPr>
             </a:lvl2pPr>
             <a:lvl3pPr algn="ctr">
+              <a:buNone/>
               <a:defRPr sz="1425" b="1">
                 <a:solidFill>
                   <a:srgbClr val="F8FAFC"/>
@@ -9036,6 +9411,7 @@
               </a:defRPr>
             </a:lvl3pPr>
             <a:lvl4pPr algn="ctr">
+              <a:buNone/>
               <a:defRPr sz="1425" b="1">
                 <a:solidFill>
                   <a:srgbClr val="F8FAFC"/>
@@ -9046,6 +9422,7 @@
               </a:defRPr>
             </a:lvl4pPr>
             <a:lvl5pPr algn="ctr">
+              <a:buNone/>
               <a:defRPr sz="1425" b="1">
                 <a:solidFill>
                   <a:srgbClr val="F8FAFC"/>
@@ -9056,6 +9433,7 @@
               </a:defRPr>
             </a:lvl5pPr>
             <a:lvl6pPr algn="ctr">
+              <a:buNone/>
               <a:defRPr sz="1425" b="1">
                 <a:solidFill>
                   <a:srgbClr val="F8FAFC"/>
@@ -9066,6 +9444,7 @@
               </a:defRPr>
             </a:lvl6pPr>
             <a:lvl7pPr algn="ctr">
+              <a:buNone/>
               <a:defRPr sz="1425" b="1">
                 <a:solidFill>
                   <a:srgbClr val="F8FAFC"/>
@@ -9076,6 +9455,7 @@
               </a:defRPr>
             </a:lvl7pPr>
             <a:lvl8pPr algn="ctr">
+              <a:buNone/>
               <a:defRPr sz="1425" b="1">
                 <a:solidFill>
                   <a:srgbClr val="F8FAFC"/>
@@ -9086,6 +9466,7 @@
               </a:defRPr>
             </a:lvl8pPr>
             <a:lvl9pPr algn="ctr">
+              <a:buNone/>
               <a:defRPr sz="1425" b="1">
                 <a:solidFill>
                   <a:srgbClr val="F8FAFC"/>
@@ -9098,6 +9479,7 @@
           </a:lstStyle>
           <a:p xmlns:a="http://schemas.openxmlformats.org/drawingml/2006/main">
             <a:pPr algn="ctr">
+              <a:buNone/>
               <a:defRPr sz="1425" b="1">
                 <a:solidFill>
                   <a:srgbClr val="F8FAFC"/>
@@ -9161,7 +9543,7 @@
           <p:cNvPr id="13" name="">
             <a:extLst xmlns:a="http://schemas.openxmlformats.org/drawingml/2006/main">
               <a:ext uri="{FF2B5EF4-FFF2-40B4-BE49-F238E27FC236}">
-                <a16:creationId xmlns:a16="http://schemas.microsoft.com/office/drawing/2014/main" id="{4C1A2471-53A6-4079-AF4C-56C1D8BF1F28}"/>
+                <a16:creationId xmlns:a16="http://schemas.microsoft.com/office/drawing/2014/main" id="{45241A5A-EEF7-47AC-91AD-8C0B3E9DF8EF}"/>
               </a:ext>
             </a:extLst>
           </p:cNvPr>
@@ -9171,7 +9553,7 @@
           <p:nvPr/>
         </p:nvPicPr>
         <p:blipFill>
-          <a:blip xmlns:r="http://schemas.openxmlformats.org/officeDocument/2006/relationships" xmlns:a="http://schemas.openxmlformats.org/drawingml/2006/main" r:embed="Rd9174e16ca3342fc"/>
+          <a:blip xmlns:r="http://schemas.openxmlformats.org/officeDocument/2006/relationships" xmlns:a="http://schemas.openxmlformats.org/drawingml/2006/main" r:embed="R7a0130141e86443c"/>
           <a:stretch xmlns:a="http://schemas.openxmlformats.org/drawingml/2006/main"/>
         </p:blipFill>
         <p:spPr>
@@ -9228,6 +9610,7 @@
               </a:defRPr>
             </a:defPPr>
             <a:lvl1pPr>
+              <a:buNone/>
               <a:defRPr sz="975">
                 <a:solidFill>
                   <a:srgbClr val="A8B3C7"/>
@@ -9238,6 +9621,7 @@
               </a:defRPr>
             </a:lvl1pPr>
             <a:lvl2pPr>
+              <a:buNone/>
               <a:defRPr sz="975">
                 <a:solidFill>
                   <a:srgbClr val="A8B3C7"/>
@@ -9248,6 +9632,7 @@
               </a:defRPr>
             </a:lvl2pPr>
             <a:lvl3pPr>
+              <a:buNone/>
               <a:defRPr sz="975">
                 <a:solidFill>
                   <a:srgbClr val="A8B3C7"/>
@@ -9258,6 +9643,7 @@
               </a:defRPr>
             </a:lvl3pPr>
             <a:lvl4pPr>
+              <a:buNone/>
               <a:defRPr sz="975">
                 <a:solidFill>
                   <a:srgbClr val="A8B3C7"/>
@@ -9268,6 +9654,7 @@
               </a:defRPr>
             </a:lvl4pPr>
             <a:lvl5pPr>
+              <a:buNone/>
               <a:defRPr sz="975">
                 <a:solidFill>
                   <a:srgbClr val="A8B3C7"/>
@@ -9278,6 +9665,7 @@
               </a:defRPr>
             </a:lvl5pPr>
             <a:lvl6pPr>
+              <a:buNone/>
               <a:defRPr sz="975">
                 <a:solidFill>
                   <a:srgbClr val="A8B3C7"/>
@@ -9288,6 +9676,7 @@
               </a:defRPr>
             </a:lvl6pPr>
             <a:lvl7pPr>
+              <a:buNone/>
               <a:defRPr sz="975">
                 <a:solidFill>
                   <a:srgbClr val="A8B3C7"/>
@@ -9298,6 +9687,7 @@
               </a:defRPr>
             </a:lvl7pPr>
             <a:lvl8pPr>
+              <a:buNone/>
               <a:defRPr sz="975">
                 <a:solidFill>
                   <a:srgbClr val="A8B3C7"/>
@@ -9308,6 +9698,7 @@
               </a:defRPr>
             </a:lvl8pPr>
             <a:lvl9pPr>
+              <a:buNone/>
               <a:defRPr sz="975">
                 <a:solidFill>
                   <a:srgbClr val="A8B3C7"/>
@@ -9320,6 +9711,7 @@
           </a:lstStyle>
           <a:p xmlns:a="http://schemas.openxmlformats.org/drawingml/2006/main">
             <a:pPr>
+              <a:buNone/>
               <a:defRPr sz="975">
                 <a:solidFill>
                   <a:srgbClr val="A8B3C7"/>
@@ -9374,10 +9766,10 @@
       </p:grpSpPr>
       <p:sp>
         <p:nvSpPr>
-          <p:cNvPr id="21" name="">
+          <p:cNvPr id="18" name="">
             <a:extLst xmlns:a="http://schemas.openxmlformats.org/drawingml/2006/main">
               <a:ext uri="{FF2B5EF4-FFF2-40B4-BE49-F238E27FC236}">
-                <a16:creationId xmlns:a16="http://schemas.microsoft.com/office/drawing/2014/main" id="{3BE5D759-4EF4-428B-BEA4-21388582B489}"/>
+                <a16:creationId xmlns:a16="http://schemas.microsoft.com/office/drawing/2014/main" id="{C56930FF-4578-4826-904A-4D6C6AC232ED}"/>
               </a:ext>
             </a:extLst>
           </p:cNvPr>
@@ -9534,7 +9926,7 @@
           <p:cNvPr id="2" name="">
             <a:extLst xmlns:a="http://schemas.openxmlformats.org/drawingml/2006/main">
               <a:ext uri="{FF2B5EF4-FFF2-40B4-BE49-F238E27FC236}">
-                <a16:creationId xmlns:a16="http://schemas.microsoft.com/office/drawing/2014/main" id="{3966B7B9-8BD2-4E8A-AFFD-D68ED2DD7B46}"/>
+                <a16:creationId xmlns:a16="http://schemas.microsoft.com/office/drawing/2014/main" id="{8D2690C5-AE6F-43DA-9E15-92AAECEC5828}"/>
               </a:ext>
             </a:extLst>
           </p:cNvPr>
@@ -9681,7 +10073,7 @@
                 <a:ea typeface="Noto Sans CJK KR"/>
                 <a:cs typeface="Noto Sans CJK KR"/>
               </a:rPr>
-              <a:t>실모델에서는 전체 에이전트가 단독 VLM보다 정확도가 낮았다</a:t>
+              <a:t>실모델 검증에서 시각 모델 병목이 드러났다</a:t>
             </a:r>
           </a:p>
         </p:txBody>
@@ -9691,7 +10083,7 @@
           <p:cNvPr id="3" name="">
             <a:extLst xmlns:a="http://schemas.openxmlformats.org/drawingml/2006/main">
               <a:ext uri="{FF2B5EF4-FFF2-40B4-BE49-F238E27FC236}">
-                <a16:creationId xmlns:a16="http://schemas.microsoft.com/office/drawing/2014/main" id="{2291FCA5-409F-48D5-BB1A-4776BF98D655}"/>
+                <a16:creationId xmlns:a16="http://schemas.microsoft.com/office/drawing/2014/main" id="{C87797F2-821E-4D20-B691-25D29C1B2197}"/>
               </a:ext>
             </a:extLst>
           </p:cNvPr>
@@ -9722,7 +10114,7 @@
           <p:cNvPr id="4" name="">
             <a:extLst xmlns:a="http://schemas.openxmlformats.org/drawingml/2006/main">
               <a:ext uri="{FF2B5EF4-FFF2-40B4-BE49-F238E27FC236}">
-                <a16:creationId xmlns:a16="http://schemas.microsoft.com/office/drawing/2014/main" id="{51CB5CF5-16AD-414F-80A4-26F9D12B8DAF}"/>
+                <a16:creationId xmlns:a16="http://schemas.microsoft.com/office/drawing/2014/main" id="{DAD13B8A-4BBE-4116-BE40-D7DAE8538F4C}"/>
               </a:ext>
             </a:extLst>
           </p:cNvPr>
@@ -9874,12 +10266,34 @@
           </a:p>
         </p:txBody>
       </p:sp>
+      <p:graphicFrame>
+        <p:nvGraphicFramePr>
+          <p:cNvPr id="5" name="Chart">
+            <a:extLst xmlns:a="http://schemas.openxmlformats.org/drawingml/2006/main">
+              <a:ext uri="{FF2B5EF4-FFF2-40B4-BE49-F238E27FC236}">
+                <a16:creationId xmlns:a16="http://schemas.microsoft.com/office/drawing/2014/main" id="{3D93FE3A-75D8-47D4-90FE-3FA405AF8E4C}"/>
+              </a:ext>
+            </a:extLst>
+          </p:cNvPr>
+          <p:cNvGraphicFramePr/>
+          <p:nvPr/>
+        </p:nvGraphicFramePr>
+        <p:xfrm>
+          <a:off xmlns:a="http://schemas.openxmlformats.org/drawingml/2006/main" x="609600" y="1581150"/>
+          <a:ext xmlns:a="http://schemas.openxmlformats.org/drawingml/2006/main" cx="6705600" cy="2857500"/>
+        </p:xfrm>
+        <a:graphic xmlns:a="http://schemas.openxmlformats.org/drawingml/2006/main">
+          <a:graphicData uri="http://schemas.openxmlformats.org/drawingml/2006/chart">
+            <c:chart xmlns:r="http://schemas.openxmlformats.org/officeDocument/2006/relationships" xmlns:c="http://schemas.openxmlformats.org/drawingml/2006/chart" r:id="Rb39b6a8d0af847c3"/>
+          </a:graphicData>
+        </a:graphic>
+      </p:graphicFrame>
       <p:sp>
         <p:nvSpPr>
-          <p:cNvPr id="5" name="">
+          <p:cNvPr id="6" name="">
             <a:extLst xmlns:a="http://schemas.openxmlformats.org/drawingml/2006/main">
               <a:ext uri="{FF2B5EF4-FFF2-40B4-BE49-F238E27FC236}">
-                <a16:creationId xmlns:a16="http://schemas.microsoft.com/office/drawing/2014/main" id="{393C21B1-CC6D-4447-89B2-5A6815FEBB81}"/>
+                <a16:creationId xmlns:a16="http://schemas.microsoft.com/office/drawing/2014/main" id="{919792F8-BA1A-4478-8FBC-B07045126130}"/>
               </a:ext>
             </a:extLst>
           </p:cNvPr>
@@ -9890,65 +10304,8 @@
         </p:nvSpPr>
         <p:spPr>
           <a:xfrm xmlns:a="http://schemas.openxmlformats.org/drawingml/2006/main">
-            <a:off x="609600" y="1504950"/>
-            <a:ext cx="6572250" cy="4229100"/>
-          </a:xfrm>
-          <a:prstGeom xmlns:a="http://schemas.openxmlformats.org/drawingml/2006/main" prst="roundRect">
-            <a:avLst>
-              <a:gd name="adj" fmla="val 2703"/>
-            </a:avLst>
-          </a:prstGeom>
-          <a:solidFill xmlns:a="http://schemas.openxmlformats.org/drawingml/2006/main">
-            <a:srgbClr val="141B2D"/>
-          </a:solidFill>
-          <a:ln xmlns:a="http://schemas.openxmlformats.org/drawingml/2006/main" w="9525">
-            <a:solidFill>
-              <a:srgbClr val="334155"/>
-            </a:solidFill>
-            <a:prstDash val="solid"/>
-          </a:ln>
-        </p:spPr>
-      </p:sp>
-      <p:graphicFrame>
-        <p:nvGraphicFramePr>
-          <p:cNvPr id="6" name="Chart">
-            <a:extLst xmlns:a="http://schemas.openxmlformats.org/drawingml/2006/main">
-              <a:ext uri="{FF2B5EF4-FFF2-40B4-BE49-F238E27FC236}">
-                <a16:creationId xmlns:a16="http://schemas.microsoft.com/office/drawing/2014/main" id="{5A1543DC-4716-4A1B-AB32-F6E71A78CD61}"/>
-              </a:ext>
-            </a:extLst>
-          </p:cNvPr>
-          <p:cNvGraphicFramePr/>
-          <p:nvPr/>
-        </p:nvGraphicFramePr>
-        <p:xfrm>
-          <a:off xmlns:a="http://schemas.openxmlformats.org/drawingml/2006/main" x="895350" y="1695450"/>
-          <a:ext xmlns:a="http://schemas.openxmlformats.org/drawingml/2006/main" cx="6000750" cy="3638550"/>
-        </p:xfrm>
-        <a:graphic xmlns:a="http://schemas.openxmlformats.org/drawingml/2006/main">
-          <a:graphicData uri="http://schemas.openxmlformats.org/drawingml/2006/chart">
-            <c:chart xmlns:r="http://schemas.openxmlformats.org/officeDocument/2006/relationships" xmlns:c="http://schemas.openxmlformats.org/drawingml/2006/chart" r:id="R67ae80c3ff9b4ad0"/>
-          </a:graphicData>
-        </a:graphic>
-      </p:graphicFrame>
-      <p:sp>
-        <p:nvSpPr>
-          <p:cNvPr id="7" name="">
-            <a:extLst xmlns:a="http://schemas.openxmlformats.org/drawingml/2006/main">
-              <a:ext uri="{FF2B5EF4-FFF2-40B4-BE49-F238E27FC236}">
-                <a16:creationId xmlns:a16="http://schemas.microsoft.com/office/drawing/2014/main" id="{09B132BA-2A89-435A-A917-AD66F8993CED}"/>
-              </a:ext>
-            </a:extLst>
-          </p:cNvPr>
-          <p:cNvSpPr>
-            <a:spLocks xmlns:a="http://schemas.openxmlformats.org/drawingml/2006/main" noGrp="1"/>
-          </p:cNvSpPr>
-          <p:nvPr/>
-        </p:nvSpPr>
-        <p:spPr>
-          <a:xfrm xmlns:a="http://schemas.openxmlformats.org/drawingml/2006/main">
-            <a:off x="7524750" y="1524000"/>
-            <a:ext cx="3429000" cy="285750"/>
+            <a:off x="7848600" y="1657350"/>
+            <a:ext cx="2952750" cy="647700"/>
           </a:xfrm>
           <a:prstGeom xmlns:a="http://schemas.openxmlformats.org/drawingml/2006/main" prst="rect">
             <a:avLst/>
@@ -9963,9 +10320,9 @@
           <a:bodyPr xmlns:a="http://schemas.openxmlformats.org/drawingml/2006/main"/>
           <a:lstStyle xmlns:a="http://schemas.openxmlformats.org/drawingml/2006/main">
             <a:defPPr>
-              <a:defRPr sz="1050" b="1">
-                <a:solidFill>
-                  <a:srgbClr val="43D19E"/>
+              <a:defRPr sz="3375" b="1">
+                <a:solidFill>
+                  <a:srgbClr val="F5B84B"/>
                 </a:solidFill>
                 <a:latin typeface="Noto Sans CJK KR"/>
                 <a:ea typeface="Noto Sans CJK KR"/>
@@ -9973,9 +10330,9 @@
               </a:defRPr>
             </a:defPPr>
             <a:lvl1pPr>
-              <a:defRPr sz="1050" b="1">
-                <a:solidFill>
-                  <a:srgbClr val="43D19E"/>
+              <a:defRPr sz="3375" b="1">
+                <a:solidFill>
+                  <a:srgbClr val="F5B84B"/>
                 </a:solidFill>
                 <a:latin typeface="Noto Sans CJK KR"/>
                 <a:ea typeface="Noto Sans CJK KR"/>
@@ -9983,9 +10340,9 @@
               </a:defRPr>
             </a:lvl1pPr>
             <a:lvl2pPr>
-              <a:defRPr sz="1050" b="1">
-                <a:solidFill>
-                  <a:srgbClr val="43D19E"/>
+              <a:defRPr sz="3375" b="1">
+                <a:solidFill>
+                  <a:srgbClr val="F5B84B"/>
                 </a:solidFill>
                 <a:latin typeface="Noto Sans CJK KR"/>
                 <a:ea typeface="Noto Sans CJK KR"/>
@@ -9993,9 +10350,9 @@
               </a:defRPr>
             </a:lvl2pPr>
             <a:lvl3pPr>
-              <a:defRPr sz="1050" b="1">
-                <a:solidFill>
-                  <a:srgbClr val="43D19E"/>
+              <a:defRPr sz="3375" b="1">
+                <a:solidFill>
+                  <a:srgbClr val="F5B84B"/>
                 </a:solidFill>
                 <a:latin typeface="Noto Sans CJK KR"/>
                 <a:ea typeface="Noto Sans CJK KR"/>
@@ -10003,9 +10360,9 @@
               </a:defRPr>
             </a:lvl3pPr>
             <a:lvl4pPr>
-              <a:defRPr sz="1050" b="1">
-                <a:solidFill>
-                  <a:srgbClr val="43D19E"/>
+              <a:defRPr sz="3375" b="1">
+                <a:solidFill>
+                  <a:srgbClr val="F5B84B"/>
                 </a:solidFill>
                 <a:latin typeface="Noto Sans CJK KR"/>
                 <a:ea typeface="Noto Sans CJK KR"/>
@@ -10013,9 +10370,9 @@
               </a:defRPr>
             </a:lvl4pPr>
             <a:lvl5pPr>
-              <a:defRPr sz="1050" b="1">
-                <a:solidFill>
-                  <a:srgbClr val="43D19E"/>
+              <a:defRPr sz="3375" b="1">
+                <a:solidFill>
+                  <a:srgbClr val="F5B84B"/>
                 </a:solidFill>
                 <a:latin typeface="Noto Sans CJK KR"/>
                 <a:ea typeface="Noto Sans CJK KR"/>
@@ -10023,9 +10380,9 @@
               </a:defRPr>
             </a:lvl5pPr>
             <a:lvl6pPr>
-              <a:defRPr sz="1050" b="1">
-                <a:solidFill>
-                  <a:srgbClr val="43D19E"/>
+              <a:defRPr sz="3375" b="1">
+                <a:solidFill>
+                  <a:srgbClr val="F5B84B"/>
                 </a:solidFill>
                 <a:latin typeface="Noto Sans CJK KR"/>
                 <a:ea typeface="Noto Sans CJK KR"/>
@@ -10033,9 +10390,9 @@
               </a:defRPr>
             </a:lvl6pPr>
             <a:lvl7pPr>
-              <a:defRPr sz="1050" b="1">
-                <a:solidFill>
-                  <a:srgbClr val="43D19E"/>
+              <a:defRPr sz="3375" b="1">
+                <a:solidFill>
+                  <a:srgbClr val="F5B84B"/>
                 </a:solidFill>
                 <a:latin typeface="Noto Sans CJK KR"/>
                 <a:ea typeface="Noto Sans CJK KR"/>
@@ -10043,9 +10400,9 @@
               </a:defRPr>
             </a:lvl7pPr>
             <a:lvl8pPr>
-              <a:defRPr sz="1050" b="1">
-                <a:solidFill>
-                  <a:srgbClr val="43D19E"/>
+              <a:defRPr sz="3375" b="1">
+                <a:solidFill>
+                  <a:srgbClr val="F5B84B"/>
                 </a:solidFill>
                 <a:latin typeface="Noto Sans CJK KR"/>
                 <a:ea typeface="Noto Sans CJK KR"/>
@@ -10053,9 +10410,9 @@
               </a:defRPr>
             </a:lvl8pPr>
             <a:lvl9pPr>
-              <a:defRPr sz="1050" b="1">
-                <a:solidFill>
-                  <a:srgbClr val="43D19E"/>
+              <a:defRPr sz="3375" b="1">
+                <a:solidFill>
+                  <a:srgbClr val="F5B84B"/>
                 </a:solidFill>
                 <a:latin typeface="Noto Sans CJK KR"/>
                 <a:ea typeface="Noto Sans CJK KR"/>
@@ -10065,9 +10422,9 @@
           </a:lstStyle>
           <a:p xmlns:a="http://schemas.openxmlformats.org/drawingml/2006/main">
             <a:pPr>
-              <a:defRPr sz="1050" b="1">
-                <a:solidFill>
-                  <a:srgbClr val="43D19E"/>
+              <a:defRPr sz="3375" b="1">
+                <a:solidFill>
+                  <a:srgbClr val="F5B84B"/>
                 </a:solidFill>
                 <a:latin typeface="Noto Sans CJK KR"/>
                 <a:ea typeface="Noto Sans CJK KR"/>
@@ -10075,25 +10432,25 @@
               </a:defRPr>
             </a:pPr>
             <a:r>
-              <a:rPr sz="1050" b="1">
-                <a:solidFill>
-                  <a:srgbClr val="43D19E"/>
+              <a:rPr sz="3375" b="1">
+                <a:solidFill>
+                  <a:srgbClr val="F5B84B"/>
                 </a:solidFill>
                 <a:latin typeface="Noto Sans CJK KR"/>
                 <a:ea typeface="Noto Sans CJK KR"/>
                 <a:cs typeface="Noto Sans CJK KR"/>
               </a:rPr>
-              <a:t>Ollama  qwen2.5vl:3b</a:t>
+              <a:t>41 / 52</a:t>
             </a:r>
           </a:p>
         </p:txBody>
       </p:sp>
       <p:sp>
         <p:nvSpPr>
-          <p:cNvPr id="8" name="">
+          <p:cNvPr id="7" name="">
             <a:extLst xmlns:a="http://schemas.openxmlformats.org/drawingml/2006/main">
               <a:ext uri="{FF2B5EF4-FFF2-40B4-BE49-F238E27FC236}">
-                <a16:creationId xmlns:a16="http://schemas.microsoft.com/office/drawing/2014/main" id="{22FC8B1E-1A03-4D01-9B31-A188560E3379}"/>
+                <a16:creationId xmlns:a16="http://schemas.microsoft.com/office/drawing/2014/main" id="{B01AA3DE-B6D1-4499-9B63-F6D75A080210}"/>
               </a:ext>
             </a:extLst>
           </p:cNvPr>
@@ -10104,8 +10461,8 @@
         </p:nvSpPr>
         <p:spPr>
           <a:xfrm xmlns:a="http://schemas.openxmlformats.org/drawingml/2006/main">
-            <a:off x="7524750" y="1952625"/>
-            <a:ext cx="1571625" cy="457200"/>
+            <a:off x="7848600" y="2324100"/>
+            <a:ext cx="3143250" cy="323850"/>
           </a:xfrm>
           <a:prstGeom xmlns:a="http://schemas.openxmlformats.org/drawingml/2006/main" prst="rect">
             <a:avLst/>
@@ -10120,7 +10477,7 @@
           <a:bodyPr xmlns:a="http://schemas.openxmlformats.org/drawingml/2006/main"/>
           <a:lstStyle xmlns:a="http://schemas.openxmlformats.org/drawingml/2006/main">
             <a:defPPr>
-              <a:defRPr sz="2325" b="1">
+              <a:defRPr sz="1500" b="1">
                 <a:solidFill>
                   <a:srgbClr val="F8FAFC"/>
                 </a:solidFill>
@@ -10130,7 +10487,7 @@
               </a:defRPr>
             </a:defPPr>
             <a:lvl1pPr>
-              <a:defRPr sz="2325" b="1">
+              <a:defRPr sz="1500" b="1">
                 <a:solidFill>
                   <a:srgbClr val="F8FAFC"/>
                 </a:solidFill>
@@ -10140,7 +10497,7 @@
               </a:defRPr>
             </a:lvl1pPr>
             <a:lvl2pPr>
-              <a:defRPr sz="2325" b="1">
+              <a:defRPr sz="1500" b="1">
                 <a:solidFill>
                   <a:srgbClr val="F8FAFC"/>
                 </a:solidFill>
@@ -10150,7 +10507,7 @@
               </a:defRPr>
             </a:lvl2pPr>
             <a:lvl3pPr>
-              <a:defRPr sz="2325" b="1">
+              <a:defRPr sz="1500" b="1">
                 <a:solidFill>
                   <a:srgbClr val="F8FAFC"/>
                 </a:solidFill>
@@ -10160,7 +10517,7 @@
               </a:defRPr>
             </a:lvl3pPr>
             <a:lvl4pPr>
-              <a:defRPr sz="2325" b="1">
+              <a:defRPr sz="1500" b="1">
                 <a:solidFill>
                   <a:srgbClr val="F8FAFC"/>
                 </a:solidFill>
@@ -10170,7 +10527,7 @@
               </a:defRPr>
             </a:lvl4pPr>
             <a:lvl5pPr>
-              <a:defRPr sz="2325" b="1">
+              <a:defRPr sz="1500" b="1">
                 <a:solidFill>
                   <a:srgbClr val="F8FAFC"/>
                 </a:solidFill>
@@ -10180,7 +10537,7 @@
               </a:defRPr>
             </a:lvl5pPr>
             <a:lvl6pPr>
-              <a:defRPr sz="2325" b="1">
+              <a:defRPr sz="1500" b="1">
                 <a:solidFill>
                   <a:srgbClr val="F8FAFC"/>
                 </a:solidFill>
@@ -10190,7 +10547,7 @@
               </a:defRPr>
             </a:lvl6pPr>
             <a:lvl7pPr>
-              <a:defRPr sz="2325" b="1">
+              <a:defRPr sz="1500" b="1">
                 <a:solidFill>
                   <a:srgbClr val="F8FAFC"/>
                 </a:solidFill>
@@ -10200,7 +10557,7 @@
               </a:defRPr>
             </a:lvl7pPr>
             <a:lvl8pPr>
-              <a:defRPr sz="2325" b="1">
+              <a:defRPr sz="1500" b="1">
                 <a:solidFill>
                   <a:srgbClr val="F8FAFC"/>
                 </a:solidFill>
@@ -10210,7 +10567,7 @@
               </a:defRPr>
             </a:lvl8pPr>
             <a:lvl9pPr>
-              <a:defRPr sz="2325" b="1">
+              <a:defRPr sz="1500" b="1">
                 <a:solidFill>
                   <a:srgbClr val="F8FAFC"/>
                 </a:solidFill>
@@ -10222,7 +10579,7 @@
           </a:lstStyle>
           <a:p xmlns:a="http://schemas.openxmlformats.org/drawingml/2006/main">
             <a:pPr>
-              <a:defRPr sz="2325" b="1">
+              <a:defRPr sz="1500" b="1">
                 <a:solidFill>
                   <a:srgbClr val="F8FAFC"/>
                 </a:solidFill>
@@ -10232,7 +10589,7 @@
               </a:defRPr>
             </a:pPr>
             <a:r>
-              <a:rPr sz="2325" b="1">
+              <a:rPr sz="1500" b="1">
                 <a:solidFill>
                   <a:srgbClr val="F8FAFC"/>
                 </a:solidFill>
@@ -10240,17 +10597,17 @@
                 <a:ea typeface="Noto Sans CJK KR"/>
                 <a:cs typeface="Noto Sans CJK KR"/>
               </a:rPr>
-              <a:t>52장</a:t>
+              <a:t>근거 부족으로 보류</a:t>
             </a:r>
           </a:p>
         </p:txBody>
       </p:sp>
       <p:sp>
         <p:nvSpPr>
-          <p:cNvPr id="9" name="">
+          <p:cNvPr id="8" name="">
             <a:extLst xmlns:a="http://schemas.openxmlformats.org/drawingml/2006/main">
               <a:ext uri="{FF2B5EF4-FFF2-40B4-BE49-F238E27FC236}">
-                <a16:creationId xmlns:a16="http://schemas.microsoft.com/office/drawing/2014/main" id="{9E9E45E8-F0FA-4791-8CB7-5CA7F142E275}"/>
+                <a16:creationId xmlns:a16="http://schemas.microsoft.com/office/drawing/2014/main" id="{E4E76CB9-D178-447D-B625-3ED6AA6AEB00}"/>
               </a:ext>
             </a:extLst>
           </p:cNvPr>
@@ -10261,8 +10618,8 @@
         </p:nvSpPr>
         <p:spPr>
           <a:xfrm xmlns:a="http://schemas.openxmlformats.org/drawingml/2006/main">
-            <a:off x="7524750" y="2409825"/>
-            <a:ext cx="1571625" cy="323850"/>
+            <a:off x="7848600" y="2762250"/>
+            <a:ext cx="3429000" cy="647700"/>
           </a:xfrm>
           <a:prstGeom xmlns:a="http://schemas.openxmlformats.org/drawingml/2006/main" prst="rect">
             <a:avLst/>
@@ -10277,7 +10634,7 @@
           <a:bodyPr xmlns:a="http://schemas.openxmlformats.org/drawingml/2006/main"/>
           <a:lstStyle xmlns:a="http://schemas.openxmlformats.org/drawingml/2006/main">
             <a:defPPr>
-              <a:defRPr sz="1125">
+              <a:defRPr sz="1275">
                 <a:solidFill>
                   <a:srgbClr val="A8B3C7"/>
                 </a:solidFill>
@@ -10287,7 +10644,7 @@
               </a:defRPr>
             </a:defPPr>
             <a:lvl1pPr>
-              <a:defRPr sz="1125">
+              <a:defRPr sz="1275">
                 <a:solidFill>
                   <a:srgbClr val="A8B3C7"/>
                 </a:solidFill>
@@ -10297,7 +10654,7 @@
               </a:defRPr>
             </a:lvl1pPr>
             <a:lvl2pPr>
-              <a:defRPr sz="1125">
+              <a:defRPr sz="1275">
                 <a:solidFill>
                   <a:srgbClr val="A8B3C7"/>
                 </a:solidFill>
@@ -10307,7 +10664,7 @@
               </a:defRPr>
             </a:lvl2pPr>
             <a:lvl3pPr>
-              <a:defRPr sz="1125">
+              <a:defRPr sz="1275">
                 <a:solidFill>
                   <a:srgbClr val="A8B3C7"/>
                 </a:solidFill>
@@ -10317,7 +10674,7 @@
               </a:defRPr>
             </a:lvl3pPr>
             <a:lvl4pPr>
-              <a:defRPr sz="1125">
+              <a:defRPr sz="1275">
                 <a:solidFill>
                   <a:srgbClr val="A8B3C7"/>
                 </a:solidFill>
@@ -10327,7 +10684,7 @@
               </a:defRPr>
             </a:lvl4pPr>
             <a:lvl5pPr>
-              <a:defRPr sz="1125">
+              <a:defRPr sz="1275">
                 <a:solidFill>
                   <a:srgbClr val="A8B3C7"/>
                 </a:solidFill>
@@ -10337,7 +10694,7 @@
               </a:defRPr>
             </a:lvl5pPr>
             <a:lvl6pPr>
-              <a:defRPr sz="1125">
+              <a:defRPr sz="1275">
                 <a:solidFill>
                   <a:srgbClr val="A8B3C7"/>
                 </a:solidFill>
@@ -10347,7 +10704,7 @@
               </a:defRPr>
             </a:lvl6pPr>
             <a:lvl7pPr>
-              <a:defRPr sz="1125">
+              <a:defRPr sz="1275">
                 <a:solidFill>
                   <a:srgbClr val="A8B3C7"/>
                 </a:solidFill>
@@ -10357,7 +10714,7 @@
               </a:defRPr>
             </a:lvl7pPr>
             <a:lvl8pPr>
-              <a:defRPr sz="1125">
+              <a:defRPr sz="1275">
                 <a:solidFill>
                   <a:srgbClr val="A8B3C7"/>
                 </a:solidFill>
@@ -10367,7 +10724,7 @@
               </a:defRPr>
             </a:lvl8pPr>
             <a:lvl9pPr>
-              <a:defRPr sz="1125">
+              <a:defRPr sz="1275">
                 <a:solidFill>
                   <a:srgbClr val="A8B3C7"/>
                 </a:solidFill>
@@ -10379,7 +10736,7 @@
           </a:lstStyle>
           <a:p xmlns:a="http://schemas.openxmlformats.org/drawingml/2006/main">
             <a:pPr>
-              <a:defRPr sz="1125">
+              <a:defRPr sz="1275">
                 <a:solidFill>
                   <a:srgbClr val="A8B3C7"/>
                 </a:solidFill>
@@ -10389,7 +10746,7 @@
               </a:defRPr>
             </a:pPr>
             <a:r>
-              <a:rPr sz="1125">
+              <a:rPr sz="1275">
                 <a:solidFill>
                   <a:srgbClr val="A8B3C7"/>
                 </a:solidFill>
@@ -10397,17 +10754,40 @@
                 <a:ea typeface="Noto Sans CJK KR"/>
                 <a:cs typeface="Noto Sans CJK KR"/>
               </a:rPr>
-              <a:t>dev 전체</a:t>
+              <a:t>낮은 근거를 자동 합격으로 바꾸지 않고</a:t>
+            </a:r>
+          </a:p>
+          <a:p xmlns:a="http://schemas.openxmlformats.org/drawingml/2006/main">
+            <a:pPr>
+              <a:defRPr sz="1275">
+                <a:solidFill>
+                  <a:srgbClr val="A8B3C7"/>
+                </a:solidFill>
+                <a:latin typeface="Noto Sans CJK KR"/>
+                <a:ea typeface="Noto Sans CJK KR"/>
+                <a:cs typeface="Noto Sans CJK KR"/>
+              </a:defRPr>
+            </a:pPr>
+            <a:r>
+              <a:rPr sz="1275">
+                <a:solidFill>
+                  <a:srgbClr val="A8B3C7"/>
+                </a:solidFill>
+                <a:latin typeface="Noto Sans CJK KR"/>
+                <a:ea typeface="Noto Sans CJK KR"/>
+                <a:cs typeface="Noto Sans CJK KR"/>
+              </a:rPr>
+              <a:t>사람 검토로 보냈다.</a:t>
             </a:r>
           </a:p>
         </p:txBody>
       </p:sp>
       <p:sp>
         <p:nvSpPr>
-          <p:cNvPr id="10" name="">
+          <p:cNvPr id="9" name="">
             <a:extLst xmlns:a="http://schemas.openxmlformats.org/drawingml/2006/main">
               <a:ext uri="{FF2B5EF4-FFF2-40B4-BE49-F238E27FC236}">
-                <a16:creationId xmlns:a16="http://schemas.microsoft.com/office/drawing/2014/main" id="{3D12C7CB-8F1E-4CBA-8BA7-730509A8084F}"/>
+                <a16:creationId xmlns:a16="http://schemas.microsoft.com/office/drawing/2014/main" id="{E81FBD7C-886B-4788-85DD-930CABC19E39}"/>
               </a:ext>
             </a:extLst>
           </p:cNvPr>
@@ -10418,1142 +10798,8 @@
         </p:nvSpPr>
         <p:spPr>
           <a:xfrm xmlns:a="http://schemas.openxmlformats.org/drawingml/2006/main">
-            <a:off x="9334500" y="1952625"/>
-            <a:ext cx="1809750" cy="457200"/>
-          </a:xfrm>
-          <a:prstGeom xmlns:a="http://schemas.openxmlformats.org/drawingml/2006/main" prst="rect">
-            <a:avLst/>
-          </a:prstGeom>
-          <a:noFill xmlns:a="http://schemas.openxmlformats.org/drawingml/2006/main"/>
-          <a:ln xmlns:a="http://schemas.openxmlformats.org/drawingml/2006/main" w="0">
-            <a:noFill/>
-            <a:prstDash val="solid"/>
-          </a:ln>
-        </p:spPr>
-        <p:txBody>
-          <a:bodyPr xmlns:a="http://schemas.openxmlformats.org/drawingml/2006/main"/>
-          <a:lstStyle xmlns:a="http://schemas.openxmlformats.org/drawingml/2006/main">
-            <a:defPPr>
-              <a:defRPr sz="2325" b="1">
-                <a:solidFill>
-                  <a:srgbClr val="F5B84B"/>
-                </a:solidFill>
-                <a:latin typeface="Noto Sans CJK KR"/>
-                <a:ea typeface="Noto Sans CJK KR"/>
-                <a:cs typeface="Noto Sans CJK KR"/>
-              </a:defRPr>
-            </a:defPPr>
-            <a:lvl1pPr>
-              <a:defRPr sz="2325" b="1">
-                <a:solidFill>
-                  <a:srgbClr val="F5B84B"/>
-                </a:solidFill>
-                <a:latin typeface="Noto Sans CJK KR"/>
-                <a:ea typeface="Noto Sans CJK KR"/>
-                <a:cs typeface="Noto Sans CJK KR"/>
-              </a:defRPr>
-            </a:lvl1pPr>
-            <a:lvl2pPr>
-              <a:defRPr sz="2325" b="1">
-                <a:solidFill>
-                  <a:srgbClr val="F5B84B"/>
-                </a:solidFill>
-                <a:latin typeface="Noto Sans CJK KR"/>
-                <a:ea typeface="Noto Sans CJK KR"/>
-                <a:cs typeface="Noto Sans CJK KR"/>
-              </a:defRPr>
-            </a:lvl2pPr>
-            <a:lvl3pPr>
-              <a:defRPr sz="2325" b="1">
-                <a:solidFill>
-                  <a:srgbClr val="F5B84B"/>
-                </a:solidFill>
-                <a:latin typeface="Noto Sans CJK KR"/>
-                <a:ea typeface="Noto Sans CJK KR"/>
-                <a:cs typeface="Noto Sans CJK KR"/>
-              </a:defRPr>
-            </a:lvl3pPr>
-            <a:lvl4pPr>
-              <a:defRPr sz="2325" b="1">
-                <a:solidFill>
-                  <a:srgbClr val="F5B84B"/>
-                </a:solidFill>
-                <a:latin typeface="Noto Sans CJK KR"/>
-                <a:ea typeface="Noto Sans CJK KR"/>
-                <a:cs typeface="Noto Sans CJK KR"/>
-              </a:defRPr>
-            </a:lvl4pPr>
-            <a:lvl5pPr>
-              <a:defRPr sz="2325" b="1">
-                <a:solidFill>
-                  <a:srgbClr val="F5B84B"/>
-                </a:solidFill>
-                <a:latin typeface="Noto Sans CJK KR"/>
-                <a:ea typeface="Noto Sans CJK KR"/>
-                <a:cs typeface="Noto Sans CJK KR"/>
-              </a:defRPr>
-            </a:lvl5pPr>
-            <a:lvl6pPr>
-              <a:defRPr sz="2325" b="1">
-                <a:solidFill>
-                  <a:srgbClr val="F5B84B"/>
-                </a:solidFill>
-                <a:latin typeface="Noto Sans CJK KR"/>
-                <a:ea typeface="Noto Sans CJK KR"/>
-                <a:cs typeface="Noto Sans CJK KR"/>
-              </a:defRPr>
-            </a:lvl6pPr>
-            <a:lvl7pPr>
-              <a:defRPr sz="2325" b="1">
-                <a:solidFill>
-                  <a:srgbClr val="F5B84B"/>
-                </a:solidFill>
-                <a:latin typeface="Noto Sans CJK KR"/>
-                <a:ea typeface="Noto Sans CJK KR"/>
-                <a:cs typeface="Noto Sans CJK KR"/>
-              </a:defRPr>
-            </a:lvl7pPr>
-            <a:lvl8pPr>
-              <a:defRPr sz="2325" b="1">
-                <a:solidFill>
-                  <a:srgbClr val="F5B84B"/>
-                </a:solidFill>
-                <a:latin typeface="Noto Sans CJK KR"/>
-                <a:ea typeface="Noto Sans CJK KR"/>
-                <a:cs typeface="Noto Sans CJK KR"/>
-              </a:defRPr>
-            </a:lvl8pPr>
-            <a:lvl9pPr>
-              <a:defRPr sz="2325" b="1">
-                <a:solidFill>
-                  <a:srgbClr val="F5B84B"/>
-                </a:solidFill>
-                <a:latin typeface="Noto Sans CJK KR"/>
-                <a:ea typeface="Noto Sans CJK KR"/>
-                <a:cs typeface="Noto Sans CJK KR"/>
-              </a:defRPr>
-            </a:lvl9pPr>
-          </a:lstStyle>
-          <a:p xmlns:a="http://schemas.openxmlformats.org/drawingml/2006/main">
-            <a:pPr>
-              <a:defRPr sz="2325" b="1">
-                <a:solidFill>
-                  <a:srgbClr val="F5B84B"/>
-                </a:solidFill>
-                <a:latin typeface="Noto Sans CJK KR"/>
-                <a:ea typeface="Noto Sans CJK KR"/>
-                <a:cs typeface="Noto Sans CJK KR"/>
-              </a:defRPr>
-            </a:pPr>
-            <a:r>
-              <a:rPr sz="2325" b="1">
-                <a:solidFill>
-                  <a:srgbClr val="F5B84B"/>
-                </a:solidFill>
-                <a:latin typeface="Noto Sans CJK KR"/>
-                <a:ea typeface="Noto Sans CJK KR"/>
-                <a:cs typeface="Noto Sans CJK KR"/>
-              </a:rPr>
-              <a:t>29건</a:t>
-            </a:r>
-          </a:p>
-        </p:txBody>
-      </p:sp>
-      <p:sp>
-        <p:nvSpPr>
-          <p:cNvPr id="11" name="">
-            <a:extLst xmlns:a="http://schemas.openxmlformats.org/drawingml/2006/main">
-              <a:ext uri="{FF2B5EF4-FFF2-40B4-BE49-F238E27FC236}">
-                <a16:creationId xmlns:a16="http://schemas.microsoft.com/office/drawing/2014/main" id="{2EDFF634-61C9-4782-BD97-988B73CBC06E}"/>
-              </a:ext>
-            </a:extLst>
-          </p:cNvPr>
-          <p:cNvSpPr>
-            <a:spLocks xmlns:a="http://schemas.openxmlformats.org/drawingml/2006/main" noGrp="1"/>
-          </p:cNvSpPr>
-          <p:nvPr/>
-        </p:nvSpPr>
-        <p:spPr>
-          <a:xfrm xmlns:a="http://schemas.openxmlformats.org/drawingml/2006/main">
-            <a:off x="9334500" y="2409825"/>
-            <a:ext cx="1809750" cy="323850"/>
-          </a:xfrm>
-          <a:prstGeom xmlns:a="http://schemas.openxmlformats.org/drawingml/2006/main" prst="rect">
-            <a:avLst/>
-          </a:prstGeom>
-          <a:noFill xmlns:a="http://schemas.openxmlformats.org/drawingml/2006/main"/>
-          <a:ln xmlns:a="http://schemas.openxmlformats.org/drawingml/2006/main" w="0">
-            <a:noFill/>
-            <a:prstDash val="solid"/>
-          </a:ln>
-        </p:spPr>
-        <p:txBody>
-          <a:bodyPr xmlns:a="http://schemas.openxmlformats.org/drawingml/2006/main"/>
-          <a:lstStyle xmlns:a="http://schemas.openxmlformats.org/drawingml/2006/main">
-            <a:defPPr>
-              <a:defRPr sz="1125">
-                <a:solidFill>
-                  <a:srgbClr val="A8B3C7"/>
-                </a:solidFill>
-                <a:latin typeface="Noto Sans CJK KR"/>
-                <a:ea typeface="Noto Sans CJK KR"/>
-                <a:cs typeface="Noto Sans CJK KR"/>
-              </a:defRPr>
-            </a:defPPr>
-            <a:lvl1pPr>
-              <a:defRPr sz="1125">
-                <a:solidFill>
-                  <a:srgbClr val="A8B3C7"/>
-                </a:solidFill>
-                <a:latin typeface="Noto Sans CJK KR"/>
-                <a:ea typeface="Noto Sans CJK KR"/>
-                <a:cs typeface="Noto Sans CJK KR"/>
-              </a:defRPr>
-            </a:lvl1pPr>
-            <a:lvl2pPr>
-              <a:defRPr sz="1125">
-                <a:solidFill>
-                  <a:srgbClr val="A8B3C7"/>
-                </a:solidFill>
-                <a:latin typeface="Noto Sans CJK KR"/>
-                <a:ea typeface="Noto Sans CJK KR"/>
-                <a:cs typeface="Noto Sans CJK KR"/>
-              </a:defRPr>
-            </a:lvl2pPr>
-            <a:lvl3pPr>
-              <a:defRPr sz="1125">
-                <a:solidFill>
-                  <a:srgbClr val="A8B3C7"/>
-                </a:solidFill>
-                <a:latin typeface="Noto Sans CJK KR"/>
-                <a:ea typeface="Noto Sans CJK KR"/>
-                <a:cs typeface="Noto Sans CJK KR"/>
-              </a:defRPr>
-            </a:lvl3pPr>
-            <a:lvl4pPr>
-              <a:defRPr sz="1125">
-                <a:solidFill>
-                  <a:srgbClr val="A8B3C7"/>
-                </a:solidFill>
-                <a:latin typeface="Noto Sans CJK KR"/>
-                <a:ea typeface="Noto Sans CJK KR"/>
-                <a:cs typeface="Noto Sans CJK KR"/>
-              </a:defRPr>
-            </a:lvl4pPr>
-            <a:lvl5pPr>
-              <a:defRPr sz="1125">
-                <a:solidFill>
-                  <a:srgbClr val="A8B3C7"/>
-                </a:solidFill>
-                <a:latin typeface="Noto Sans CJK KR"/>
-                <a:ea typeface="Noto Sans CJK KR"/>
-                <a:cs typeface="Noto Sans CJK KR"/>
-              </a:defRPr>
-            </a:lvl5pPr>
-            <a:lvl6pPr>
-              <a:defRPr sz="1125">
-                <a:solidFill>
-                  <a:srgbClr val="A8B3C7"/>
-                </a:solidFill>
-                <a:latin typeface="Noto Sans CJK KR"/>
-                <a:ea typeface="Noto Sans CJK KR"/>
-                <a:cs typeface="Noto Sans CJK KR"/>
-              </a:defRPr>
-            </a:lvl6pPr>
-            <a:lvl7pPr>
-              <a:defRPr sz="1125">
-                <a:solidFill>
-                  <a:srgbClr val="A8B3C7"/>
-                </a:solidFill>
-                <a:latin typeface="Noto Sans CJK KR"/>
-                <a:ea typeface="Noto Sans CJK KR"/>
-                <a:cs typeface="Noto Sans CJK KR"/>
-              </a:defRPr>
-            </a:lvl7pPr>
-            <a:lvl8pPr>
-              <a:defRPr sz="1125">
-                <a:solidFill>
-                  <a:srgbClr val="A8B3C7"/>
-                </a:solidFill>
-                <a:latin typeface="Noto Sans CJK KR"/>
-                <a:ea typeface="Noto Sans CJK KR"/>
-                <a:cs typeface="Noto Sans CJK KR"/>
-              </a:defRPr>
-            </a:lvl8pPr>
-            <a:lvl9pPr>
-              <a:defRPr sz="1125">
-                <a:solidFill>
-                  <a:srgbClr val="A8B3C7"/>
-                </a:solidFill>
-                <a:latin typeface="Noto Sans CJK KR"/>
-                <a:ea typeface="Noto Sans CJK KR"/>
-                <a:cs typeface="Noto Sans CJK KR"/>
-              </a:defRPr>
-            </a:lvl9pPr>
-          </a:lstStyle>
-          <a:p xmlns:a="http://schemas.openxmlformats.org/drawingml/2006/main">
-            <a:pPr>
-              <a:defRPr sz="1125">
-                <a:solidFill>
-                  <a:srgbClr val="A8B3C7"/>
-                </a:solidFill>
-                <a:latin typeface="Noto Sans CJK KR"/>
-                <a:ea typeface="Noto Sans CJK KR"/>
-                <a:cs typeface="Noto Sans CJK KR"/>
-              </a:defRPr>
-            </a:pPr>
-            <a:r>
-              <a:rPr sz="1125">
-                <a:solidFill>
-                  <a:srgbClr val="A8B3C7"/>
-                </a:solidFill>
-                <a:latin typeface="Noto Sans CJK KR"/>
-                <a:ea typeface="Noto Sans CJK KR"/>
-                <a:cs typeface="Noto Sans CJK KR"/>
-              </a:rPr>
-              <a:t>B0 ABSTAIN</a:t>
-            </a:r>
-          </a:p>
-        </p:txBody>
-      </p:sp>
-      <p:sp>
-        <p:nvSpPr>
-          <p:cNvPr id="12" name="">
-            <a:extLst xmlns:a="http://schemas.openxmlformats.org/drawingml/2006/main">
-              <a:ext uri="{FF2B5EF4-FFF2-40B4-BE49-F238E27FC236}">
-                <a16:creationId xmlns:a16="http://schemas.microsoft.com/office/drawing/2014/main" id="{85B6E5A0-F886-43A5-BD41-2DFA00945D7B}"/>
-              </a:ext>
-            </a:extLst>
-          </p:cNvPr>
-          <p:cNvSpPr>
-            <a:spLocks xmlns:a="http://schemas.openxmlformats.org/drawingml/2006/main" noGrp="1"/>
-          </p:cNvSpPr>
-          <p:nvPr/>
-        </p:nvSpPr>
-        <p:spPr>
-          <a:xfrm xmlns:a="http://schemas.openxmlformats.org/drawingml/2006/main">
-            <a:off x="7524750" y="2990850"/>
-            <a:ext cx="1571625" cy="457200"/>
-          </a:xfrm>
-          <a:prstGeom xmlns:a="http://schemas.openxmlformats.org/drawingml/2006/main" prst="rect">
-            <a:avLst/>
-          </a:prstGeom>
-          <a:noFill xmlns:a="http://schemas.openxmlformats.org/drawingml/2006/main"/>
-          <a:ln xmlns:a="http://schemas.openxmlformats.org/drawingml/2006/main" w="0">
-            <a:noFill/>
-            <a:prstDash val="solid"/>
-          </a:ln>
-        </p:spPr>
-        <p:txBody>
-          <a:bodyPr xmlns:a="http://schemas.openxmlformats.org/drawingml/2006/main"/>
-          <a:lstStyle xmlns:a="http://schemas.openxmlformats.org/drawingml/2006/main">
-            <a:defPPr>
-              <a:defRPr sz="2325" b="1">
-                <a:solidFill>
-                  <a:srgbClr val="FF6B6B"/>
-                </a:solidFill>
-                <a:latin typeface="Noto Sans CJK KR"/>
-                <a:ea typeface="Noto Sans CJK KR"/>
-                <a:cs typeface="Noto Sans CJK KR"/>
-              </a:defRPr>
-            </a:defPPr>
-            <a:lvl1pPr>
-              <a:defRPr sz="2325" b="1">
-                <a:solidFill>
-                  <a:srgbClr val="FF6B6B"/>
-                </a:solidFill>
-                <a:latin typeface="Noto Sans CJK KR"/>
-                <a:ea typeface="Noto Sans CJK KR"/>
-                <a:cs typeface="Noto Sans CJK KR"/>
-              </a:defRPr>
-            </a:lvl1pPr>
-            <a:lvl2pPr>
-              <a:defRPr sz="2325" b="1">
-                <a:solidFill>
-                  <a:srgbClr val="FF6B6B"/>
-                </a:solidFill>
-                <a:latin typeface="Noto Sans CJK KR"/>
-                <a:ea typeface="Noto Sans CJK KR"/>
-                <a:cs typeface="Noto Sans CJK KR"/>
-              </a:defRPr>
-            </a:lvl2pPr>
-            <a:lvl3pPr>
-              <a:defRPr sz="2325" b="1">
-                <a:solidFill>
-                  <a:srgbClr val="FF6B6B"/>
-                </a:solidFill>
-                <a:latin typeface="Noto Sans CJK KR"/>
-                <a:ea typeface="Noto Sans CJK KR"/>
-                <a:cs typeface="Noto Sans CJK KR"/>
-              </a:defRPr>
-            </a:lvl3pPr>
-            <a:lvl4pPr>
-              <a:defRPr sz="2325" b="1">
-                <a:solidFill>
-                  <a:srgbClr val="FF6B6B"/>
-                </a:solidFill>
-                <a:latin typeface="Noto Sans CJK KR"/>
-                <a:ea typeface="Noto Sans CJK KR"/>
-                <a:cs typeface="Noto Sans CJK KR"/>
-              </a:defRPr>
-            </a:lvl4pPr>
-            <a:lvl5pPr>
-              <a:defRPr sz="2325" b="1">
-                <a:solidFill>
-                  <a:srgbClr val="FF6B6B"/>
-                </a:solidFill>
-                <a:latin typeface="Noto Sans CJK KR"/>
-                <a:ea typeface="Noto Sans CJK KR"/>
-                <a:cs typeface="Noto Sans CJK KR"/>
-              </a:defRPr>
-            </a:lvl5pPr>
-            <a:lvl6pPr>
-              <a:defRPr sz="2325" b="1">
-                <a:solidFill>
-                  <a:srgbClr val="FF6B6B"/>
-                </a:solidFill>
-                <a:latin typeface="Noto Sans CJK KR"/>
-                <a:ea typeface="Noto Sans CJK KR"/>
-                <a:cs typeface="Noto Sans CJK KR"/>
-              </a:defRPr>
-            </a:lvl6pPr>
-            <a:lvl7pPr>
-              <a:defRPr sz="2325" b="1">
-                <a:solidFill>
-                  <a:srgbClr val="FF6B6B"/>
-                </a:solidFill>
-                <a:latin typeface="Noto Sans CJK KR"/>
-                <a:ea typeface="Noto Sans CJK KR"/>
-                <a:cs typeface="Noto Sans CJK KR"/>
-              </a:defRPr>
-            </a:lvl7pPr>
-            <a:lvl8pPr>
-              <a:defRPr sz="2325" b="1">
-                <a:solidFill>
-                  <a:srgbClr val="FF6B6B"/>
-                </a:solidFill>
-                <a:latin typeface="Noto Sans CJK KR"/>
-                <a:ea typeface="Noto Sans CJK KR"/>
-                <a:cs typeface="Noto Sans CJK KR"/>
-              </a:defRPr>
-            </a:lvl8pPr>
-            <a:lvl9pPr>
-              <a:defRPr sz="2325" b="1">
-                <a:solidFill>
-                  <a:srgbClr val="FF6B6B"/>
-                </a:solidFill>
-                <a:latin typeface="Noto Sans CJK KR"/>
-                <a:ea typeface="Noto Sans CJK KR"/>
-                <a:cs typeface="Noto Sans CJK KR"/>
-              </a:defRPr>
-            </a:lvl9pPr>
-          </a:lstStyle>
-          <a:p xmlns:a="http://schemas.openxmlformats.org/drawingml/2006/main">
-            <a:pPr>
-              <a:defRPr sz="2325" b="1">
-                <a:solidFill>
-                  <a:srgbClr val="FF6B6B"/>
-                </a:solidFill>
-                <a:latin typeface="Noto Sans CJK KR"/>
-                <a:ea typeface="Noto Sans CJK KR"/>
-                <a:cs typeface="Noto Sans CJK KR"/>
-              </a:defRPr>
-            </a:pPr>
-            <a:r>
-              <a:rPr sz="2325" b="1">
-                <a:solidFill>
-                  <a:srgbClr val="FF6B6B"/>
-                </a:solidFill>
-                <a:latin typeface="Noto Sans CJK KR"/>
-                <a:ea typeface="Noto Sans CJK KR"/>
-                <a:cs typeface="Noto Sans CJK KR"/>
-              </a:rPr>
-              <a:t>41건</a:t>
-            </a:r>
-          </a:p>
-        </p:txBody>
-      </p:sp>
-      <p:sp>
-        <p:nvSpPr>
-          <p:cNvPr id="13" name="">
-            <a:extLst xmlns:a="http://schemas.openxmlformats.org/drawingml/2006/main">
-              <a:ext uri="{FF2B5EF4-FFF2-40B4-BE49-F238E27FC236}">
-                <a16:creationId xmlns:a16="http://schemas.microsoft.com/office/drawing/2014/main" id="{4C49106A-D58E-4D99-9208-EF29786E3C45}"/>
-              </a:ext>
-            </a:extLst>
-          </p:cNvPr>
-          <p:cNvSpPr>
-            <a:spLocks xmlns:a="http://schemas.openxmlformats.org/drawingml/2006/main" noGrp="1"/>
-          </p:cNvSpPr>
-          <p:nvPr/>
-        </p:nvSpPr>
-        <p:spPr>
-          <a:xfrm xmlns:a="http://schemas.openxmlformats.org/drawingml/2006/main">
-            <a:off x="7524750" y="3448050"/>
-            <a:ext cx="1571625" cy="323850"/>
-          </a:xfrm>
-          <a:prstGeom xmlns:a="http://schemas.openxmlformats.org/drawingml/2006/main" prst="rect">
-            <a:avLst/>
-          </a:prstGeom>
-          <a:noFill xmlns:a="http://schemas.openxmlformats.org/drawingml/2006/main"/>
-          <a:ln xmlns:a="http://schemas.openxmlformats.org/drawingml/2006/main" w="0">
-            <a:noFill/>
-            <a:prstDash val="solid"/>
-          </a:ln>
-        </p:spPr>
-        <p:txBody>
-          <a:bodyPr xmlns:a="http://schemas.openxmlformats.org/drawingml/2006/main"/>
-          <a:lstStyle xmlns:a="http://schemas.openxmlformats.org/drawingml/2006/main">
-            <a:defPPr>
-              <a:defRPr sz="1125">
-                <a:solidFill>
-                  <a:srgbClr val="A8B3C7"/>
-                </a:solidFill>
-                <a:latin typeface="Noto Sans CJK KR"/>
-                <a:ea typeface="Noto Sans CJK KR"/>
-                <a:cs typeface="Noto Sans CJK KR"/>
-              </a:defRPr>
-            </a:defPPr>
-            <a:lvl1pPr>
-              <a:defRPr sz="1125">
-                <a:solidFill>
-                  <a:srgbClr val="A8B3C7"/>
-                </a:solidFill>
-                <a:latin typeface="Noto Sans CJK KR"/>
-                <a:ea typeface="Noto Sans CJK KR"/>
-                <a:cs typeface="Noto Sans CJK KR"/>
-              </a:defRPr>
-            </a:lvl1pPr>
-            <a:lvl2pPr>
-              <a:defRPr sz="1125">
-                <a:solidFill>
-                  <a:srgbClr val="A8B3C7"/>
-                </a:solidFill>
-                <a:latin typeface="Noto Sans CJK KR"/>
-                <a:ea typeface="Noto Sans CJK KR"/>
-                <a:cs typeface="Noto Sans CJK KR"/>
-              </a:defRPr>
-            </a:lvl2pPr>
-            <a:lvl3pPr>
-              <a:defRPr sz="1125">
-                <a:solidFill>
-                  <a:srgbClr val="A8B3C7"/>
-                </a:solidFill>
-                <a:latin typeface="Noto Sans CJK KR"/>
-                <a:ea typeface="Noto Sans CJK KR"/>
-                <a:cs typeface="Noto Sans CJK KR"/>
-              </a:defRPr>
-            </a:lvl3pPr>
-            <a:lvl4pPr>
-              <a:defRPr sz="1125">
-                <a:solidFill>
-                  <a:srgbClr val="A8B3C7"/>
-                </a:solidFill>
-                <a:latin typeface="Noto Sans CJK KR"/>
-                <a:ea typeface="Noto Sans CJK KR"/>
-                <a:cs typeface="Noto Sans CJK KR"/>
-              </a:defRPr>
-            </a:lvl4pPr>
-            <a:lvl5pPr>
-              <a:defRPr sz="1125">
-                <a:solidFill>
-                  <a:srgbClr val="A8B3C7"/>
-                </a:solidFill>
-                <a:latin typeface="Noto Sans CJK KR"/>
-                <a:ea typeface="Noto Sans CJK KR"/>
-                <a:cs typeface="Noto Sans CJK KR"/>
-              </a:defRPr>
-            </a:lvl5pPr>
-            <a:lvl6pPr>
-              <a:defRPr sz="1125">
-                <a:solidFill>
-                  <a:srgbClr val="A8B3C7"/>
-                </a:solidFill>
-                <a:latin typeface="Noto Sans CJK KR"/>
-                <a:ea typeface="Noto Sans CJK KR"/>
-                <a:cs typeface="Noto Sans CJK KR"/>
-              </a:defRPr>
-            </a:lvl6pPr>
-            <a:lvl7pPr>
-              <a:defRPr sz="1125">
-                <a:solidFill>
-                  <a:srgbClr val="A8B3C7"/>
-                </a:solidFill>
-                <a:latin typeface="Noto Sans CJK KR"/>
-                <a:ea typeface="Noto Sans CJK KR"/>
-                <a:cs typeface="Noto Sans CJK KR"/>
-              </a:defRPr>
-            </a:lvl7pPr>
-            <a:lvl8pPr>
-              <a:defRPr sz="1125">
-                <a:solidFill>
-                  <a:srgbClr val="A8B3C7"/>
-                </a:solidFill>
-                <a:latin typeface="Noto Sans CJK KR"/>
-                <a:ea typeface="Noto Sans CJK KR"/>
-                <a:cs typeface="Noto Sans CJK KR"/>
-              </a:defRPr>
-            </a:lvl8pPr>
-            <a:lvl9pPr>
-              <a:defRPr sz="1125">
-                <a:solidFill>
-                  <a:srgbClr val="A8B3C7"/>
-                </a:solidFill>
-                <a:latin typeface="Noto Sans CJK KR"/>
-                <a:ea typeface="Noto Sans CJK KR"/>
-                <a:cs typeface="Noto Sans CJK KR"/>
-              </a:defRPr>
-            </a:lvl9pPr>
-          </a:lstStyle>
-          <a:p xmlns:a="http://schemas.openxmlformats.org/drawingml/2006/main">
-            <a:pPr>
-              <a:defRPr sz="1125">
-                <a:solidFill>
-                  <a:srgbClr val="A8B3C7"/>
-                </a:solidFill>
-                <a:latin typeface="Noto Sans CJK KR"/>
-                <a:ea typeface="Noto Sans CJK KR"/>
-                <a:cs typeface="Noto Sans CJK KR"/>
-              </a:defRPr>
-            </a:pPr>
-            <a:r>
-              <a:rPr sz="1125">
-                <a:solidFill>
-                  <a:srgbClr val="A8B3C7"/>
-                </a:solidFill>
-                <a:latin typeface="Noto Sans CJK KR"/>
-                <a:ea typeface="Noto Sans CJK KR"/>
-                <a:cs typeface="Noto Sans CJK KR"/>
-              </a:rPr>
-              <a:t>A ABSTAIN</a:t>
-            </a:r>
-          </a:p>
-        </p:txBody>
-      </p:sp>
-      <p:sp>
-        <p:nvSpPr>
-          <p:cNvPr id="14" name="">
-            <a:extLst xmlns:a="http://schemas.openxmlformats.org/drawingml/2006/main">
-              <a:ext uri="{FF2B5EF4-FFF2-40B4-BE49-F238E27FC236}">
-                <a16:creationId xmlns:a16="http://schemas.microsoft.com/office/drawing/2014/main" id="{B4249CE3-07D4-4129-A663-06390C51DF13}"/>
-              </a:ext>
-            </a:extLst>
-          </p:cNvPr>
-          <p:cNvSpPr>
-            <a:spLocks xmlns:a="http://schemas.openxmlformats.org/drawingml/2006/main" noGrp="1"/>
-          </p:cNvSpPr>
-          <p:nvPr/>
-        </p:nvSpPr>
-        <p:spPr>
-          <a:xfrm xmlns:a="http://schemas.openxmlformats.org/drawingml/2006/main">
-            <a:off x="9334500" y="2990850"/>
-            <a:ext cx="1809750" cy="457200"/>
-          </a:xfrm>
-          <a:prstGeom xmlns:a="http://schemas.openxmlformats.org/drawingml/2006/main" prst="rect">
-            <a:avLst/>
-          </a:prstGeom>
-          <a:noFill xmlns:a="http://schemas.openxmlformats.org/drawingml/2006/main"/>
-          <a:ln xmlns:a="http://schemas.openxmlformats.org/drawingml/2006/main" w="0">
-            <a:noFill/>
-            <a:prstDash val="solid"/>
-          </a:ln>
-        </p:spPr>
-        <p:txBody>
-          <a:bodyPr xmlns:a="http://schemas.openxmlformats.org/drawingml/2006/main"/>
-          <a:lstStyle xmlns:a="http://schemas.openxmlformats.org/drawingml/2006/main">
-            <a:defPPr>
-              <a:defRPr sz="2325" b="1">
-                <a:solidFill>
-                  <a:srgbClr val="FF6B6B"/>
-                </a:solidFill>
-                <a:latin typeface="Noto Sans CJK KR"/>
-                <a:ea typeface="Noto Sans CJK KR"/>
-                <a:cs typeface="Noto Sans CJK KR"/>
-              </a:defRPr>
-            </a:defPPr>
-            <a:lvl1pPr>
-              <a:defRPr sz="2325" b="1">
-                <a:solidFill>
-                  <a:srgbClr val="FF6B6B"/>
-                </a:solidFill>
-                <a:latin typeface="Noto Sans CJK KR"/>
-                <a:ea typeface="Noto Sans CJK KR"/>
-                <a:cs typeface="Noto Sans CJK KR"/>
-              </a:defRPr>
-            </a:lvl1pPr>
-            <a:lvl2pPr>
-              <a:defRPr sz="2325" b="1">
-                <a:solidFill>
-                  <a:srgbClr val="FF6B6B"/>
-                </a:solidFill>
-                <a:latin typeface="Noto Sans CJK KR"/>
-                <a:ea typeface="Noto Sans CJK KR"/>
-                <a:cs typeface="Noto Sans CJK KR"/>
-              </a:defRPr>
-            </a:lvl2pPr>
-            <a:lvl3pPr>
-              <a:defRPr sz="2325" b="1">
-                <a:solidFill>
-                  <a:srgbClr val="FF6B6B"/>
-                </a:solidFill>
-                <a:latin typeface="Noto Sans CJK KR"/>
-                <a:ea typeface="Noto Sans CJK KR"/>
-                <a:cs typeface="Noto Sans CJK KR"/>
-              </a:defRPr>
-            </a:lvl3pPr>
-            <a:lvl4pPr>
-              <a:defRPr sz="2325" b="1">
-                <a:solidFill>
-                  <a:srgbClr val="FF6B6B"/>
-                </a:solidFill>
-                <a:latin typeface="Noto Sans CJK KR"/>
-                <a:ea typeface="Noto Sans CJK KR"/>
-                <a:cs typeface="Noto Sans CJK KR"/>
-              </a:defRPr>
-            </a:lvl4pPr>
-            <a:lvl5pPr>
-              <a:defRPr sz="2325" b="1">
-                <a:solidFill>
-                  <a:srgbClr val="FF6B6B"/>
-                </a:solidFill>
-                <a:latin typeface="Noto Sans CJK KR"/>
-                <a:ea typeface="Noto Sans CJK KR"/>
-                <a:cs typeface="Noto Sans CJK KR"/>
-              </a:defRPr>
-            </a:lvl5pPr>
-            <a:lvl6pPr>
-              <a:defRPr sz="2325" b="1">
-                <a:solidFill>
-                  <a:srgbClr val="FF6B6B"/>
-                </a:solidFill>
-                <a:latin typeface="Noto Sans CJK KR"/>
-                <a:ea typeface="Noto Sans CJK KR"/>
-                <a:cs typeface="Noto Sans CJK KR"/>
-              </a:defRPr>
-            </a:lvl6pPr>
-            <a:lvl7pPr>
-              <a:defRPr sz="2325" b="1">
-                <a:solidFill>
-                  <a:srgbClr val="FF6B6B"/>
-                </a:solidFill>
-                <a:latin typeface="Noto Sans CJK KR"/>
-                <a:ea typeface="Noto Sans CJK KR"/>
-                <a:cs typeface="Noto Sans CJK KR"/>
-              </a:defRPr>
-            </a:lvl7pPr>
-            <a:lvl8pPr>
-              <a:defRPr sz="2325" b="1">
-                <a:solidFill>
-                  <a:srgbClr val="FF6B6B"/>
-                </a:solidFill>
-                <a:latin typeface="Noto Sans CJK KR"/>
-                <a:ea typeface="Noto Sans CJK KR"/>
-                <a:cs typeface="Noto Sans CJK KR"/>
-              </a:defRPr>
-            </a:lvl8pPr>
-            <a:lvl9pPr>
-              <a:defRPr sz="2325" b="1">
-                <a:solidFill>
-                  <a:srgbClr val="FF6B6B"/>
-                </a:solidFill>
-                <a:latin typeface="Noto Sans CJK KR"/>
-                <a:ea typeface="Noto Sans CJK KR"/>
-                <a:cs typeface="Noto Sans CJK KR"/>
-              </a:defRPr>
-            </a:lvl9pPr>
-          </a:lstStyle>
-          <a:p xmlns:a="http://schemas.openxmlformats.org/drawingml/2006/main">
-            <a:pPr>
-              <a:defRPr sz="2325" b="1">
-                <a:solidFill>
-                  <a:srgbClr val="FF6B6B"/>
-                </a:solidFill>
-                <a:latin typeface="Noto Sans CJK KR"/>
-                <a:ea typeface="Noto Sans CJK KR"/>
-                <a:cs typeface="Noto Sans CJK KR"/>
-              </a:defRPr>
-            </a:pPr>
-            <a:r>
-              <a:rPr sz="2325" b="1">
-                <a:solidFill>
-                  <a:srgbClr val="FF6B6B"/>
-                </a:solidFill>
-                <a:latin typeface="Noto Sans CJK KR"/>
-                <a:ea typeface="Noto Sans CJK KR"/>
-                <a:cs typeface="Noto Sans CJK KR"/>
-              </a:rPr>
-              <a:t>0 / 28</a:t>
-            </a:r>
-          </a:p>
-        </p:txBody>
-      </p:sp>
-      <p:sp>
-        <p:nvSpPr>
-          <p:cNvPr id="15" name="">
-            <a:extLst xmlns:a="http://schemas.openxmlformats.org/drawingml/2006/main">
-              <a:ext uri="{FF2B5EF4-FFF2-40B4-BE49-F238E27FC236}">
-                <a16:creationId xmlns:a16="http://schemas.microsoft.com/office/drawing/2014/main" id="{0A1370E2-56D1-4E9F-8AA9-51CA0107ECBB}"/>
-              </a:ext>
-            </a:extLst>
-          </p:cNvPr>
-          <p:cNvSpPr>
-            <a:spLocks xmlns:a="http://schemas.openxmlformats.org/drawingml/2006/main" noGrp="1"/>
-          </p:cNvSpPr>
-          <p:nvPr/>
-        </p:nvSpPr>
-        <p:spPr>
-          <a:xfrm xmlns:a="http://schemas.openxmlformats.org/drawingml/2006/main">
-            <a:off x="9334500" y="3448050"/>
-            <a:ext cx="1809750" cy="323850"/>
-          </a:xfrm>
-          <a:prstGeom xmlns:a="http://schemas.openxmlformats.org/drawingml/2006/main" prst="rect">
-            <a:avLst/>
-          </a:prstGeom>
-          <a:noFill xmlns:a="http://schemas.openxmlformats.org/drawingml/2006/main"/>
-          <a:ln xmlns:a="http://schemas.openxmlformats.org/drawingml/2006/main" w="0">
-            <a:noFill/>
-            <a:prstDash val="solid"/>
-          </a:ln>
-        </p:spPr>
-        <p:txBody>
-          <a:bodyPr xmlns:a="http://schemas.openxmlformats.org/drawingml/2006/main"/>
-          <a:lstStyle xmlns:a="http://schemas.openxmlformats.org/drawingml/2006/main">
-            <a:defPPr>
-              <a:defRPr sz="1125">
-                <a:solidFill>
-                  <a:srgbClr val="A8B3C7"/>
-                </a:solidFill>
-                <a:latin typeface="Noto Sans CJK KR"/>
-                <a:ea typeface="Noto Sans CJK KR"/>
-                <a:cs typeface="Noto Sans CJK KR"/>
-              </a:defRPr>
-            </a:defPPr>
-            <a:lvl1pPr>
-              <a:defRPr sz="1125">
-                <a:solidFill>
-                  <a:srgbClr val="A8B3C7"/>
-                </a:solidFill>
-                <a:latin typeface="Noto Sans CJK KR"/>
-                <a:ea typeface="Noto Sans CJK KR"/>
-                <a:cs typeface="Noto Sans CJK KR"/>
-              </a:defRPr>
-            </a:lvl1pPr>
-            <a:lvl2pPr>
-              <a:defRPr sz="1125">
-                <a:solidFill>
-                  <a:srgbClr val="A8B3C7"/>
-                </a:solidFill>
-                <a:latin typeface="Noto Sans CJK KR"/>
-                <a:ea typeface="Noto Sans CJK KR"/>
-                <a:cs typeface="Noto Sans CJK KR"/>
-              </a:defRPr>
-            </a:lvl2pPr>
-            <a:lvl3pPr>
-              <a:defRPr sz="1125">
-                <a:solidFill>
-                  <a:srgbClr val="A8B3C7"/>
-                </a:solidFill>
-                <a:latin typeface="Noto Sans CJK KR"/>
-                <a:ea typeface="Noto Sans CJK KR"/>
-                <a:cs typeface="Noto Sans CJK KR"/>
-              </a:defRPr>
-            </a:lvl3pPr>
-            <a:lvl4pPr>
-              <a:defRPr sz="1125">
-                <a:solidFill>
-                  <a:srgbClr val="A8B3C7"/>
-                </a:solidFill>
-                <a:latin typeface="Noto Sans CJK KR"/>
-                <a:ea typeface="Noto Sans CJK KR"/>
-                <a:cs typeface="Noto Sans CJK KR"/>
-              </a:defRPr>
-            </a:lvl4pPr>
-            <a:lvl5pPr>
-              <a:defRPr sz="1125">
-                <a:solidFill>
-                  <a:srgbClr val="A8B3C7"/>
-                </a:solidFill>
-                <a:latin typeface="Noto Sans CJK KR"/>
-                <a:ea typeface="Noto Sans CJK KR"/>
-                <a:cs typeface="Noto Sans CJK KR"/>
-              </a:defRPr>
-            </a:lvl5pPr>
-            <a:lvl6pPr>
-              <a:defRPr sz="1125">
-                <a:solidFill>
-                  <a:srgbClr val="A8B3C7"/>
-                </a:solidFill>
-                <a:latin typeface="Noto Sans CJK KR"/>
-                <a:ea typeface="Noto Sans CJK KR"/>
-                <a:cs typeface="Noto Sans CJK KR"/>
-              </a:defRPr>
-            </a:lvl6pPr>
-            <a:lvl7pPr>
-              <a:defRPr sz="1125">
-                <a:solidFill>
-                  <a:srgbClr val="A8B3C7"/>
-                </a:solidFill>
-                <a:latin typeface="Noto Sans CJK KR"/>
-                <a:ea typeface="Noto Sans CJK KR"/>
-                <a:cs typeface="Noto Sans CJK KR"/>
-              </a:defRPr>
-            </a:lvl7pPr>
-            <a:lvl8pPr>
-              <a:defRPr sz="1125">
-                <a:solidFill>
-                  <a:srgbClr val="A8B3C7"/>
-                </a:solidFill>
-                <a:latin typeface="Noto Sans CJK KR"/>
-                <a:ea typeface="Noto Sans CJK KR"/>
-                <a:cs typeface="Noto Sans CJK KR"/>
-              </a:defRPr>
-            </a:lvl8pPr>
-            <a:lvl9pPr>
-              <a:defRPr sz="1125">
-                <a:solidFill>
-                  <a:srgbClr val="A8B3C7"/>
-                </a:solidFill>
-                <a:latin typeface="Noto Sans CJK KR"/>
-                <a:ea typeface="Noto Sans CJK KR"/>
-                <a:cs typeface="Noto Sans CJK KR"/>
-              </a:defRPr>
-            </a:lvl9pPr>
-          </a:lstStyle>
-          <a:p xmlns:a="http://schemas.openxmlformats.org/drawingml/2006/main">
-            <a:pPr>
-              <a:defRPr sz="1125">
-                <a:solidFill>
-                  <a:srgbClr val="A8B3C7"/>
-                </a:solidFill>
-                <a:latin typeface="Noto Sans CJK KR"/>
-                <a:ea typeface="Noto Sans CJK KR"/>
-                <a:cs typeface="Noto Sans CJK KR"/>
-              </a:defRPr>
-            </a:pPr>
-            <a:r>
-              <a:rPr sz="1125">
-                <a:solidFill>
-                  <a:srgbClr val="A8B3C7"/>
-                </a:solidFill>
-                <a:latin typeface="Noto Sans CJK KR"/>
-                <a:ea typeface="Noto Sans CJK KR"/>
-                <a:cs typeface="Noto Sans CJK KR"/>
-              </a:rPr>
-              <a:t>A 결함 정답</a:t>
-            </a:r>
-          </a:p>
-        </p:txBody>
-      </p:sp>
-      <p:sp>
-        <p:nvSpPr>
-          <p:cNvPr id="16" name="">
-            <a:extLst xmlns:a="http://schemas.openxmlformats.org/drawingml/2006/main">
-              <a:ext uri="{FF2B5EF4-FFF2-40B4-BE49-F238E27FC236}">
-                <a16:creationId xmlns:a16="http://schemas.microsoft.com/office/drawing/2014/main" id="{C0137E1B-E6C6-411D-B8AD-CB4B6DDF710B}"/>
-              </a:ext>
-            </a:extLst>
-          </p:cNvPr>
-          <p:cNvSpPr>
-            <a:spLocks xmlns:a="http://schemas.openxmlformats.org/drawingml/2006/main" noGrp="1"/>
-          </p:cNvSpPr>
-          <p:nvPr/>
-        </p:nvSpPr>
-        <p:spPr>
-          <a:xfrm xmlns:a="http://schemas.openxmlformats.org/drawingml/2006/main">
-            <a:off x="7524750" y="4095750"/>
-            <a:ext cx="3676650" cy="838200"/>
-          </a:xfrm>
-          <a:prstGeom xmlns:a="http://schemas.openxmlformats.org/drawingml/2006/main" prst="roundRect">
-            <a:avLst>
-              <a:gd name="adj" fmla="val 9091"/>
-            </a:avLst>
-          </a:prstGeom>
-          <a:solidFill xmlns:a="http://schemas.openxmlformats.org/drawingml/2006/main">
-            <a:srgbClr val="1B2438"/>
-          </a:solidFill>
-          <a:ln xmlns:a="http://schemas.openxmlformats.org/drawingml/2006/main" w="9525">
-            <a:solidFill>
-              <a:srgbClr val="FF6B6B"/>
-            </a:solidFill>
-            <a:prstDash val="solid"/>
-          </a:ln>
-        </p:spPr>
-      </p:sp>
-      <p:sp>
-        <p:nvSpPr>
-          <p:cNvPr id="17" name="">
-            <a:extLst xmlns:a="http://schemas.openxmlformats.org/drawingml/2006/main">
-              <a:ext uri="{FF2B5EF4-FFF2-40B4-BE49-F238E27FC236}">
-                <a16:creationId xmlns:a16="http://schemas.microsoft.com/office/drawing/2014/main" id="{F8B14CA6-C7C8-46B8-91B8-6A41B22AE65B}"/>
-              </a:ext>
-            </a:extLst>
-          </p:cNvPr>
-          <p:cNvSpPr>
-            <a:spLocks xmlns:a="http://schemas.openxmlformats.org/drawingml/2006/main" noGrp="1"/>
-          </p:cNvSpPr>
-          <p:nvPr/>
-        </p:nvSpPr>
-        <p:spPr>
-          <a:xfrm xmlns:a="http://schemas.openxmlformats.org/drawingml/2006/main">
-            <a:off x="7734300" y="4267200"/>
-            <a:ext cx="1428750" cy="238125"/>
-          </a:xfrm>
-          <a:prstGeom xmlns:a="http://schemas.openxmlformats.org/drawingml/2006/main" prst="rect">
-            <a:avLst/>
-          </a:prstGeom>
-          <a:noFill xmlns:a="http://schemas.openxmlformats.org/drawingml/2006/main"/>
-          <a:ln xmlns:a="http://schemas.openxmlformats.org/drawingml/2006/main" w="0">
-            <a:noFill/>
-            <a:prstDash val="solid"/>
-          </a:ln>
-        </p:spPr>
-        <p:txBody>
-          <a:bodyPr xmlns:a="http://schemas.openxmlformats.org/drawingml/2006/main"/>
-          <a:lstStyle xmlns:a="http://schemas.openxmlformats.org/drawingml/2006/main">
-            <a:defPPr>
-              <a:defRPr sz="975" b="1">
-                <a:solidFill>
-                  <a:srgbClr val="A8B3C7"/>
-                </a:solidFill>
-                <a:latin typeface="Noto Sans CJK KR"/>
-                <a:ea typeface="Noto Sans CJK KR"/>
-                <a:cs typeface="Noto Sans CJK KR"/>
-              </a:defRPr>
-            </a:defPPr>
-            <a:lvl1pPr>
-              <a:defRPr sz="975" b="1">
-                <a:solidFill>
-                  <a:srgbClr val="A8B3C7"/>
-                </a:solidFill>
-                <a:latin typeface="Noto Sans CJK KR"/>
-                <a:ea typeface="Noto Sans CJK KR"/>
-                <a:cs typeface="Noto Sans CJK KR"/>
-              </a:defRPr>
-            </a:lvl1pPr>
-            <a:lvl2pPr>
-              <a:defRPr sz="975" b="1">
-                <a:solidFill>
-                  <a:srgbClr val="A8B3C7"/>
-                </a:solidFill>
-                <a:latin typeface="Noto Sans CJK KR"/>
-                <a:ea typeface="Noto Sans CJK KR"/>
-                <a:cs typeface="Noto Sans CJK KR"/>
-              </a:defRPr>
-            </a:lvl2pPr>
-            <a:lvl3pPr>
-              <a:defRPr sz="975" b="1">
-                <a:solidFill>
-                  <a:srgbClr val="A8B3C7"/>
-                </a:solidFill>
-                <a:latin typeface="Noto Sans CJK KR"/>
-                <a:ea typeface="Noto Sans CJK KR"/>
-                <a:cs typeface="Noto Sans CJK KR"/>
-              </a:defRPr>
-            </a:lvl3pPr>
-            <a:lvl4pPr>
-              <a:defRPr sz="975" b="1">
-                <a:solidFill>
-                  <a:srgbClr val="A8B3C7"/>
-                </a:solidFill>
-                <a:latin typeface="Noto Sans CJK KR"/>
-                <a:ea typeface="Noto Sans CJK KR"/>
-                <a:cs typeface="Noto Sans CJK KR"/>
-              </a:defRPr>
-            </a:lvl4pPr>
-            <a:lvl5pPr>
-              <a:defRPr sz="975" b="1">
-                <a:solidFill>
-                  <a:srgbClr val="A8B3C7"/>
-                </a:solidFill>
-                <a:latin typeface="Noto Sans CJK KR"/>
-                <a:ea typeface="Noto Sans CJK KR"/>
-                <a:cs typeface="Noto Sans CJK KR"/>
-              </a:defRPr>
-            </a:lvl5pPr>
-            <a:lvl6pPr>
-              <a:defRPr sz="975" b="1">
-                <a:solidFill>
-                  <a:srgbClr val="A8B3C7"/>
-                </a:solidFill>
-                <a:latin typeface="Noto Sans CJK KR"/>
-                <a:ea typeface="Noto Sans CJK KR"/>
-                <a:cs typeface="Noto Sans CJK KR"/>
-              </a:defRPr>
-            </a:lvl6pPr>
-            <a:lvl7pPr>
-              <a:defRPr sz="975" b="1">
-                <a:solidFill>
-                  <a:srgbClr val="A8B3C7"/>
-                </a:solidFill>
-                <a:latin typeface="Noto Sans CJK KR"/>
-                <a:ea typeface="Noto Sans CJK KR"/>
-                <a:cs typeface="Noto Sans CJK KR"/>
-              </a:defRPr>
-            </a:lvl7pPr>
-            <a:lvl8pPr>
-              <a:defRPr sz="975" b="1">
-                <a:solidFill>
-                  <a:srgbClr val="A8B3C7"/>
-                </a:solidFill>
-                <a:latin typeface="Noto Sans CJK KR"/>
-                <a:ea typeface="Noto Sans CJK KR"/>
-                <a:cs typeface="Noto Sans CJK KR"/>
-              </a:defRPr>
-            </a:lvl8pPr>
-            <a:lvl9pPr>
-              <a:defRPr sz="975" b="1">
-                <a:solidFill>
-                  <a:srgbClr val="A8B3C7"/>
-                </a:solidFill>
-                <a:latin typeface="Noto Sans CJK KR"/>
-                <a:ea typeface="Noto Sans CJK KR"/>
-                <a:cs typeface="Noto Sans CJK KR"/>
-              </a:defRPr>
-            </a:lvl9pPr>
-          </a:lstStyle>
-          <a:p xmlns:a="http://schemas.openxmlformats.org/drawingml/2006/main">
-            <a:pPr>
-              <a:defRPr sz="975" b="1">
-                <a:solidFill>
-                  <a:srgbClr val="A8B3C7"/>
-                </a:solidFill>
-                <a:latin typeface="Noto Sans CJK KR"/>
-                <a:ea typeface="Noto Sans CJK KR"/>
-                <a:cs typeface="Noto Sans CJK KR"/>
-              </a:defRPr>
-            </a:pPr>
-            <a:r>
-              <a:rPr sz="975" b="1">
-                <a:solidFill>
-                  <a:srgbClr val="A8B3C7"/>
-                </a:solidFill>
-                <a:latin typeface="Noto Sans CJK KR"/>
-                <a:ea typeface="Noto Sans CJK KR"/>
-                <a:cs typeface="Noto Sans CJK KR"/>
-              </a:rPr>
-              <a:t>가설 판정</a:t>
-            </a:r>
-          </a:p>
-        </p:txBody>
-      </p:sp>
-      <p:sp>
-        <p:nvSpPr>
-          <p:cNvPr id="18" name="">
-            <a:extLst xmlns:a="http://schemas.openxmlformats.org/drawingml/2006/main">
-              <a:ext uri="{FF2B5EF4-FFF2-40B4-BE49-F238E27FC236}">
-                <a16:creationId xmlns:a16="http://schemas.microsoft.com/office/drawing/2014/main" id="{C3448354-865B-4F19-A68A-EED051C1A091}"/>
-              </a:ext>
-            </a:extLst>
-          </p:cNvPr>
-          <p:cNvSpPr>
-            <a:spLocks xmlns:a="http://schemas.openxmlformats.org/drawingml/2006/main" noGrp="1"/>
-          </p:cNvSpPr>
-          <p:nvPr/>
-        </p:nvSpPr>
-        <p:spPr>
-          <a:xfrm xmlns:a="http://schemas.openxmlformats.org/drawingml/2006/main">
-            <a:off x="7734300" y="4514850"/>
-            <a:ext cx="1619250" cy="342900"/>
+            <a:off x="7848600" y="3638550"/>
+            <a:ext cx="3143250" cy="400050"/>
           </a:xfrm>
           <a:prstGeom xmlns:a="http://schemas.openxmlformats.org/drawingml/2006/main" prst="rect">
             <a:avLst/>
@@ -11688,17 +10934,17 @@
                 <a:ea typeface="Noto Sans CJK KR"/>
                 <a:cs typeface="Noto Sans CJK KR"/>
               </a:rPr>
-              <a:t>NO-GO</a:t>
+              <a:t>결함 정답  0 / 28</a:t>
             </a:r>
           </a:p>
         </p:txBody>
       </p:sp>
       <p:sp>
         <p:nvSpPr>
-          <p:cNvPr id="19" name="">
+          <p:cNvPr id="10" name="">
             <a:extLst xmlns:a="http://schemas.openxmlformats.org/drawingml/2006/main">
               <a:ext uri="{FF2B5EF4-FFF2-40B4-BE49-F238E27FC236}">
-                <a16:creationId xmlns:a16="http://schemas.microsoft.com/office/drawing/2014/main" id="{A4B8508D-C9A5-4A8C-80F3-8F805C0B1F40}"/>
+                <a16:creationId xmlns:a16="http://schemas.microsoft.com/office/drawing/2014/main" id="{79D01423-7669-4277-86C7-D2194342DFC6}"/>
               </a:ext>
             </a:extLst>
           </p:cNvPr>
@@ -11709,8 +10955,8 @@
         </p:nvSpPr>
         <p:spPr>
           <a:xfrm xmlns:a="http://schemas.openxmlformats.org/drawingml/2006/main">
-            <a:off x="7524750" y="5219700"/>
-            <a:ext cx="3810000" cy="704850"/>
+            <a:off x="7848600" y="4095750"/>
+            <a:ext cx="3429000" cy="323850"/>
           </a:xfrm>
           <a:prstGeom xmlns:a="http://schemas.openxmlformats.org/drawingml/2006/main" prst="rect">
             <a:avLst/>
@@ -11845,40 +11091,17 @@
                 <a:ea typeface="Noto Sans CJK KR"/>
                 <a:cs typeface="Noto Sans CJK KR"/>
               </a:rPr>
-              <a:t>3B VLM이 미세 결함을 놓치면</a:t>
-            </a:r>
-          </a:p>
-          <a:p xmlns:a="http://schemas.openxmlformats.org/drawingml/2006/main">
-            <a:pPr>
-              <a:defRPr sz="1200" b="1">
-                <a:solidFill>
-                  <a:srgbClr val="F8FAFC"/>
-                </a:solidFill>
-                <a:latin typeface="Noto Sans CJK KR"/>
-                <a:ea typeface="Noto Sans CJK KR"/>
-                <a:cs typeface="Noto Sans CJK KR"/>
-              </a:defRPr>
-            </a:pPr>
-            <a:r>
-              <a:rPr sz="1200" b="1">
-                <a:solidFill>
-                  <a:srgbClr val="F8FAFC"/>
-                </a:solidFill>
-                <a:latin typeface="Noto Sans CJK KR"/>
-                <a:ea typeface="Noto Sans CJK KR"/>
-                <a:cs typeface="Noto Sans CJK KR"/>
-              </a:rPr>
-              <a:t>RAG는 픽셀 정보를 복구하지 못한다.</a:t>
+              <a:t>시각 탐지 성능은 개선하지 못했다.</a:t>
             </a:r>
           </a:p>
         </p:txBody>
       </p:sp>
       <p:sp>
         <p:nvSpPr>
-          <p:cNvPr id="20" name="">
+          <p:cNvPr id="11" name="">
             <a:extLst xmlns:a="http://schemas.openxmlformats.org/drawingml/2006/main">
               <a:ext uri="{FF2B5EF4-FFF2-40B4-BE49-F238E27FC236}">
-                <a16:creationId xmlns:a16="http://schemas.microsoft.com/office/drawing/2014/main" id="{FD905CC1-40C2-4F4F-846B-3F08E2C0F508}"/>
+                <a16:creationId xmlns:a16="http://schemas.microsoft.com/office/drawing/2014/main" id="{18B6AAE8-DEDA-470F-B7A9-1EF0B0A3BAE3}"/>
               </a:ext>
             </a:extLst>
           </p:cNvPr>
@@ -11889,8 +11112,847 @@
         </p:nvSpPr>
         <p:spPr>
           <a:xfrm xmlns:a="http://schemas.openxmlformats.org/drawingml/2006/main">
-            <a:off x="609600" y="5972175"/>
-            <a:ext cx="9906000" cy="247650"/>
+            <a:off x="609600" y="4686300"/>
+            <a:ext cx="10972800" cy="9525"/>
+          </a:xfrm>
+          <a:prstGeom xmlns:a="http://schemas.openxmlformats.org/drawingml/2006/main" prst="rect">
+            <a:avLst/>
+          </a:prstGeom>
+          <a:solidFill xmlns:a="http://schemas.openxmlformats.org/drawingml/2006/main">
+            <a:srgbClr val="334155"/>
+          </a:solidFill>
+          <a:ln xmlns:a="http://schemas.openxmlformats.org/drawingml/2006/main" w="0">
+            <a:noFill/>
+            <a:prstDash val="solid"/>
+          </a:ln>
+        </p:spPr>
+      </p:sp>
+      <p:sp>
+        <p:nvSpPr>
+          <p:cNvPr id="12" name="">
+            <a:extLst xmlns:a="http://schemas.openxmlformats.org/drawingml/2006/main">
+              <a:ext uri="{FF2B5EF4-FFF2-40B4-BE49-F238E27FC236}">
+                <a16:creationId xmlns:a16="http://schemas.microsoft.com/office/drawing/2014/main" id="{FEDCB55D-9E1F-48C4-B0C3-4DE33ED28CCC}"/>
+              </a:ext>
+            </a:extLst>
+          </p:cNvPr>
+          <p:cNvSpPr>
+            <a:spLocks xmlns:a="http://schemas.openxmlformats.org/drawingml/2006/main" noGrp="1"/>
+          </p:cNvSpPr>
+          <p:nvPr/>
+        </p:nvSpPr>
+        <p:spPr>
+          <a:xfrm xmlns:a="http://schemas.openxmlformats.org/drawingml/2006/main">
+            <a:off x="609600" y="4914900"/>
+            <a:ext cx="3238500" cy="285750"/>
+          </a:xfrm>
+          <a:prstGeom xmlns:a="http://schemas.openxmlformats.org/drawingml/2006/main" prst="rect">
+            <a:avLst/>
+          </a:prstGeom>
+          <a:noFill xmlns:a="http://schemas.openxmlformats.org/drawingml/2006/main"/>
+          <a:ln xmlns:a="http://schemas.openxmlformats.org/drawingml/2006/main" w="0">
+            <a:noFill/>
+            <a:prstDash val="solid"/>
+          </a:ln>
+        </p:spPr>
+        <p:txBody>
+          <a:bodyPr xmlns:a="http://schemas.openxmlformats.org/drawingml/2006/main"/>
+          <a:lstStyle xmlns:a="http://schemas.openxmlformats.org/drawingml/2006/main">
+            <a:defPPr>
+              <a:defRPr sz="1200" b="1">
+                <a:solidFill>
+                  <a:srgbClr val="A8B3C7"/>
+                </a:solidFill>
+                <a:latin typeface="Noto Sans CJK KR"/>
+                <a:ea typeface="Noto Sans CJK KR"/>
+                <a:cs typeface="Noto Sans CJK KR"/>
+              </a:defRPr>
+            </a:defPPr>
+            <a:lvl1pPr>
+              <a:defRPr sz="1200" b="1">
+                <a:solidFill>
+                  <a:srgbClr val="A8B3C7"/>
+                </a:solidFill>
+                <a:latin typeface="Noto Sans CJK KR"/>
+                <a:ea typeface="Noto Sans CJK KR"/>
+                <a:cs typeface="Noto Sans CJK KR"/>
+              </a:defRPr>
+            </a:lvl1pPr>
+            <a:lvl2pPr>
+              <a:defRPr sz="1200" b="1">
+                <a:solidFill>
+                  <a:srgbClr val="A8B3C7"/>
+                </a:solidFill>
+                <a:latin typeface="Noto Sans CJK KR"/>
+                <a:ea typeface="Noto Sans CJK KR"/>
+                <a:cs typeface="Noto Sans CJK KR"/>
+              </a:defRPr>
+            </a:lvl2pPr>
+            <a:lvl3pPr>
+              <a:defRPr sz="1200" b="1">
+                <a:solidFill>
+                  <a:srgbClr val="A8B3C7"/>
+                </a:solidFill>
+                <a:latin typeface="Noto Sans CJK KR"/>
+                <a:ea typeface="Noto Sans CJK KR"/>
+                <a:cs typeface="Noto Sans CJK KR"/>
+              </a:defRPr>
+            </a:lvl3pPr>
+            <a:lvl4pPr>
+              <a:defRPr sz="1200" b="1">
+                <a:solidFill>
+                  <a:srgbClr val="A8B3C7"/>
+                </a:solidFill>
+                <a:latin typeface="Noto Sans CJK KR"/>
+                <a:ea typeface="Noto Sans CJK KR"/>
+                <a:cs typeface="Noto Sans CJK KR"/>
+              </a:defRPr>
+            </a:lvl4pPr>
+            <a:lvl5pPr>
+              <a:defRPr sz="1200" b="1">
+                <a:solidFill>
+                  <a:srgbClr val="A8B3C7"/>
+                </a:solidFill>
+                <a:latin typeface="Noto Sans CJK KR"/>
+                <a:ea typeface="Noto Sans CJK KR"/>
+                <a:cs typeface="Noto Sans CJK KR"/>
+              </a:defRPr>
+            </a:lvl5pPr>
+            <a:lvl6pPr>
+              <a:defRPr sz="1200" b="1">
+                <a:solidFill>
+                  <a:srgbClr val="A8B3C7"/>
+                </a:solidFill>
+                <a:latin typeface="Noto Sans CJK KR"/>
+                <a:ea typeface="Noto Sans CJK KR"/>
+                <a:cs typeface="Noto Sans CJK KR"/>
+              </a:defRPr>
+            </a:lvl6pPr>
+            <a:lvl7pPr>
+              <a:defRPr sz="1200" b="1">
+                <a:solidFill>
+                  <a:srgbClr val="A8B3C7"/>
+                </a:solidFill>
+                <a:latin typeface="Noto Sans CJK KR"/>
+                <a:ea typeface="Noto Sans CJK KR"/>
+                <a:cs typeface="Noto Sans CJK KR"/>
+              </a:defRPr>
+            </a:lvl7pPr>
+            <a:lvl8pPr>
+              <a:defRPr sz="1200" b="1">
+                <a:solidFill>
+                  <a:srgbClr val="A8B3C7"/>
+                </a:solidFill>
+                <a:latin typeface="Noto Sans CJK KR"/>
+                <a:ea typeface="Noto Sans CJK KR"/>
+                <a:cs typeface="Noto Sans CJK KR"/>
+              </a:defRPr>
+            </a:lvl8pPr>
+            <a:lvl9pPr>
+              <a:defRPr sz="1200" b="1">
+                <a:solidFill>
+                  <a:srgbClr val="A8B3C7"/>
+                </a:solidFill>
+                <a:latin typeface="Noto Sans CJK KR"/>
+                <a:ea typeface="Noto Sans CJK KR"/>
+                <a:cs typeface="Noto Sans CJK KR"/>
+              </a:defRPr>
+            </a:lvl9pPr>
+          </a:lstStyle>
+          <a:p xmlns:a="http://schemas.openxmlformats.org/drawingml/2006/main">
+            <a:pPr>
+              <a:defRPr sz="1200" b="1">
+                <a:solidFill>
+                  <a:srgbClr val="A8B3C7"/>
+                </a:solidFill>
+                <a:latin typeface="Noto Sans CJK KR"/>
+                <a:ea typeface="Noto Sans CJK KR"/>
+                <a:cs typeface="Noto Sans CJK KR"/>
+              </a:defRPr>
+            </a:pPr>
+            <a:r>
+              <a:rPr sz="1200" b="1">
+                <a:solidFill>
+                  <a:srgbClr val="A8B3C7"/>
+                </a:solidFill>
+                <a:latin typeface="Noto Sans CJK KR"/>
+                <a:ea typeface="Noto Sans CJK KR"/>
+                <a:cs typeface="Noto Sans CJK KR"/>
+              </a:rPr>
+              <a:t>엄격한 전체 시도 정확도</a:t>
+            </a:r>
+          </a:p>
+        </p:txBody>
+      </p:sp>
+      <p:sp>
+        <p:nvSpPr>
+          <p:cNvPr id="13" name="">
+            <a:extLst xmlns:a="http://schemas.openxmlformats.org/drawingml/2006/main">
+              <a:ext uri="{FF2B5EF4-FFF2-40B4-BE49-F238E27FC236}">
+                <a16:creationId xmlns:a16="http://schemas.microsoft.com/office/drawing/2014/main" id="{82B2A3E3-CC4C-48DA-BE78-1488C9DF7BB3}"/>
+              </a:ext>
+            </a:extLst>
+          </p:cNvPr>
+          <p:cNvSpPr>
+            <a:spLocks xmlns:a="http://schemas.openxmlformats.org/drawingml/2006/main" noGrp="1"/>
+          </p:cNvSpPr>
+          <p:nvPr/>
+        </p:nvSpPr>
+        <p:spPr>
+          <a:xfrm xmlns:a="http://schemas.openxmlformats.org/drawingml/2006/main">
+            <a:off x="609600" y="5295900"/>
+            <a:ext cx="2000250" cy="400050"/>
+          </a:xfrm>
+          <a:prstGeom xmlns:a="http://schemas.openxmlformats.org/drawingml/2006/main" prst="rect">
+            <a:avLst/>
+          </a:prstGeom>
+          <a:noFill xmlns:a="http://schemas.openxmlformats.org/drawingml/2006/main"/>
+          <a:ln xmlns:a="http://schemas.openxmlformats.org/drawingml/2006/main" w="0">
+            <a:noFill/>
+            <a:prstDash val="solid"/>
+          </a:ln>
+        </p:spPr>
+        <p:txBody>
+          <a:bodyPr xmlns:a="http://schemas.openxmlformats.org/drawingml/2006/main"/>
+          <a:lstStyle xmlns:a="http://schemas.openxmlformats.org/drawingml/2006/main">
+            <a:defPPr>
+              <a:defRPr sz="1950" b="1">
+                <a:solidFill>
+                  <a:srgbClr val="F8FAFC"/>
+                </a:solidFill>
+                <a:latin typeface="Noto Sans CJK KR"/>
+                <a:ea typeface="Noto Sans CJK KR"/>
+                <a:cs typeface="Noto Sans CJK KR"/>
+              </a:defRPr>
+            </a:defPPr>
+            <a:lvl1pPr>
+              <a:defRPr sz="1950" b="1">
+                <a:solidFill>
+                  <a:srgbClr val="F8FAFC"/>
+                </a:solidFill>
+                <a:latin typeface="Noto Sans CJK KR"/>
+                <a:ea typeface="Noto Sans CJK KR"/>
+                <a:cs typeface="Noto Sans CJK KR"/>
+              </a:defRPr>
+            </a:lvl1pPr>
+            <a:lvl2pPr>
+              <a:defRPr sz="1950" b="1">
+                <a:solidFill>
+                  <a:srgbClr val="F8FAFC"/>
+                </a:solidFill>
+                <a:latin typeface="Noto Sans CJK KR"/>
+                <a:ea typeface="Noto Sans CJK KR"/>
+                <a:cs typeface="Noto Sans CJK KR"/>
+              </a:defRPr>
+            </a:lvl2pPr>
+            <a:lvl3pPr>
+              <a:defRPr sz="1950" b="1">
+                <a:solidFill>
+                  <a:srgbClr val="F8FAFC"/>
+                </a:solidFill>
+                <a:latin typeface="Noto Sans CJK KR"/>
+                <a:ea typeface="Noto Sans CJK KR"/>
+                <a:cs typeface="Noto Sans CJK KR"/>
+              </a:defRPr>
+            </a:lvl3pPr>
+            <a:lvl4pPr>
+              <a:defRPr sz="1950" b="1">
+                <a:solidFill>
+                  <a:srgbClr val="F8FAFC"/>
+                </a:solidFill>
+                <a:latin typeface="Noto Sans CJK KR"/>
+                <a:ea typeface="Noto Sans CJK KR"/>
+                <a:cs typeface="Noto Sans CJK KR"/>
+              </a:defRPr>
+            </a:lvl4pPr>
+            <a:lvl5pPr>
+              <a:defRPr sz="1950" b="1">
+                <a:solidFill>
+                  <a:srgbClr val="F8FAFC"/>
+                </a:solidFill>
+                <a:latin typeface="Noto Sans CJK KR"/>
+                <a:ea typeface="Noto Sans CJK KR"/>
+                <a:cs typeface="Noto Sans CJK KR"/>
+              </a:defRPr>
+            </a:lvl5pPr>
+            <a:lvl6pPr>
+              <a:defRPr sz="1950" b="1">
+                <a:solidFill>
+                  <a:srgbClr val="F8FAFC"/>
+                </a:solidFill>
+                <a:latin typeface="Noto Sans CJK KR"/>
+                <a:ea typeface="Noto Sans CJK KR"/>
+                <a:cs typeface="Noto Sans CJK KR"/>
+              </a:defRPr>
+            </a:lvl6pPr>
+            <a:lvl7pPr>
+              <a:defRPr sz="1950" b="1">
+                <a:solidFill>
+                  <a:srgbClr val="F8FAFC"/>
+                </a:solidFill>
+                <a:latin typeface="Noto Sans CJK KR"/>
+                <a:ea typeface="Noto Sans CJK KR"/>
+                <a:cs typeface="Noto Sans CJK KR"/>
+              </a:defRPr>
+            </a:lvl7pPr>
+            <a:lvl8pPr>
+              <a:defRPr sz="1950" b="1">
+                <a:solidFill>
+                  <a:srgbClr val="F8FAFC"/>
+                </a:solidFill>
+                <a:latin typeface="Noto Sans CJK KR"/>
+                <a:ea typeface="Noto Sans CJK KR"/>
+                <a:cs typeface="Noto Sans CJK KR"/>
+              </a:defRPr>
+            </a:lvl8pPr>
+            <a:lvl9pPr>
+              <a:defRPr sz="1950" b="1">
+                <a:solidFill>
+                  <a:srgbClr val="F8FAFC"/>
+                </a:solidFill>
+                <a:latin typeface="Noto Sans CJK KR"/>
+                <a:ea typeface="Noto Sans CJK KR"/>
+                <a:cs typeface="Noto Sans CJK KR"/>
+              </a:defRPr>
+            </a:lvl9pPr>
+          </a:lstStyle>
+          <a:p xmlns:a="http://schemas.openxmlformats.org/drawingml/2006/main">
+            <a:pPr>
+              <a:defRPr sz="1950" b="1">
+                <a:solidFill>
+                  <a:srgbClr val="F8FAFC"/>
+                </a:solidFill>
+                <a:latin typeface="Noto Sans CJK KR"/>
+                <a:ea typeface="Noto Sans CJK KR"/>
+                <a:cs typeface="Noto Sans CJK KR"/>
+              </a:defRPr>
+            </a:pPr>
+            <a:r>
+              <a:rPr sz="1950" b="1">
+                <a:solidFill>
+                  <a:srgbClr val="F8FAFC"/>
+                </a:solidFill>
+                <a:latin typeface="Noto Sans CJK KR"/>
+                <a:ea typeface="Noto Sans CJK KR"/>
+                <a:cs typeface="Noto Sans CJK KR"/>
+              </a:rPr>
+              <a:t>B0  28.85%</a:t>
+            </a:r>
+          </a:p>
+        </p:txBody>
+      </p:sp>
+      <p:sp>
+        <p:nvSpPr>
+          <p:cNvPr id="14" name="">
+            <a:extLst xmlns:a="http://schemas.openxmlformats.org/drawingml/2006/main">
+              <a:ext uri="{FF2B5EF4-FFF2-40B4-BE49-F238E27FC236}">
+                <a16:creationId xmlns:a16="http://schemas.microsoft.com/office/drawing/2014/main" id="{D1B98D84-3014-4FEC-8826-F0B65239FFF4}"/>
+              </a:ext>
+            </a:extLst>
+          </p:cNvPr>
+          <p:cNvSpPr>
+            <a:spLocks xmlns:a="http://schemas.openxmlformats.org/drawingml/2006/main" noGrp="1"/>
+          </p:cNvSpPr>
+          <p:nvPr/>
+        </p:nvSpPr>
+        <p:spPr>
+          <a:xfrm xmlns:a="http://schemas.openxmlformats.org/drawingml/2006/main">
+            <a:off x="2819400" y="5295900"/>
+            <a:ext cx="2000250" cy="400050"/>
+          </a:xfrm>
+          <a:prstGeom xmlns:a="http://schemas.openxmlformats.org/drawingml/2006/main" prst="rect">
+            <a:avLst/>
+          </a:prstGeom>
+          <a:noFill xmlns:a="http://schemas.openxmlformats.org/drawingml/2006/main"/>
+          <a:ln xmlns:a="http://schemas.openxmlformats.org/drawingml/2006/main" w="0">
+            <a:noFill/>
+            <a:prstDash val="solid"/>
+          </a:ln>
+        </p:spPr>
+        <p:txBody>
+          <a:bodyPr xmlns:a="http://schemas.openxmlformats.org/drawingml/2006/main"/>
+          <a:lstStyle xmlns:a="http://schemas.openxmlformats.org/drawingml/2006/main">
+            <a:defPPr>
+              <a:defRPr sz="1950" b="1">
+                <a:solidFill>
+                  <a:srgbClr val="A8B3C7"/>
+                </a:solidFill>
+                <a:latin typeface="Noto Sans CJK KR"/>
+                <a:ea typeface="Noto Sans CJK KR"/>
+                <a:cs typeface="Noto Sans CJK KR"/>
+              </a:defRPr>
+            </a:defPPr>
+            <a:lvl1pPr>
+              <a:defRPr sz="1950" b="1">
+                <a:solidFill>
+                  <a:srgbClr val="A8B3C7"/>
+                </a:solidFill>
+                <a:latin typeface="Noto Sans CJK KR"/>
+                <a:ea typeface="Noto Sans CJK KR"/>
+                <a:cs typeface="Noto Sans CJK KR"/>
+              </a:defRPr>
+            </a:lvl1pPr>
+            <a:lvl2pPr>
+              <a:defRPr sz="1950" b="1">
+                <a:solidFill>
+                  <a:srgbClr val="A8B3C7"/>
+                </a:solidFill>
+                <a:latin typeface="Noto Sans CJK KR"/>
+                <a:ea typeface="Noto Sans CJK KR"/>
+                <a:cs typeface="Noto Sans CJK KR"/>
+              </a:defRPr>
+            </a:lvl2pPr>
+            <a:lvl3pPr>
+              <a:defRPr sz="1950" b="1">
+                <a:solidFill>
+                  <a:srgbClr val="A8B3C7"/>
+                </a:solidFill>
+                <a:latin typeface="Noto Sans CJK KR"/>
+                <a:ea typeface="Noto Sans CJK KR"/>
+                <a:cs typeface="Noto Sans CJK KR"/>
+              </a:defRPr>
+            </a:lvl3pPr>
+            <a:lvl4pPr>
+              <a:defRPr sz="1950" b="1">
+                <a:solidFill>
+                  <a:srgbClr val="A8B3C7"/>
+                </a:solidFill>
+                <a:latin typeface="Noto Sans CJK KR"/>
+                <a:ea typeface="Noto Sans CJK KR"/>
+                <a:cs typeface="Noto Sans CJK KR"/>
+              </a:defRPr>
+            </a:lvl4pPr>
+            <a:lvl5pPr>
+              <a:defRPr sz="1950" b="1">
+                <a:solidFill>
+                  <a:srgbClr val="A8B3C7"/>
+                </a:solidFill>
+                <a:latin typeface="Noto Sans CJK KR"/>
+                <a:ea typeface="Noto Sans CJK KR"/>
+                <a:cs typeface="Noto Sans CJK KR"/>
+              </a:defRPr>
+            </a:lvl5pPr>
+            <a:lvl6pPr>
+              <a:defRPr sz="1950" b="1">
+                <a:solidFill>
+                  <a:srgbClr val="A8B3C7"/>
+                </a:solidFill>
+                <a:latin typeface="Noto Sans CJK KR"/>
+                <a:ea typeface="Noto Sans CJK KR"/>
+                <a:cs typeface="Noto Sans CJK KR"/>
+              </a:defRPr>
+            </a:lvl6pPr>
+            <a:lvl7pPr>
+              <a:defRPr sz="1950" b="1">
+                <a:solidFill>
+                  <a:srgbClr val="A8B3C7"/>
+                </a:solidFill>
+                <a:latin typeface="Noto Sans CJK KR"/>
+                <a:ea typeface="Noto Sans CJK KR"/>
+                <a:cs typeface="Noto Sans CJK KR"/>
+              </a:defRPr>
+            </a:lvl7pPr>
+            <a:lvl8pPr>
+              <a:defRPr sz="1950" b="1">
+                <a:solidFill>
+                  <a:srgbClr val="A8B3C7"/>
+                </a:solidFill>
+                <a:latin typeface="Noto Sans CJK KR"/>
+                <a:ea typeface="Noto Sans CJK KR"/>
+                <a:cs typeface="Noto Sans CJK KR"/>
+              </a:defRPr>
+            </a:lvl8pPr>
+            <a:lvl9pPr>
+              <a:defRPr sz="1950" b="1">
+                <a:solidFill>
+                  <a:srgbClr val="A8B3C7"/>
+                </a:solidFill>
+                <a:latin typeface="Noto Sans CJK KR"/>
+                <a:ea typeface="Noto Sans CJK KR"/>
+                <a:cs typeface="Noto Sans CJK KR"/>
+              </a:defRPr>
+            </a:lvl9pPr>
+          </a:lstStyle>
+          <a:p xmlns:a="http://schemas.openxmlformats.org/drawingml/2006/main">
+            <a:pPr>
+              <a:defRPr sz="1950" b="1">
+                <a:solidFill>
+                  <a:srgbClr val="A8B3C7"/>
+                </a:solidFill>
+                <a:latin typeface="Noto Sans CJK KR"/>
+                <a:ea typeface="Noto Sans CJK KR"/>
+                <a:cs typeface="Noto Sans CJK KR"/>
+              </a:defRPr>
+            </a:pPr>
+            <a:r>
+              <a:rPr sz="1950" b="1">
+                <a:solidFill>
+                  <a:srgbClr val="A8B3C7"/>
+                </a:solidFill>
+                <a:latin typeface="Noto Sans CJK KR"/>
+                <a:ea typeface="Noto Sans CJK KR"/>
+                <a:cs typeface="Noto Sans CJK KR"/>
+              </a:rPr>
+              <a:t>A  11.54%</a:t>
+            </a:r>
+          </a:p>
+        </p:txBody>
+      </p:sp>
+      <p:sp>
+        <p:nvSpPr>
+          <p:cNvPr id="15" name="">
+            <a:extLst xmlns:a="http://schemas.openxmlformats.org/drawingml/2006/main">
+              <a:ext uri="{FF2B5EF4-FFF2-40B4-BE49-F238E27FC236}">
+                <a16:creationId xmlns:a16="http://schemas.microsoft.com/office/drawing/2014/main" id="{D1769026-4365-40E2-BA30-47A1CEA3498D}"/>
+              </a:ext>
+            </a:extLst>
+          </p:cNvPr>
+          <p:cNvSpPr>
+            <a:spLocks xmlns:a="http://schemas.openxmlformats.org/drawingml/2006/main" noGrp="1"/>
+          </p:cNvSpPr>
+          <p:nvPr/>
+        </p:nvSpPr>
+        <p:spPr>
+          <a:xfrm xmlns:a="http://schemas.openxmlformats.org/drawingml/2006/main">
+            <a:off x="6191250" y="4914900"/>
+            <a:ext cx="1143000" cy="285750"/>
+          </a:xfrm>
+          <a:prstGeom xmlns:a="http://schemas.openxmlformats.org/drawingml/2006/main" prst="rect">
+            <a:avLst/>
+          </a:prstGeom>
+          <a:noFill xmlns:a="http://schemas.openxmlformats.org/drawingml/2006/main"/>
+          <a:ln xmlns:a="http://schemas.openxmlformats.org/drawingml/2006/main" w="0">
+            <a:noFill/>
+            <a:prstDash val="solid"/>
+          </a:ln>
+        </p:spPr>
+        <p:txBody>
+          <a:bodyPr xmlns:a="http://schemas.openxmlformats.org/drawingml/2006/main"/>
+          <a:lstStyle xmlns:a="http://schemas.openxmlformats.org/drawingml/2006/main">
+            <a:defPPr>
+              <a:defRPr sz="1200" b="1">
+                <a:solidFill>
+                  <a:srgbClr val="9B87F5"/>
+                </a:solidFill>
+                <a:latin typeface="Noto Sans CJK KR"/>
+                <a:ea typeface="Noto Sans CJK KR"/>
+                <a:cs typeface="Noto Sans CJK KR"/>
+              </a:defRPr>
+            </a:defPPr>
+            <a:lvl1pPr>
+              <a:defRPr sz="1200" b="1">
+                <a:solidFill>
+                  <a:srgbClr val="9B87F5"/>
+                </a:solidFill>
+                <a:latin typeface="Noto Sans CJK KR"/>
+                <a:ea typeface="Noto Sans CJK KR"/>
+                <a:cs typeface="Noto Sans CJK KR"/>
+              </a:defRPr>
+            </a:lvl1pPr>
+            <a:lvl2pPr>
+              <a:defRPr sz="1200" b="1">
+                <a:solidFill>
+                  <a:srgbClr val="9B87F5"/>
+                </a:solidFill>
+                <a:latin typeface="Noto Sans CJK KR"/>
+                <a:ea typeface="Noto Sans CJK KR"/>
+                <a:cs typeface="Noto Sans CJK KR"/>
+              </a:defRPr>
+            </a:lvl2pPr>
+            <a:lvl3pPr>
+              <a:defRPr sz="1200" b="1">
+                <a:solidFill>
+                  <a:srgbClr val="9B87F5"/>
+                </a:solidFill>
+                <a:latin typeface="Noto Sans CJK KR"/>
+                <a:ea typeface="Noto Sans CJK KR"/>
+                <a:cs typeface="Noto Sans CJK KR"/>
+              </a:defRPr>
+            </a:lvl3pPr>
+            <a:lvl4pPr>
+              <a:defRPr sz="1200" b="1">
+                <a:solidFill>
+                  <a:srgbClr val="9B87F5"/>
+                </a:solidFill>
+                <a:latin typeface="Noto Sans CJK KR"/>
+                <a:ea typeface="Noto Sans CJK KR"/>
+                <a:cs typeface="Noto Sans CJK KR"/>
+              </a:defRPr>
+            </a:lvl4pPr>
+            <a:lvl5pPr>
+              <a:defRPr sz="1200" b="1">
+                <a:solidFill>
+                  <a:srgbClr val="9B87F5"/>
+                </a:solidFill>
+                <a:latin typeface="Noto Sans CJK KR"/>
+                <a:ea typeface="Noto Sans CJK KR"/>
+                <a:cs typeface="Noto Sans CJK KR"/>
+              </a:defRPr>
+            </a:lvl5pPr>
+            <a:lvl6pPr>
+              <a:defRPr sz="1200" b="1">
+                <a:solidFill>
+                  <a:srgbClr val="9B87F5"/>
+                </a:solidFill>
+                <a:latin typeface="Noto Sans CJK KR"/>
+                <a:ea typeface="Noto Sans CJK KR"/>
+                <a:cs typeface="Noto Sans CJK KR"/>
+              </a:defRPr>
+            </a:lvl6pPr>
+            <a:lvl7pPr>
+              <a:defRPr sz="1200" b="1">
+                <a:solidFill>
+                  <a:srgbClr val="9B87F5"/>
+                </a:solidFill>
+                <a:latin typeface="Noto Sans CJK KR"/>
+                <a:ea typeface="Noto Sans CJK KR"/>
+                <a:cs typeface="Noto Sans CJK KR"/>
+              </a:defRPr>
+            </a:lvl7pPr>
+            <a:lvl8pPr>
+              <a:defRPr sz="1200" b="1">
+                <a:solidFill>
+                  <a:srgbClr val="9B87F5"/>
+                </a:solidFill>
+                <a:latin typeface="Noto Sans CJK KR"/>
+                <a:ea typeface="Noto Sans CJK KR"/>
+                <a:cs typeface="Noto Sans CJK KR"/>
+              </a:defRPr>
+            </a:lvl8pPr>
+            <a:lvl9pPr>
+              <a:defRPr sz="1200" b="1">
+                <a:solidFill>
+                  <a:srgbClr val="9B87F5"/>
+                </a:solidFill>
+                <a:latin typeface="Noto Sans CJK KR"/>
+                <a:ea typeface="Noto Sans CJK KR"/>
+                <a:cs typeface="Noto Sans CJK KR"/>
+              </a:defRPr>
+            </a:lvl9pPr>
+          </a:lstStyle>
+          <a:p xmlns:a="http://schemas.openxmlformats.org/drawingml/2006/main">
+            <a:pPr>
+              <a:defRPr sz="1200" b="1">
+                <a:solidFill>
+                  <a:srgbClr val="9B87F5"/>
+                </a:solidFill>
+                <a:latin typeface="Noto Sans CJK KR"/>
+                <a:ea typeface="Noto Sans CJK KR"/>
+                <a:cs typeface="Noto Sans CJK KR"/>
+              </a:defRPr>
+            </a:pPr>
+            <a:r>
+              <a:rPr sz="1200" b="1">
+                <a:solidFill>
+                  <a:srgbClr val="9B87F5"/>
+                </a:solidFill>
+                <a:latin typeface="Noto Sans CJK KR"/>
+                <a:ea typeface="Noto Sans CJK KR"/>
+                <a:cs typeface="Noto Sans CJK KR"/>
+              </a:rPr>
+              <a:t>원인</a:t>
+            </a:r>
+          </a:p>
+        </p:txBody>
+      </p:sp>
+      <p:sp>
+        <p:nvSpPr>
+          <p:cNvPr id="16" name="">
+            <a:extLst xmlns:a="http://schemas.openxmlformats.org/drawingml/2006/main">
+              <a:ext uri="{FF2B5EF4-FFF2-40B4-BE49-F238E27FC236}">
+                <a16:creationId xmlns:a16="http://schemas.microsoft.com/office/drawing/2014/main" id="{E926D100-8849-4852-A6A9-B165FA27AE9D}"/>
+              </a:ext>
+            </a:extLst>
+          </p:cNvPr>
+          <p:cNvSpPr>
+            <a:spLocks xmlns:a="http://schemas.openxmlformats.org/drawingml/2006/main" noGrp="1"/>
+          </p:cNvSpPr>
+          <p:nvPr/>
+        </p:nvSpPr>
+        <p:spPr>
+          <a:xfrm xmlns:a="http://schemas.openxmlformats.org/drawingml/2006/main">
+            <a:off x="6191250" y="5257800"/>
+            <a:ext cx="4953000" cy="685800"/>
+          </a:xfrm>
+          <a:prstGeom xmlns:a="http://schemas.openxmlformats.org/drawingml/2006/main" prst="rect">
+            <a:avLst/>
+          </a:prstGeom>
+          <a:noFill xmlns:a="http://schemas.openxmlformats.org/drawingml/2006/main"/>
+          <a:ln xmlns:a="http://schemas.openxmlformats.org/drawingml/2006/main" w="0">
+            <a:noFill/>
+            <a:prstDash val="solid"/>
+          </a:ln>
+        </p:spPr>
+        <p:txBody>
+          <a:bodyPr xmlns:a="http://schemas.openxmlformats.org/drawingml/2006/main"/>
+          <a:lstStyle xmlns:a="http://schemas.openxmlformats.org/drawingml/2006/main">
+            <a:defPPr>
+              <a:defRPr sz="1425" b="1">
+                <a:solidFill>
+                  <a:srgbClr val="F8FAFC"/>
+                </a:solidFill>
+                <a:latin typeface="Noto Sans CJK KR"/>
+                <a:ea typeface="Noto Sans CJK KR"/>
+                <a:cs typeface="Noto Sans CJK KR"/>
+              </a:defRPr>
+            </a:defPPr>
+            <a:lvl1pPr>
+              <a:defRPr sz="1425" b="1">
+                <a:solidFill>
+                  <a:srgbClr val="F8FAFC"/>
+                </a:solidFill>
+                <a:latin typeface="Noto Sans CJK KR"/>
+                <a:ea typeface="Noto Sans CJK KR"/>
+                <a:cs typeface="Noto Sans CJK KR"/>
+              </a:defRPr>
+            </a:lvl1pPr>
+            <a:lvl2pPr>
+              <a:defRPr sz="1425" b="1">
+                <a:solidFill>
+                  <a:srgbClr val="F8FAFC"/>
+                </a:solidFill>
+                <a:latin typeface="Noto Sans CJK KR"/>
+                <a:ea typeface="Noto Sans CJK KR"/>
+                <a:cs typeface="Noto Sans CJK KR"/>
+              </a:defRPr>
+            </a:lvl2pPr>
+            <a:lvl3pPr>
+              <a:defRPr sz="1425" b="1">
+                <a:solidFill>
+                  <a:srgbClr val="F8FAFC"/>
+                </a:solidFill>
+                <a:latin typeface="Noto Sans CJK KR"/>
+                <a:ea typeface="Noto Sans CJK KR"/>
+                <a:cs typeface="Noto Sans CJK KR"/>
+              </a:defRPr>
+            </a:lvl3pPr>
+            <a:lvl4pPr>
+              <a:defRPr sz="1425" b="1">
+                <a:solidFill>
+                  <a:srgbClr val="F8FAFC"/>
+                </a:solidFill>
+                <a:latin typeface="Noto Sans CJK KR"/>
+                <a:ea typeface="Noto Sans CJK KR"/>
+                <a:cs typeface="Noto Sans CJK KR"/>
+              </a:defRPr>
+            </a:lvl4pPr>
+            <a:lvl5pPr>
+              <a:defRPr sz="1425" b="1">
+                <a:solidFill>
+                  <a:srgbClr val="F8FAFC"/>
+                </a:solidFill>
+                <a:latin typeface="Noto Sans CJK KR"/>
+                <a:ea typeface="Noto Sans CJK KR"/>
+                <a:cs typeface="Noto Sans CJK KR"/>
+              </a:defRPr>
+            </a:lvl5pPr>
+            <a:lvl6pPr>
+              <a:defRPr sz="1425" b="1">
+                <a:solidFill>
+                  <a:srgbClr val="F8FAFC"/>
+                </a:solidFill>
+                <a:latin typeface="Noto Sans CJK KR"/>
+                <a:ea typeface="Noto Sans CJK KR"/>
+                <a:cs typeface="Noto Sans CJK KR"/>
+              </a:defRPr>
+            </a:lvl6pPr>
+            <a:lvl7pPr>
+              <a:defRPr sz="1425" b="1">
+                <a:solidFill>
+                  <a:srgbClr val="F8FAFC"/>
+                </a:solidFill>
+                <a:latin typeface="Noto Sans CJK KR"/>
+                <a:ea typeface="Noto Sans CJK KR"/>
+                <a:cs typeface="Noto Sans CJK KR"/>
+              </a:defRPr>
+            </a:lvl7pPr>
+            <a:lvl8pPr>
+              <a:defRPr sz="1425" b="1">
+                <a:solidFill>
+                  <a:srgbClr val="F8FAFC"/>
+                </a:solidFill>
+                <a:latin typeface="Noto Sans CJK KR"/>
+                <a:ea typeface="Noto Sans CJK KR"/>
+                <a:cs typeface="Noto Sans CJK KR"/>
+              </a:defRPr>
+            </a:lvl8pPr>
+            <a:lvl9pPr>
+              <a:defRPr sz="1425" b="1">
+                <a:solidFill>
+                  <a:srgbClr val="F8FAFC"/>
+                </a:solidFill>
+                <a:latin typeface="Noto Sans CJK KR"/>
+                <a:ea typeface="Noto Sans CJK KR"/>
+                <a:cs typeface="Noto Sans CJK KR"/>
+              </a:defRPr>
+            </a:lvl9pPr>
+          </a:lstStyle>
+          <a:p xmlns:a="http://schemas.openxmlformats.org/drawingml/2006/main">
+            <a:pPr>
+              <a:defRPr sz="1425" b="1">
+                <a:solidFill>
+                  <a:srgbClr val="F8FAFC"/>
+                </a:solidFill>
+                <a:latin typeface="Noto Sans CJK KR"/>
+                <a:ea typeface="Noto Sans CJK KR"/>
+                <a:cs typeface="Noto Sans CJK KR"/>
+              </a:defRPr>
+            </a:pPr>
+            <a:r>
+              <a:rPr sz="1425" b="1">
+                <a:solidFill>
+                  <a:srgbClr val="F8FAFC"/>
+                </a:solidFill>
+                <a:latin typeface="Noto Sans CJK KR"/>
+                <a:ea typeface="Noto Sans CJK KR"/>
+                <a:cs typeface="Noto Sans CJK KR"/>
+              </a:rPr>
+              <a:t>3B VLM이 미세 결함을 놓치면</a:t>
+            </a:r>
+          </a:p>
+          <a:p xmlns:a="http://schemas.openxmlformats.org/drawingml/2006/main">
+            <a:pPr>
+              <a:defRPr sz="1425" b="1">
+                <a:solidFill>
+                  <a:srgbClr val="F8FAFC"/>
+                </a:solidFill>
+                <a:latin typeface="Noto Sans CJK KR"/>
+                <a:ea typeface="Noto Sans CJK KR"/>
+                <a:cs typeface="Noto Sans CJK KR"/>
+              </a:defRPr>
+            </a:pPr>
+            <a:r>
+              <a:rPr sz="1425" b="1">
+                <a:solidFill>
+                  <a:srgbClr val="F8FAFC"/>
+                </a:solidFill>
+                <a:latin typeface="Noto Sans CJK KR"/>
+                <a:ea typeface="Noto Sans CJK KR"/>
+                <a:cs typeface="Noto Sans CJK KR"/>
+              </a:rPr>
+              <a:t>RAG는 픽셀 정보를 복구하지 못한다.</a:t>
+            </a:r>
+          </a:p>
+        </p:txBody>
+      </p:sp>
+      <p:sp>
+        <p:nvSpPr>
+          <p:cNvPr id="17" name="">
+            <a:extLst xmlns:a="http://schemas.openxmlformats.org/drawingml/2006/main">
+              <a:ext uri="{FF2B5EF4-FFF2-40B4-BE49-F238E27FC236}">
+                <a16:creationId xmlns:a16="http://schemas.microsoft.com/office/drawing/2014/main" id="{AFC07FEC-466D-4C37-8D32-A708A6227DBE}"/>
+              </a:ext>
+            </a:extLst>
+          </p:cNvPr>
+          <p:cNvSpPr>
+            <a:spLocks xmlns:a="http://schemas.openxmlformats.org/drawingml/2006/main" noGrp="1"/>
+          </p:cNvSpPr>
+          <p:nvPr/>
+        </p:nvSpPr>
+        <p:spPr>
+          <a:xfrm xmlns:a="http://schemas.openxmlformats.org/drawingml/2006/main">
+            <a:off x="609600" y="6076950"/>
+            <a:ext cx="9906000" cy="266700"/>
           </a:xfrm>
           <a:prstGeom xmlns:a="http://schemas.openxmlformats.org/drawingml/2006/main" prst="rect">
             <a:avLst/>
@@ -12025,7 +12087,7 @@
                 <a:ea typeface="Noto Sans CJK KR"/>
                 <a:cs typeface="Noto Sans CJK KR"/>
               </a:rPr>
-              <a:t>정확도는 오류, 누락, ABSTAIN을 52건 전체 분모에 포함해 계산했다.</a:t>
+              <a:t>Ollama qwen2.5vl:3b, dev 52장. 오류, 누락, ABSTAIN을 전체 분모에 포함했다.</a:t>
             </a:r>
           </a:p>
         </p:txBody>
@@ -12033,7 +12095,7 @@
     </p:spTree>
     <p:extLst>
       <p:ext uri="{BB962C8B-B14F-4D97-AF65-F5344CB8AC3E}">
-        <p14:creationId xmlns:p14="http://schemas.microsoft.com/office/powerpoint/2010/main" val="84750415"/>
+        <p14:creationId xmlns:p14="http://schemas.microsoft.com/office/powerpoint/2010/main" val="1662335011"/>
       </p:ext>
     </p:extLst>
   </p:cSld>
@@ -12101,6 +12163,7 @@
               </a:defRPr>
             </a:defPPr>
             <a:lvl1pPr>
+              <a:buNone/>
               <a:defRPr sz="975" b="1">
                 <a:solidFill>
                   <a:srgbClr val="9B87F5"/>
@@ -12111,6 +12174,7 @@
               </a:defRPr>
             </a:lvl1pPr>
             <a:lvl2pPr>
+              <a:buNone/>
               <a:defRPr sz="975" b="1">
                 <a:solidFill>
                   <a:srgbClr val="9B87F5"/>
@@ -12121,6 +12185,7 @@
               </a:defRPr>
             </a:lvl2pPr>
             <a:lvl3pPr>
+              <a:buNone/>
               <a:defRPr sz="975" b="1">
                 <a:solidFill>
                   <a:srgbClr val="9B87F5"/>
@@ -12131,6 +12196,7 @@
               </a:defRPr>
             </a:lvl3pPr>
             <a:lvl4pPr>
+              <a:buNone/>
               <a:defRPr sz="975" b="1">
                 <a:solidFill>
                   <a:srgbClr val="9B87F5"/>
@@ -12141,6 +12207,7 @@
               </a:defRPr>
             </a:lvl4pPr>
             <a:lvl5pPr>
+              <a:buNone/>
               <a:defRPr sz="975" b="1">
                 <a:solidFill>
                   <a:srgbClr val="9B87F5"/>
@@ -12151,6 +12218,7 @@
               </a:defRPr>
             </a:lvl5pPr>
             <a:lvl6pPr>
+              <a:buNone/>
               <a:defRPr sz="975" b="1">
                 <a:solidFill>
                   <a:srgbClr val="9B87F5"/>
@@ -12161,6 +12229,7 @@
               </a:defRPr>
             </a:lvl6pPr>
             <a:lvl7pPr>
+              <a:buNone/>
               <a:defRPr sz="975" b="1">
                 <a:solidFill>
                   <a:srgbClr val="9B87F5"/>
@@ -12171,6 +12240,7 @@
               </a:defRPr>
             </a:lvl7pPr>
             <a:lvl8pPr>
+              <a:buNone/>
               <a:defRPr sz="975" b="1">
                 <a:solidFill>
                   <a:srgbClr val="9B87F5"/>
@@ -12181,6 +12251,7 @@
               </a:defRPr>
             </a:lvl8pPr>
             <a:lvl9pPr>
+              <a:buNone/>
               <a:defRPr sz="975" b="1">
                 <a:solidFill>
                   <a:srgbClr val="9B87F5"/>
@@ -12193,6 +12264,7 @@
           </a:lstStyle>
           <a:p xmlns:a="http://schemas.openxmlformats.org/drawingml/2006/main">
             <a:pPr>
+              <a:buNone/>
               <a:defRPr sz="975" b="1">
                 <a:solidFill>
                   <a:srgbClr val="9B87F5"/>
@@ -12258,6 +12330,7 @@
               </a:defRPr>
             </a:defPPr>
             <a:lvl1pPr>
+              <a:buNone/>
               <a:defRPr sz="2550" b="1">
                 <a:solidFill>
                   <a:srgbClr val="F8FAFC"/>
@@ -12268,6 +12341,7 @@
               </a:defRPr>
             </a:lvl1pPr>
             <a:lvl2pPr>
+              <a:buNone/>
               <a:defRPr sz="2550" b="1">
                 <a:solidFill>
                   <a:srgbClr val="F8FAFC"/>
@@ -12278,6 +12352,7 @@
               </a:defRPr>
             </a:lvl2pPr>
             <a:lvl3pPr>
+              <a:buNone/>
               <a:defRPr sz="2550" b="1">
                 <a:solidFill>
                   <a:srgbClr val="F8FAFC"/>
@@ -12288,6 +12363,7 @@
               </a:defRPr>
             </a:lvl3pPr>
             <a:lvl4pPr>
+              <a:buNone/>
               <a:defRPr sz="2550" b="1">
                 <a:solidFill>
                   <a:srgbClr val="F8FAFC"/>
@@ -12298,6 +12374,7 @@
               </a:defRPr>
             </a:lvl4pPr>
             <a:lvl5pPr>
+              <a:buNone/>
               <a:defRPr sz="2550" b="1">
                 <a:solidFill>
                   <a:srgbClr val="F8FAFC"/>
@@ -12308,6 +12385,7 @@
               </a:defRPr>
             </a:lvl5pPr>
             <a:lvl6pPr>
+              <a:buNone/>
               <a:defRPr sz="2550" b="1">
                 <a:solidFill>
                   <a:srgbClr val="F8FAFC"/>
@@ -12318,6 +12396,7 @@
               </a:defRPr>
             </a:lvl6pPr>
             <a:lvl7pPr>
+              <a:buNone/>
               <a:defRPr sz="2550" b="1">
                 <a:solidFill>
                   <a:srgbClr val="F8FAFC"/>
@@ -12328,6 +12407,7 @@
               </a:defRPr>
             </a:lvl7pPr>
             <a:lvl8pPr>
+              <a:buNone/>
               <a:defRPr sz="2550" b="1">
                 <a:solidFill>
                   <a:srgbClr val="F8FAFC"/>
@@ -12338,6 +12418,7 @@
               </a:defRPr>
             </a:lvl8pPr>
             <a:lvl9pPr>
+              <a:buNone/>
               <a:defRPr sz="2550" b="1">
                 <a:solidFill>
                   <a:srgbClr val="F8FAFC"/>
@@ -12350,6 +12431,7 @@
           </a:lstStyle>
           <a:p xmlns:a="http://schemas.openxmlformats.org/drawingml/2006/main">
             <a:pPr>
+              <a:buNone/>
               <a:defRPr sz="2550" b="1">
                 <a:solidFill>
                   <a:srgbClr val="F8FAFC"/>
@@ -12368,7 +12450,7 @@
                 <a:ea typeface="Noto Sans CJK KR"/>
                 <a:cs typeface="Noto Sans CJK KR"/>
               </a:rPr>
-              <a:t>구현은 완성했고, 병목을 모델로 좁혔다</a:t>
+              <a:t>검사 지원 구조를 완성했고, 시각 모델 병목을 확인했다</a:t>
             </a:r>
           </a:p>
         </p:txBody>
@@ -12446,6 +12528,7 @@
               </a:defRPr>
             </a:defPPr>
             <a:lvl1pPr algn="r">
+              <a:buNone/>
               <a:defRPr sz="900" b="1">
                 <a:solidFill>
                   <a:srgbClr val="A8B3C7"/>
@@ -12456,6 +12539,7 @@
               </a:defRPr>
             </a:lvl1pPr>
             <a:lvl2pPr algn="r">
+              <a:buNone/>
               <a:defRPr sz="900" b="1">
                 <a:solidFill>
                   <a:srgbClr val="A8B3C7"/>
@@ -12466,6 +12550,7 @@
               </a:defRPr>
             </a:lvl2pPr>
             <a:lvl3pPr algn="r">
+              <a:buNone/>
               <a:defRPr sz="900" b="1">
                 <a:solidFill>
                   <a:srgbClr val="A8B3C7"/>
@@ -12476,6 +12561,7 @@
               </a:defRPr>
             </a:lvl3pPr>
             <a:lvl4pPr algn="r">
+              <a:buNone/>
               <a:defRPr sz="900" b="1">
                 <a:solidFill>
                   <a:srgbClr val="A8B3C7"/>
@@ -12486,6 +12572,7 @@
               </a:defRPr>
             </a:lvl4pPr>
             <a:lvl5pPr algn="r">
+              <a:buNone/>
               <a:defRPr sz="900" b="1">
                 <a:solidFill>
                   <a:srgbClr val="A8B3C7"/>
@@ -12496,6 +12583,7 @@
               </a:defRPr>
             </a:lvl5pPr>
             <a:lvl6pPr algn="r">
+              <a:buNone/>
               <a:defRPr sz="900" b="1">
                 <a:solidFill>
                   <a:srgbClr val="A8B3C7"/>
@@ -12506,6 +12594,7 @@
               </a:defRPr>
             </a:lvl6pPr>
             <a:lvl7pPr algn="r">
+              <a:buNone/>
               <a:defRPr sz="900" b="1">
                 <a:solidFill>
                   <a:srgbClr val="A8B3C7"/>
@@ -12516,6 +12605,7 @@
               </a:defRPr>
             </a:lvl7pPr>
             <a:lvl8pPr algn="r">
+              <a:buNone/>
               <a:defRPr sz="900" b="1">
                 <a:solidFill>
                   <a:srgbClr val="A8B3C7"/>
@@ -12526,6 +12616,7 @@
               </a:defRPr>
             </a:lvl8pPr>
             <a:lvl9pPr algn="r">
+              <a:buNone/>
               <a:defRPr sz="900" b="1">
                 <a:solidFill>
                   <a:srgbClr val="A8B3C7"/>
@@ -12538,6 +12629,7 @@
           </a:lstStyle>
           <a:p xmlns:a="http://schemas.openxmlformats.org/drawingml/2006/main">
             <a:pPr algn="r">
+              <a:buNone/>
               <a:defRPr sz="900" b="1">
                 <a:solidFill>
                   <a:srgbClr val="A8B3C7"/>
@@ -12603,6 +12695,7 @@
               </a:defRPr>
             </a:defPPr>
             <a:lvl1pPr>
+              <a:buNone/>
               <a:defRPr sz="1650" b="1">
                 <a:solidFill>
                   <a:srgbClr val="43D19E"/>
@@ -12613,6 +12706,7 @@
               </a:defRPr>
             </a:lvl1pPr>
             <a:lvl2pPr>
+              <a:buNone/>
               <a:defRPr sz="1650" b="1">
                 <a:solidFill>
                   <a:srgbClr val="43D19E"/>
@@ -12623,6 +12717,7 @@
               </a:defRPr>
             </a:lvl2pPr>
             <a:lvl3pPr>
+              <a:buNone/>
               <a:defRPr sz="1650" b="1">
                 <a:solidFill>
                   <a:srgbClr val="43D19E"/>
@@ -12633,6 +12728,7 @@
               </a:defRPr>
             </a:lvl3pPr>
             <a:lvl4pPr>
+              <a:buNone/>
               <a:defRPr sz="1650" b="1">
                 <a:solidFill>
                   <a:srgbClr val="43D19E"/>
@@ -12643,6 +12739,7 @@
               </a:defRPr>
             </a:lvl4pPr>
             <a:lvl5pPr>
+              <a:buNone/>
               <a:defRPr sz="1650" b="1">
                 <a:solidFill>
                   <a:srgbClr val="43D19E"/>
@@ -12653,6 +12750,7 @@
               </a:defRPr>
             </a:lvl5pPr>
             <a:lvl6pPr>
+              <a:buNone/>
               <a:defRPr sz="1650" b="1">
                 <a:solidFill>
                   <a:srgbClr val="43D19E"/>
@@ -12663,6 +12761,7 @@
               </a:defRPr>
             </a:lvl6pPr>
             <a:lvl7pPr>
+              <a:buNone/>
               <a:defRPr sz="1650" b="1">
                 <a:solidFill>
                   <a:srgbClr val="43D19E"/>
@@ -12673,6 +12772,7 @@
               </a:defRPr>
             </a:lvl7pPr>
             <a:lvl8pPr>
+              <a:buNone/>
               <a:defRPr sz="1650" b="1">
                 <a:solidFill>
                   <a:srgbClr val="43D19E"/>
@@ -12683,6 +12783,7 @@
               </a:defRPr>
             </a:lvl8pPr>
             <a:lvl9pPr>
+              <a:buNone/>
               <a:defRPr sz="1650" b="1">
                 <a:solidFill>
                   <a:srgbClr val="43D19E"/>
@@ -12695,6 +12796,7 @@
           </a:lstStyle>
           <a:p xmlns:a="http://schemas.openxmlformats.org/drawingml/2006/main">
             <a:pPr>
+              <a:buNone/>
               <a:defRPr sz="1650" b="1">
                 <a:solidFill>
                   <a:srgbClr val="43D19E"/>
@@ -12713,7 +12815,7 @@
                 <a:ea typeface="Noto Sans CJK KR"/>
                 <a:cs typeface="Noto Sans CJK KR"/>
               </a:rPr>
-              <a:t>이번에 확보한 것</a:t>
+              <a:t>구현과 검증 결과</a:t>
             </a:r>
           </a:p>
         </p:txBody>
@@ -12791,6 +12893,7 @@
               </a:defRPr>
             </a:defPPr>
             <a:lvl1pPr>
+              <a:buNone/>
               <a:defRPr sz="1275">
                 <a:solidFill>
                   <a:srgbClr val="F8FAFC"/>
@@ -12801,6 +12904,7 @@
               </a:defRPr>
             </a:lvl1pPr>
             <a:lvl2pPr>
+              <a:buNone/>
               <a:defRPr sz="1275">
                 <a:solidFill>
                   <a:srgbClr val="F8FAFC"/>
@@ -12811,6 +12915,7 @@
               </a:defRPr>
             </a:lvl2pPr>
             <a:lvl3pPr>
+              <a:buNone/>
               <a:defRPr sz="1275">
                 <a:solidFill>
                   <a:srgbClr val="F8FAFC"/>
@@ -12821,6 +12926,7 @@
               </a:defRPr>
             </a:lvl3pPr>
             <a:lvl4pPr>
+              <a:buNone/>
               <a:defRPr sz="1275">
                 <a:solidFill>
                   <a:srgbClr val="F8FAFC"/>
@@ -12831,6 +12937,7 @@
               </a:defRPr>
             </a:lvl4pPr>
             <a:lvl5pPr>
+              <a:buNone/>
               <a:defRPr sz="1275">
                 <a:solidFill>
                   <a:srgbClr val="F8FAFC"/>
@@ -12841,6 +12948,7 @@
               </a:defRPr>
             </a:lvl5pPr>
             <a:lvl6pPr>
+              <a:buNone/>
               <a:defRPr sz="1275">
                 <a:solidFill>
                   <a:srgbClr val="F8FAFC"/>
@@ -12851,6 +12959,7 @@
               </a:defRPr>
             </a:lvl6pPr>
             <a:lvl7pPr>
+              <a:buNone/>
               <a:defRPr sz="1275">
                 <a:solidFill>
                   <a:srgbClr val="F8FAFC"/>
@@ -12861,6 +12970,7 @@
               </a:defRPr>
             </a:lvl7pPr>
             <a:lvl8pPr>
+              <a:buNone/>
               <a:defRPr sz="1275">
                 <a:solidFill>
                   <a:srgbClr val="F8FAFC"/>
@@ -12871,6 +12981,7 @@
               </a:defRPr>
             </a:lvl8pPr>
             <a:lvl9pPr>
+              <a:buNone/>
               <a:defRPr sz="1275">
                 <a:solidFill>
                   <a:srgbClr val="F8FAFC"/>
@@ -12883,6 +12994,7 @@
           </a:lstStyle>
           <a:p xmlns:a="http://schemas.openxmlformats.org/drawingml/2006/main">
             <a:pPr>
+              <a:buNone/>
               <a:defRPr sz="1275">
                 <a:solidFill>
                   <a:srgbClr val="F8FAFC"/>
@@ -12979,6 +13091,7 @@
               </a:defRPr>
             </a:defPPr>
             <a:lvl1pPr>
+              <a:buNone/>
               <a:defRPr sz="1275">
                 <a:solidFill>
                   <a:srgbClr val="F8FAFC"/>
@@ -12989,6 +13102,7 @@
               </a:defRPr>
             </a:lvl1pPr>
             <a:lvl2pPr>
+              <a:buNone/>
               <a:defRPr sz="1275">
                 <a:solidFill>
                   <a:srgbClr val="F8FAFC"/>
@@ -12999,6 +13113,7 @@
               </a:defRPr>
             </a:lvl2pPr>
             <a:lvl3pPr>
+              <a:buNone/>
               <a:defRPr sz="1275">
                 <a:solidFill>
                   <a:srgbClr val="F8FAFC"/>
@@ -13009,6 +13124,7 @@
               </a:defRPr>
             </a:lvl3pPr>
             <a:lvl4pPr>
+              <a:buNone/>
               <a:defRPr sz="1275">
                 <a:solidFill>
                   <a:srgbClr val="F8FAFC"/>
@@ -13019,6 +13135,7 @@
               </a:defRPr>
             </a:lvl4pPr>
             <a:lvl5pPr>
+              <a:buNone/>
               <a:defRPr sz="1275">
                 <a:solidFill>
                   <a:srgbClr val="F8FAFC"/>
@@ -13029,6 +13146,7 @@
               </a:defRPr>
             </a:lvl5pPr>
             <a:lvl6pPr>
+              <a:buNone/>
               <a:defRPr sz="1275">
                 <a:solidFill>
                   <a:srgbClr val="F8FAFC"/>
@@ -13039,6 +13157,7 @@
               </a:defRPr>
             </a:lvl6pPr>
             <a:lvl7pPr>
+              <a:buNone/>
               <a:defRPr sz="1275">
                 <a:solidFill>
                   <a:srgbClr val="F8FAFC"/>
@@ -13049,6 +13168,7 @@
               </a:defRPr>
             </a:lvl7pPr>
             <a:lvl8pPr>
+              <a:buNone/>
               <a:defRPr sz="1275">
                 <a:solidFill>
                   <a:srgbClr val="F8FAFC"/>
@@ -13059,6 +13179,7 @@
               </a:defRPr>
             </a:lvl8pPr>
             <a:lvl9pPr>
+              <a:buNone/>
               <a:defRPr sz="1275">
                 <a:solidFill>
                   <a:srgbClr val="F8FAFC"/>
@@ -13071,6 +13192,7 @@
           </a:lstStyle>
           <a:p xmlns:a="http://schemas.openxmlformats.org/drawingml/2006/main">
             <a:pPr>
+              <a:buNone/>
               <a:defRPr sz="1275">
                 <a:solidFill>
                   <a:srgbClr val="F8FAFC"/>
@@ -13167,6 +13289,7 @@
               </a:defRPr>
             </a:defPPr>
             <a:lvl1pPr>
+              <a:buNone/>
               <a:defRPr sz="1275">
                 <a:solidFill>
                   <a:srgbClr val="F8FAFC"/>
@@ -13177,6 +13300,7 @@
               </a:defRPr>
             </a:lvl1pPr>
             <a:lvl2pPr>
+              <a:buNone/>
               <a:defRPr sz="1275">
                 <a:solidFill>
                   <a:srgbClr val="F8FAFC"/>
@@ -13187,6 +13311,7 @@
               </a:defRPr>
             </a:lvl2pPr>
             <a:lvl3pPr>
+              <a:buNone/>
               <a:defRPr sz="1275">
                 <a:solidFill>
                   <a:srgbClr val="F8FAFC"/>
@@ -13197,6 +13322,7 @@
               </a:defRPr>
             </a:lvl3pPr>
             <a:lvl4pPr>
+              <a:buNone/>
               <a:defRPr sz="1275">
                 <a:solidFill>
                   <a:srgbClr val="F8FAFC"/>
@@ -13207,6 +13333,7 @@
               </a:defRPr>
             </a:lvl4pPr>
             <a:lvl5pPr>
+              <a:buNone/>
               <a:defRPr sz="1275">
                 <a:solidFill>
                   <a:srgbClr val="F8FAFC"/>
@@ -13217,6 +13344,7 @@
               </a:defRPr>
             </a:lvl5pPr>
             <a:lvl6pPr>
+              <a:buNone/>
               <a:defRPr sz="1275">
                 <a:solidFill>
                   <a:srgbClr val="F8FAFC"/>
@@ -13227,6 +13355,7 @@
               </a:defRPr>
             </a:lvl6pPr>
             <a:lvl7pPr>
+              <a:buNone/>
               <a:defRPr sz="1275">
                 <a:solidFill>
                   <a:srgbClr val="F8FAFC"/>
@@ -13237,6 +13366,7 @@
               </a:defRPr>
             </a:lvl7pPr>
             <a:lvl8pPr>
+              <a:buNone/>
               <a:defRPr sz="1275">
                 <a:solidFill>
                   <a:srgbClr val="F8FAFC"/>
@@ -13247,6 +13377,7 @@
               </a:defRPr>
             </a:lvl8pPr>
             <a:lvl9pPr>
+              <a:buNone/>
               <a:defRPr sz="1275">
                 <a:solidFill>
                   <a:srgbClr val="F8FAFC"/>
@@ -13259,6 +13390,7 @@
           </a:lstStyle>
           <a:p xmlns:a="http://schemas.openxmlformats.org/drawingml/2006/main">
             <a:pPr>
+              <a:buNone/>
               <a:defRPr sz="1275">
                 <a:solidFill>
                   <a:srgbClr val="F8FAFC"/>
@@ -13355,6 +13487,7 @@
               </a:defRPr>
             </a:defPPr>
             <a:lvl1pPr>
+              <a:buNone/>
               <a:defRPr sz="1275">
                 <a:solidFill>
                   <a:srgbClr val="F8FAFC"/>
@@ -13365,6 +13498,7 @@
               </a:defRPr>
             </a:lvl1pPr>
             <a:lvl2pPr>
+              <a:buNone/>
               <a:defRPr sz="1275">
                 <a:solidFill>
                   <a:srgbClr val="F8FAFC"/>
@@ -13375,6 +13509,7 @@
               </a:defRPr>
             </a:lvl2pPr>
             <a:lvl3pPr>
+              <a:buNone/>
               <a:defRPr sz="1275">
                 <a:solidFill>
                   <a:srgbClr val="F8FAFC"/>
@@ -13385,6 +13520,7 @@
               </a:defRPr>
             </a:lvl3pPr>
             <a:lvl4pPr>
+              <a:buNone/>
               <a:defRPr sz="1275">
                 <a:solidFill>
                   <a:srgbClr val="F8FAFC"/>
@@ -13395,6 +13531,7 @@
               </a:defRPr>
             </a:lvl4pPr>
             <a:lvl5pPr>
+              <a:buNone/>
               <a:defRPr sz="1275">
                 <a:solidFill>
                   <a:srgbClr val="F8FAFC"/>
@@ -13405,6 +13542,7 @@
               </a:defRPr>
             </a:lvl5pPr>
             <a:lvl6pPr>
+              <a:buNone/>
               <a:defRPr sz="1275">
                 <a:solidFill>
                   <a:srgbClr val="F8FAFC"/>
@@ -13415,6 +13553,7 @@
               </a:defRPr>
             </a:lvl6pPr>
             <a:lvl7pPr>
+              <a:buNone/>
               <a:defRPr sz="1275">
                 <a:solidFill>
                   <a:srgbClr val="F8FAFC"/>
@@ -13425,6 +13564,7 @@
               </a:defRPr>
             </a:lvl7pPr>
             <a:lvl8pPr>
+              <a:buNone/>
               <a:defRPr sz="1275">
                 <a:solidFill>
                   <a:srgbClr val="F8FAFC"/>
@@ -13435,6 +13575,7 @@
               </a:defRPr>
             </a:lvl8pPr>
             <a:lvl9pPr>
+              <a:buNone/>
               <a:defRPr sz="1275">
                 <a:solidFill>
                   <a:srgbClr val="F8FAFC"/>
@@ -13447,6 +13588,7 @@
           </a:lstStyle>
           <a:p xmlns:a="http://schemas.openxmlformats.org/drawingml/2006/main">
             <a:pPr>
+              <a:buNone/>
               <a:defRPr sz="1275">
                 <a:solidFill>
                   <a:srgbClr val="F8FAFC"/>
@@ -13543,6 +13685,7 @@
               </a:defRPr>
             </a:defPPr>
             <a:lvl1pPr>
+              <a:buNone/>
               <a:defRPr sz="1275">
                 <a:solidFill>
                   <a:srgbClr val="F8FAFC"/>
@@ -13553,6 +13696,7 @@
               </a:defRPr>
             </a:lvl1pPr>
             <a:lvl2pPr>
+              <a:buNone/>
               <a:defRPr sz="1275">
                 <a:solidFill>
                   <a:srgbClr val="F8FAFC"/>
@@ -13563,6 +13707,7 @@
               </a:defRPr>
             </a:lvl2pPr>
             <a:lvl3pPr>
+              <a:buNone/>
               <a:defRPr sz="1275">
                 <a:solidFill>
                   <a:srgbClr val="F8FAFC"/>
@@ -13573,6 +13718,7 @@
               </a:defRPr>
             </a:lvl3pPr>
             <a:lvl4pPr>
+              <a:buNone/>
               <a:defRPr sz="1275">
                 <a:solidFill>
                   <a:srgbClr val="F8FAFC"/>
@@ -13583,6 +13729,7 @@
               </a:defRPr>
             </a:lvl4pPr>
             <a:lvl5pPr>
+              <a:buNone/>
               <a:defRPr sz="1275">
                 <a:solidFill>
                   <a:srgbClr val="F8FAFC"/>
@@ -13593,6 +13740,7 @@
               </a:defRPr>
             </a:lvl5pPr>
             <a:lvl6pPr>
+              <a:buNone/>
               <a:defRPr sz="1275">
                 <a:solidFill>
                   <a:srgbClr val="F8FAFC"/>
@@ -13603,6 +13751,7 @@
               </a:defRPr>
             </a:lvl6pPr>
             <a:lvl7pPr>
+              <a:buNone/>
               <a:defRPr sz="1275">
                 <a:solidFill>
                   <a:srgbClr val="F8FAFC"/>
@@ -13613,6 +13762,7 @@
               </a:defRPr>
             </a:lvl7pPr>
             <a:lvl8pPr>
+              <a:buNone/>
               <a:defRPr sz="1275">
                 <a:solidFill>
                   <a:srgbClr val="F8FAFC"/>
@@ -13623,6 +13773,7 @@
               </a:defRPr>
             </a:lvl8pPr>
             <a:lvl9pPr>
+              <a:buNone/>
               <a:defRPr sz="1275">
                 <a:solidFill>
                   <a:srgbClr val="F8FAFC"/>
@@ -13635,6 +13786,7 @@
           </a:lstStyle>
           <a:p xmlns:a="http://schemas.openxmlformats.org/drawingml/2006/main">
             <a:pPr>
+              <a:buNone/>
               <a:defRPr sz="1275">
                 <a:solidFill>
                   <a:srgbClr val="F8FAFC"/>
@@ -13700,6 +13852,7 @@
               </a:defRPr>
             </a:defPPr>
             <a:lvl1pPr>
+              <a:buNone/>
               <a:defRPr sz="1650" b="1">
                 <a:solidFill>
                   <a:srgbClr val="9B87F5"/>
@@ -13710,6 +13863,7 @@
               </a:defRPr>
             </a:lvl1pPr>
             <a:lvl2pPr>
+              <a:buNone/>
               <a:defRPr sz="1650" b="1">
                 <a:solidFill>
                   <a:srgbClr val="9B87F5"/>
@@ -13720,6 +13874,7 @@
               </a:defRPr>
             </a:lvl2pPr>
             <a:lvl3pPr>
+              <a:buNone/>
               <a:defRPr sz="1650" b="1">
                 <a:solidFill>
                   <a:srgbClr val="9B87F5"/>
@@ -13730,6 +13885,7 @@
               </a:defRPr>
             </a:lvl3pPr>
             <a:lvl4pPr>
+              <a:buNone/>
               <a:defRPr sz="1650" b="1">
                 <a:solidFill>
                   <a:srgbClr val="9B87F5"/>
@@ -13740,6 +13896,7 @@
               </a:defRPr>
             </a:lvl4pPr>
             <a:lvl5pPr>
+              <a:buNone/>
               <a:defRPr sz="1650" b="1">
                 <a:solidFill>
                   <a:srgbClr val="9B87F5"/>
@@ -13750,6 +13907,7 @@
               </a:defRPr>
             </a:lvl5pPr>
             <a:lvl6pPr>
+              <a:buNone/>
               <a:defRPr sz="1650" b="1">
                 <a:solidFill>
                   <a:srgbClr val="9B87F5"/>
@@ -13760,6 +13918,7 @@
               </a:defRPr>
             </a:lvl6pPr>
             <a:lvl7pPr>
+              <a:buNone/>
               <a:defRPr sz="1650" b="1">
                 <a:solidFill>
                   <a:srgbClr val="9B87F5"/>
@@ -13770,6 +13929,7 @@
               </a:defRPr>
             </a:lvl7pPr>
             <a:lvl8pPr>
+              <a:buNone/>
               <a:defRPr sz="1650" b="1">
                 <a:solidFill>
                   <a:srgbClr val="9B87F5"/>
@@ -13780,6 +13940,7 @@
               </a:defRPr>
             </a:lvl8pPr>
             <a:lvl9pPr>
+              <a:buNone/>
               <a:defRPr sz="1650" b="1">
                 <a:solidFill>
                   <a:srgbClr val="9B87F5"/>
@@ -13792,6 +13953,7 @@
           </a:lstStyle>
           <a:p xmlns:a="http://schemas.openxmlformats.org/drawingml/2006/main">
             <a:pPr>
+              <a:buNone/>
               <a:defRPr sz="1650" b="1">
                 <a:solidFill>
                   <a:srgbClr val="9B87F5"/>
@@ -13892,6 +14054,7 @@
               </a:defRPr>
             </a:defPPr>
             <a:lvl1pPr>
+              <a:buNone/>
               <a:defRPr sz="1125" b="1">
                 <a:solidFill>
                   <a:srgbClr val="A8B3C7"/>
@@ -13902,6 +14065,7 @@
               </a:defRPr>
             </a:lvl1pPr>
             <a:lvl2pPr>
+              <a:buNone/>
               <a:defRPr sz="1125" b="1">
                 <a:solidFill>
                   <a:srgbClr val="A8B3C7"/>
@@ -13912,6 +14076,7 @@
               </a:defRPr>
             </a:lvl2pPr>
             <a:lvl3pPr>
+              <a:buNone/>
               <a:defRPr sz="1125" b="1">
                 <a:solidFill>
                   <a:srgbClr val="A8B3C7"/>
@@ -13922,6 +14087,7 @@
               </a:defRPr>
             </a:lvl3pPr>
             <a:lvl4pPr>
+              <a:buNone/>
               <a:defRPr sz="1125" b="1">
                 <a:solidFill>
                   <a:srgbClr val="A8B3C7"/>
@@ -13932,6 +14098,7 @@
               </a:defRPr>
             </a:lvl4pPr>
             <a:lvl5pPr>
+              <a:buNone/>
               <a:defRPr sz="1125" b="1">
                 <a:solidFill>
                   <a:srgbClr val="A8B3C7"/>
@@ -13942,6 +14109,7 @@
               </a:defRPr>
             </a:lvl5pPr>
             <a:lvl6pPr>
+              <a:buNone/>
               <a:defRPr sz="1125" b="1">
                 <a:solidFill>
                   <a:srgbClr val="A8B3C7"/>
@@ -13952,6 +14120,7 @@
               </a:defRPr>
             </a:lvl6pPr>
             <a:lvl7pPr>
+              <a:buNone/>
               <a:defRPr sz="1125" b="1">
                 <a:solidFill>
                   <a:srgbClr val="A8B3C7"/>
@@ -13962,6 +14131,7 @@
               </a:defRPr>
             </a:lvl7pPr>
             <a:lvl8pPr>
+              <a:buNone/>
               <a:defRPr sz="1125" b="1">
                 <a:solidFill>
                   <a:srgbClr val="A8B3C7"/>
@@ -13972,6 +14142,7 @@
               </a:defRPr>
             </a:lvl8pPr>
             <a:lvl9pPr>
+              <a:buNone/>
               <a:defRPr sz="1125" b="1">
                 <a:solidFill>
                   <a:srgbClr val="A8B3C7"/>
@@ -13984,6 +14155,7 @@
           </a:lstStyle>
           <a:p xmlns:a="http://schemas.openxmlformats.org/drawingml/2006/main">
             <a:pPr>
+              <a:buNone/>
               <a:defRPr sz="1125" b="1">
                 <a:solidFill>
                   <a:srgbClr val="A8B3C7"/>
@@ -14049,6 +14221,7 @@
               </a:defRPr>
             </a:defPPr>
             <a:lvl1pPr>
+              <a:buNone/>
               <a:defRPr sz="1125" b="1">
                 <a:solidFill>
                   <a:srgbClr val="A8B3C7"/>
@@ -14059,6 +14232,7 @@
               </a:defRPr>
             </a:lvl1pPr>
             <a:lvl2pPr>
+              <a:buNone/>
               <a:defRPr sz="1125" b="1">
                 <a:solidFill>
                   <a:srgbClr val="A8B3C7"/>
@@ -14069,6 +14243,7 @@
               </a:defRPr>
             </a:lvl2pPr>
             <a:lvl3pPr>
+              <a:buNone/>
               <a:defRPr sz="1125" b="1">
                 <a:solidFill>
                   <a:srgbClr val="A8B3C7"/>
@@ -14079,6 +14254,7 @@
               </a:defRPr>
             </a:lvl3pPr>
             <a:lvl4pPr>
+              <a:buNone/>
               <a:defRPr sz="1125" b="1">
                 <a:solidFill>
                   <a:srgbClr val="A8B3C7"/>
@@ -14089,6 +14265,7 @@
               </a:defRPr>
             </a:lvl4pPr>
             <a:lvl5pPr>
+              <a:buNone/>
               <a:defRPr sz="1125" b="1">
                 <a:solidFill>
                   <a:srgbClr val="A8B3C7"/>
@@ -14099,6 +14276,7 @@
               </a:defRPr>
             </a:lvl5pPr>
             <a:lvl6pPr>
+              <a:buNone/>
               <a:defRPr sz="1125" b="1">
                 <a:solidFill>
                   <a:srgbClr val="A8B3C7"/>
@@ -14109,6 +14287,7 @@
               </a:defRPr>
             </a:lvl6pPr>
             <a:lvl7pPr>
+              <a:buNone/>
               <a:defRPr sz="1125" b="1">
                 <a:solidFill>
                   <a:srgbClr val="A8B3C7"/>
@@ -14119,6 +14298,7 @@
               </a:defRPr>
             </a:lvl7pPr>
             <a:lvl8pPr>
+              <a:buNone/>
               <a:defRPr sz="1125" b="1">
                 <a:solidFill>
                   <a:srgbClr val="A8B3C7"/>
@@ -14129,6 +14309,7 @@
               </a:defRPr>
             </a:lvl8pPr>
             <a:lvl9pPr>
+              <a:buNone/>
               <a:defRPr sz="1125" b="1">
                 <a:solidFill>
                   <a:srgbClr val="A8B3C7"/>
@@ -14141,6 +14322,7 @@
           </a:lstStyle>
           <a:p xmlns:a="http://schemas.openxmlformats.org/drawingml/2006/main">
             <a:pPr>
+              <a:buNone/>
               <a:defRPr sz="1125" b="1">
                 <a:solidFill>
                   <a:srgbClr val="A8B3C7"/>
@@ -14237,6 +14419,7 @@
               </a:defRPr>
             </a:defPPr>
             <a:lvl1pPr>
+              <a:buNone/>
               <a:defRPr sz="1275" b="1">
                 <a:solidFill>
                   <a:srgbClr val="F8FAFC"/>
@@ -14247,6 +14430,7 @@
               </a:defRPr>
             </a:lvl1pPr>
             <a:lvl2pPr>
+              <a:buNone/>
               <a:defRPr sz="1275" b="1">
                 <a:solidFill>
                   <a:srgbClr val="F8FAFC"/>
@@ -14257,6 +14441,7 @@
               </a:defRPr>
             </a:lvl2pPr>
             <a:lvl3pPr>
+              <a:buNone/>
               <a:defRPr sz="1275" b="1">
                 <a:solidFill>
                   <a:srgbClr val="F8FAFC"/>
@@ -14267,6 +14452,7 @@
               </a:defRPr>
             </a:lvl3pPr>
             <a:lvl4pPr>
+              <a:buNone/>
               <a:defRPr sz="1275" b="1">
                 <a:solidFill>
                   <a:srgbClr val="F8FAFC"/>
@@ -14277,6 +14463,7 @@
               </a:defRPr>
             </a:lvl4pPr>
             <a:lvl5pPr>
+              <a:buNone/>
               <a:defRPr sz="1275" b="1">
                 <a:solidFill>
                   <a:srgbClr val="F8FAFC"/>
@@ -14287,6 +14474,7 @@
               </a:defRPr>
             </a:lvl5pPr>
             <a:lvl6pPr>
+              <a:buNone/>
               <a:defRPr sz="1275" b="1">
                 <a:solidFill>
                   <a:srgbClr val="F8FAFC"/>
@@ -14297,6 +14485,7 @@
               </a:defRPr>
             </a:lvl6pPr>
             <a:lvl7pPr>
+              <a:buNone/>
               <a:defRPr sz="1275" b="1">
                 <a:solidFill>
                   <a:srgbClr val="F8FAFC"/>
@@ -14307,6 +14496,7 @@
               </a:defRPr>
             </a:lvl7pPr>
             <a:lvl8pPr>
+              <a:buNone/>
               <a:defRPr sz="1275" b="1">
                 <a:solidFill>
                   <a:srgbClr val="F8FAFC"/>
@@ -14317,6 +14507,7 @@
               </a:defRPr>
             </a:lvl8pPr>
             <a:lvl9pPr>
+              <a:buNone/>
               <a:defRPr sz="1275" b="1">
                 <a:solidFill>
                   <a:srgbClr val="F8FAFC"/>
@@ -14329,6 +14520,7 @@
           </a:lstStyle>
           <a:p xmlns:a="http://schemas.openxmlformats.org/drawingml/2006/main">
             <a:pPr>
+              <a:buNone/>
               <a:defRPr sz="1275" b="1">
                 <a:solidFill>
                   <a:srgbClr val="F8FAFC"/>
@@ -14394,6 +14586,7 @@
               </a:defRPr>
             </a:defPPr>
             <a:lvl1pPr>
+              <a:buNone/>
               <a:defRPr sz="1275">
                 <a:solidFill>
                   <a:srgbClr val="F8FAFC"/>
@@ -14404,6 +14597,7 @@
               </a:defRPr>
             </a:lvl1pPr>
             <a:lvl2pPr>
+              <a:buNone/>
               <a:defRPr sz="1275">
                 <a:solidFill>
                   <a:srgbClr val="F8FAFC"/>
@@ -14414,6 +14608,7 @@
               </a:defRPr>
             </a:lvl2pPr>
             <a:lvl3pPr>
+              <a:buNone/>
               <a:defRPr sz="1275">
                 <a:solidFill>
                   <a:srgbClr val="F8FAFC"/>
@@ -14424,6 +14619,7 @@
               </a:defRPr>
             </a:lvl3pPr>
             <a:lvl4pPr>
+              <a:buNone/>
               <a:defRPr sz="1275">
                 <a:solidFill>
                   <a:srgbClr val="F8FAFC"/>
@@ -14434,6 +14630,7 @@
               </a:defRPr>
             </a:lvl4pPr>
             <a:lvl5pPr>
+              <a:buNone/>
               <a:defRPr sz="1275">
                 <a:solidFill>
                   <a:srgbClr val="F8FAFC"/>
@@ -14444,6 +14641,7 @@
               </a:defRPr>
             </a:lvl5pPr>
             <a:lvl6pPr>
+              <a:buNone/>
               <a:defRPr sz="1275">
                 <a:solidFill>
                   <a:srgbClr val="F8FAFC"/>
@@ -14454,6 +14652,7 @@
               </a:defRPr>
             </a:lvl6pPr>
             <a:lvl7pPr>
+              <a:buNone/>
               <a:defRPr sz="1275">
                 <a:solidFill>
                   <a:srgbClr val="F8FAFC"/>
@@ -14464,6 +14663,7 @@
               </a:defRPr>
             </a:lvl7pPr>
             <a:lvl8pPr>
+              <a:buNone/>
               <a:defRPr sz="1275">
                 <a:solidFill>
                   <a:srgbClr val="F8FAFC"/>
@@ -14474,6 +14674,7 @@
               </a:defRPr>
             </a:lvl8pPr>
             <a:lvl9pPr>
+              <a:buNone/>
               <a:defRPr sz="1275">
                 <a:solidFill>
                   <a:srgbClr val="F8FAFC"/>
@@ -14486,6 +14687,7 @@
           </a:lstStyle>
           <a:p xmlns:a="http://schemas.openxmlformats.org/drawingml/2006/main">
             <a:pPr>
+              <a:buNone/>
               <a:defRPr sz="1275">
                 <a:solidFill>
                   <a:srgbClr val="F8FAFC"/>
@@ -14582,6 +14784,7 @@
               </a:defRPr>
             </a:defPPr>
             <a:lvl1pPr>
+              <a:buNone/>
               <a:defRPr sz="1275" b="1">
                 <a:solidFill>
                   <a:srgbClr val="F8FAFC"/>
@@ -14592,6 +14795,7 @@
               </a:defRPr>
             </a:lvl1pPr>
             <a:lvl2pPr>
+              <a:buNone/>
               <a:defRPr sz="1275" b="1">
                 <a:solidFill>
                   <a:srgbClr val="F8FAFC"/>
@@ -14602,6 +14806,7 @@
               </a:defRPr>
             </a:lvl2pPr>
             <a:lvl3pPr>
+              <a:buNone/>
               <a:defRPr sz="1275" b="1">
                 <a:solidFill>
                   <a:srgbClr val="F8FAFC"/>
@@ -14612,6 +14817,7 @@
               </a:defRPr>
             </a:lvl3pPr>
             <a:lvl4pPr>
+              <a:buNone/>
               <a:defRPr sz="1275" b="1">
                 <a:solidFill>
                   <a:srgbClr val="F8FAFC"/>
@@ -14622,6 +14828,7 @@
               </a:defRPr>
             </a:lvl4pPr>
             <a:lvl5pPr>
+              <a:buNone/>
               <a:defRPr sz="1275" b="1">
                 <a:solidFill>
                   <a:srgbClr val="F8FAFC"/>
@@ -14632,6 +14839,7 @@
               </a:defRPr>
             </a:lvl5pPr>
             <a:lvl6pPr>
+              <a:buNone/>
               <a:defRPr sz="1275" b="1">
                 <a:solidFill>
                   <a:srgbClr val="F8FAFC"/>
@@ -14642,6 +14850,7 @@
               </a:defRPr>
             </a:lvl6pPr>
             <a:lvl7pPr>
+              <a:buNone/>
               <a:defRPr sz="1275" b="1">
                 <a:solidFill>
                   <a:srgbClr val="F8FAFC"/>
@@ -14652,6 +14861,7 @@
               </a:defRPr>
             </a:lvl7pPr>
             <a:lvl8pPr>
+              <a:buNone/>
               <a:defRPr sz="1275" b="1">
                 <a:solidFill>
                   <a:srgbClr val="F8FAFC"/>
@@ -14662,6 +14872,7 @@
               </a:defRPr>
             </a:lvl8pPr>
             <a:lvl9pPr>
+              <a:buNone/>
               <a:defRPr sz="1275" b="1">
                 <a:solidFill>
                   <a:srgbClr val="F8FAFC"/>
@@ -14674,6 +14885,7 @@
           </a:lstStyle>
           <a:p xmlns:a="http://schemas.openxmlformats.org/drawingml/2006/main">
             <a:pPr>
+              <a:buNone/>
               <a:defRPr sz="1275" b="1">
                 <a:solidFill>
                   <a:srgbClr val="F8FAFC"/>
@@ -14739,6 +14951,7 @@
               </a:defRPr>
             </a:defPPr>
             <a:lvl1pPr>
+              <a:buNone/>
               <a:defRPr sz="1275">
                 <a:solidFill>
                   <a:srgbClr val="F8FAFC"/>
@@ -14749,6 +14962,7 @@
               </a:defRPr>
             </a:lvl1pPr>
             <a:lvl2pPr>
+              <a:buNone/>
               <a:defRPr sz="1275">
                 <a:solidFill>
                   <a:srgbClr val="F8FAFC"/>
@@ -14759,6 +14973,7 @@
               </a:defRPr>
             </a:lvl2pPr>
             <a:lvl3pPr>
+              <a:buNone/>
               <a:defRPr sz="1275">
                 <a:solidFill>
                   <a:srgbClr val="F8FAFC"/>
@@ -14769,6 +14984,7 @@
               </a:defRPr>
             </a:lvl3pPr>
             <a:lvl4pPr>
+              <a:buNone/>
               <a:defRPr sz="1275">
                 <a:solidFill>
                   <a:srgbClr val="F8FAFC"/>
@@ -14779,6 +14995,7 @@
               </a:defRPr>
             </a:lvl4pPr>
             <a:lvl5pPr>
+              <a:buNone/>
               <a:defRPr sz="1275">
                 <a:solidFill>
                   <a:srgbClr val="F8FAFC"/>
@@ -14789,6 +15006,7 @@
               </a:defRPr>
             </a:lvl5pPr>
             <a:lvl6pPr>
+              <a:buNone/>
               <a:defRPr sz="1275">
                 <a:solidFill>
                   <a:srgbClr val="F8FAFC"/>
@@ -14799,6 +15017,7 @@
               </a:defRPr>
             </a:lvl6pPr>
             <a:lvl7pPr>
+              <a:buNone/>
               <a:defRPr sz="1275">
                 <a:solidFill>
                   <a:srgbClr val="F8FAFC"/>
@@ -14809,6 +15028,7 @@
               </a:defRPr>
             </a:lvl7pPr>
             <a:lvl8pPr>
+              <a:buNone/>
               <a:defRPr sz="1275">
                 <a:solidFill>
                   <a:srgbClr val="F8FAFC"/>
@@ -14819,6 +15039,7 @@
               </a:defRPr>
             </a:lvl8pPr>
             <a:lvl9pPr>
+              <a:buNone/>
               <a:defRPr sz="1275">
                 <a:solidFill>
                   <a:srgbClr val="F8FAFC"/>
@@ -14831,6 +15052,7 @@
           </a:lstStyle>
           <a:p xmlns:a="http://schemas.openxmlformats.org/drawingml/2006/main">
             <a:pPr>
+              <a:buNone/>
               <a:defRPr sz="1275">
                 <a:solidFill>
                   <a:srgbClr val="F8FAFC"/>
@@ -14927,6 +15149,7 @@
               </a:defRPr>
             </a:defPPr>
             <a:lvl1pPr>
+              <a:buNone/>
               <a:defRPr sz="1275" b="1">
                 <a:solidFill>
                   <a:srgbClr val="F8FAFC"/>
@@ -14937,6 +15160,7 @@
               </a:defRPr>
             </a:lvl1pPr>
             <a:lvl2pPr>
+              <a:buNone/>
               <a:defRPr sz="1275" b="1">
                 <a:solidFill>
                   <a:srgbClr val="F8FAFC"/>
@@ -14947,6 +15171,7 @@
               </a:defRPr>
             </a:lvl2pPr>
             <a:lvl3pPr>
+              <a:buNone/>
               <a:defRPr sz="1275" b="1">
                 <a:solidFill>
                   <a:srgbClr val="F8FAFC"/>
@@ -14957,6 +15182,7 @@
               </a:defRPr>
             </a:lvl3pPr>
             <a:lvl4pPr>
+              <a:buNone/>
               <a:defRPr sz="1275" b="1">
                 <a:solidFill>
                   <a:srgbClr val="F8FAFC"/>
@@ -14967,6 +15193,7 @@
               </a:defRPr>
             </a:lvl4pPr>
             <a:lvl5pPr>
+              <a:buNone/>
               <a:defRPr sz="1275" b="1">
                 <a:solidFill>
                   <a:srgbClr val="F8FAFC"/>
@@ -14977,6 +15204,7 @@
               </a:defRPr>
             </a:lvl5pPr>
             <a:lvl6pPr>
+              <a:buNone/>
               <a:defRPr sz="1275" b="1">
                 <a:solidFill>
                   <a:srgbClr val="F8FAFC"/>
@@ -14987,6 +15215,7 @@
               </a:defRPr>
             </a:lvl6pPr>
             <a:lvl7pPr>
+              <a:buNone/>
               <a:defRPr sz="1275" b="1">
                 <a:solidFill>
                   <a:srgbClr val="F8FAFC"/>
@@ -14997,6 +15226,7 @@
               </a:defRPr>
             </a:lvl7pPr>
             <a:lvl8pPr>
+              <a:buNone/>
               <a:defRPr sz="1275" b="1">
                 <a:solidFill>
                   <a:srgbClr val="F8FAFC"/>
@@ -15007,6 +15237,7 @@
               </a:defRPr>
             </a:lvl8pPr>
             <a:lvl9pPr>
+              <a:buNone/>
               <a:defRPr sz="1275" b="1">
                 <a:solidFill>
                   <a:srgbClr val="F8FAFC"/>
@@ -15019,6 +15250,7 @@
           </a:lstStyle>
           <a:p xmlns:a="http://schemas.openxmlformats.org/drawingml/2006/main">
             <a:pPr>
+              <a:buNone/>
               <a:defRPr sz="1275" b="1">
                 <a:solidFill>
                   <a:srgbClr val="F8FAFC"/>
@@ -15084,6 +15316,7 @@
               </a:defRPr>
             </a:defPPr>
             <a:lvl1pPr>
+              <a:buNone/>
               <a:defRPr sz="1275">
                 <a:solidFill>
                   <a:srgbClr val="F8FAFC"/>
@@ -15094,6 +15327,7 @@
               </a:defRPr>
             </a:lvl1pPr>
             <a:lvl2pPr>
+              <a:buNone/>
               <a:defRPr sz="1275">
                 <a:solidFill>
                   <a:srgbClr val="F8FAFC"/>
@@ -15104,6 +15338,7 @@
               </a:defRPr>
             </a:lvl2pPr>
             <a:lvl3pPr>
+              <a:buNone/>
               <a:defRPr sz="1275">
                 <a:solidFill>
                   <a:srgbClr val="F8FAFC"/>
@@ -15114,6 +15349,7 @@
               </a:defRPr>
             </a:lvl3pPr>
             <a:lvl4pPr>
+              <a:buNone/>
               <a:defRPr sz="1275">
                 <a:solidFill>
                   <a:srgbClr val="F8FAFC"/>
@@ -15124,6 +15360,7 @@
               </a:defRPr>
             </a:lvl4pPr>
             <a:lvl5pPr>
+              <a:buNone/>
               <a:defRPr sz="1275">
                 <a:solidFill>
                   <a:srgbClr val="F8FAFC"/>
@@ -15134,6 +15371,7 @@
               </a:defRPr>
             </a:lvl5pPr>
             <a:lvl6pPr>
+              <a:buNone/>
               <a:defRPr sz="1275">
                 <a:solidFill>
                   <a:srgbClr val="F8FAFC"/>
@@ -15144,6 +15382,7 @@
               </a:defRPr>
             </a:lvl6pPr>
             <a:lvl7pPr>
+              <a:buNone/>
               <a:defRPr sz="1275">
                 <a:solidFill>
                   <a:srgbClr val="F8FAFC"/>
@@ -15154,6 +15393,7 @@
               </a:defRPr>
             </a:lvl7pPr>
             <a:lvl8pPr>
+              <a:buNone/>
               <a:defRPr sz="1275">
                 <a:solidFill>
                   <a:srgbClr val="F8FAFC"/>
@@ -15164,6 +15404,7 @@
               </a:defRPr>
             </a:lvl8pPr>
             <a:lvl9pPr>
+              <a:buNone/>
               <a:defRPr sz="1275">
                 <a:solidFill>
                   <a:srgbClr val="F8FAFC"/>
@@ -15176,6 +15417,7 @@
           </a:lstStyle>
           <a:p xmlns:a="http://schemas.openxmlformats.org/drawingml/2006/main">
             <a:pPr>
+              <a:buNone/>
               <a:defRPr sz="1275">
                 <a:solidFill>
                   <a:srgbClr val="F8FAFC"/>
@@ -15241,6 +15483,7 @@
               </a:defRPr>
             </a:defPPr>
             <a:lvl1pPr>
+              <a:buNone/>
               <a:defRPr sz="1350" b="1">
                 <a:solidFill>
                   <a:srgbClr val="F8FAFC"/>
@@ -15251,6 +15494,7 @@
               </a:defRPr>
             </a:lvl1pPr>
             <a:lvl2pPr>
+              <a:buNone/>
               <a:defRPr sz="1350" b="1">
                 <a:solidFill>
                   <a:srgbClr val="F8FAFC"/>
@@ -15261,6 +15505,7 @@
               </a:defRPr>
             </a:lvl2pPr>
             <a:lvl3pPr>
+              <a:buNone/>
               <a:defRPr sz="1350" b="1">
                 <a:solidFill>
                   <a:srgbClr val="F8FAFC"/>
@@ -15271,6 +15516,7 @@
               </a:defRPr>
             </a:lvl3pPr>
             <a:lvl4pPr>
+              <a:buNone/>
               <a:defRPr sz="1350" b="1">
                 <a:solidFill>
                   <a:srgbClr val="F8FAFC"/>
@@ -15281,6 +15527,7 @@
               </a:defRPr>
             </a:lvl4pPr>
             <a:lvl5pPr>
+              <a:buNone/>
               <a:defRPr sz="1350" b="1">
                 <a:solidFill>
                   <a:srgbClr val="F8FAFC"/>
@@ -15291,6 +15538,7 @@
               </a:defRPr>
             </a:lvl5pPr>
             <a:lvl6pPr>
+              <a:buNone/>
               <a:defRPr sz="1350" b="1">
                 <a:solidFill>
                   <a:srgbClr val="F8FAFC"/>
@@ -15301,6 +15549,7 @@
               </a:defRPr>
             </a:lvl6pPr>
             <a:lvl7pPr>
+              <a:buNone/>
               <a:defRPr sz="1350" b="1">
                 <a:solidFill>
                   <a:srgbClr val="F8FAFC"/>
@@ -15311,6 +15560,7 @@
               </a:defRPr>
             </a:lvl7pPr>
             <a:lvl8pPr>
+              <a:buNone/>
               <a:defRPr sz="1350" b="1">
                 <a:solidFill>
                   <a:srgbClr val="F8FAFC"/>
@@ -15321,6 +15571,7 @@
               </a:defRPr>
             </a:lvl8pPr>
             <a:lvl9pPr>
+              <a:buNone/>
               <a:defRPr sz="1350" b="1">
                 <a:solidFill>
                   <a:srgbClr val="F8FAFC"/>
@@ -15333,6 +15584,7 @@
           </a:lstStyle>
           <a:p xmlns:a="http://schemas.openxmlformats.org/drawingml/2006/main">
             <a:pPr>
+              <a:buNone/>
               <a:defRPr sz="1350" b="1">
                 <a:solidFill>
                   <a:srgbClr val="F8FAFC"/>
@@ -15356,6 +15608,7 @@
           </a:p>
           <a:p xmlns:a="http://schemas.openxmlformats.org/drawingml/2006/main">
             <a:pPr>
+              <a:buNone/>
               <a:defRPr sz="1350" b="1">
                 <a:solidFill>
                   <a:srgbClr val="F8FAFC"/>
@@ -15421,6 +15674,7 @@
               </a:defRPr>
             </a:defPPr>
             <a:lvl1pPr>
+              <a:buNone/>
               <a:defRPr sz="975">
                 <a:solidFill>
                   <a:srgbClr val="A8B3C7"/>
@@ -15431,6 +15685,7 @@
               </a:defRPr>
             </a:lvl1pPr>
             <a:lvl2pPr>
+              <a:buNone/>
               <a:defRPr sz="975">
                 <a:solidFill>
                   <a:srgbClr val="A8B3C7"/>
@@ -15441,6 +15696,7 @@
               </a:defRPr>
             </a:lvl2pPr>
             <a:lvl3pPr>
+              <a:buNone/>
               <a:defRPr sz="975">
                 <a:solidFill>
                   <a:srgbClr val="A8B3C7"/>
@@ -15451,6 +15707,7 @@
               </a:defRPr>
             </a:lvl3pPr>
             <a:lvl4pPr>
+              <a:buNone/>
               <a:defRPr sz="975">
                 <a:solidFill>
                   <a:srgbClr val="A8B3C7"/>
@@ -15461,6 +15718,7 @@
               </a:defRPr>
             </a:lvl4pPr>
             <a:lvl5pPr>
+              <a:buNone/>
               <a:defRPr sz="975">
                 <a:solidFill>
                   <a:srgbClr val="A8B3C7"/>
@@ -15471,6 +15729,7 @@
               </a:defRPr>
             </a:lvl5pPr>
             <a:lvl6pPr>
+              <a:buNone/>
               <a:defRPr sz="975">
                 <a:solidFill>
                   <a:srgbClr val="A8B3C7"/>
@@ -15481,6 +15740,7 @@
               </a:defRPr>
             </a:lvl6pPr>
             <a:lvl7pPr>
+              <a:buNone/>
               <a:defRPr sz="975">
                 <a:solidFill>
                   <a:srgbClr val="A8B3C7"/>
@@ -15491,6 +15751,7 @@
               </a:defRPr>
             </a:lvl7pPr>
             <a:lvl8pPr>
+              <a:buNone/>
               <a:defRPr sz="975">
                 <a:solidFill>
                   <a:srgbClr val="A8B3C7"/>
@@ -15501,6 +15762,7 @@
               </a:defRPr>
             </a:lvl8pPr>
             <a:lvl9pPr>
+              <a:buNone/>
               <a:defRPr sz="975">
                 <a:solidFill>
                   <a:srgbClr val="A8B3C7"/>
@@ -15513,6 +15775,7 @@
           </a:lstStyle>
           <a:p xmlns:a="http://schemas.openxmlformats.org/drawingml/2006/main">
             <a:pPr>
+              <a:buNone/>
               <a:defRPr sz="975">
                 <a:solidFill>
                   <a:srgbClr val="A8B3C7"/>
